--- a/10-17-2026/wacc-matchups-oct17.pptx
+++ b/10-17-2026/wacc-matchups-oct17.pptx
@@ -12,7 +12,7 @@
     <p:sldId id="257" r:id="rId3"/>
     <p:sldId id="258" r:id="rId4"/>
     <p:sldId id="260" r:id="rId6"/>
-    <p:sldId id="268" r:id="rId19"/>
+    <p:sldId id="261" r:id="rId7"/>
     <p:sldId id="262" r:id="rId8"/>
     <p:sldId id="263" r:id="rId14"/>
     <p:sldId id="266" r:id="rId17"/>
@@ -3193,8 +3193,8 @@
 </p:sld>
 </file>
 
-<file path=ppt/slides/slide13.xml><?xml version="1.0" encoding="utf-8"?>
-<p:sld xmlns:a="http://schemas.openxmlformats.org/drawingml/2006/main" xmlns:p="http://schemas.openxmlformats.org/presentationml/2006/main" xmlns:r="http://schemas.openxmlformats.org/officeDocument/2006/relationships">
+<file path=ppt/slides/slide2.xml><?xml version="1.0" encoding="utf-8"?>
+<p:sld xmlns:a="http://schemas.openxmlformats.org/drawingml/2006/main" xmlns:r="http://schemas.openxmlformats.org/officeDocument/2006/relationships" xmlns:p="http://schemas.openxmlformats.org/presentationml/2006/main">
   <p:cSld>
     <p:spTree>
       <p:nvGrpSpPr>
@@ -3202,7 +3202,4415 @@
         <p:cNvGrpSpPr/>
         <p:nvPr/>
       </p:nvGrpSpPr>
-      <p:grpSpPr/>
+      <p:grpSpPr>
+        <a:xfrm>
+          <a:off x="0" y="0"/>
+          <a:ext cx="0" cy="0"/>
+          <a:chOff x="0" y="0"/>
+          <a:chExt cx="0" cy="0"/>
+        </a:xfrm>
+      </p:grpSpPr>
+      <p:sp>
+        <p:nvSpPr>
+          <p:cNvPr id="2" name="Time"/>
+          <p:cNvSpPr/>
+          <p:nvPr/>
+        </p:nvSpPr>
+        <p:spPr>
+          <a:xfrm>
+            <a:off x="365760" y="137160"/>
+            <a:ext cx="2743200" cy="502920"/>
+          </a:xfrm>
+          <a:prstGeom prst="rect">
+            <a:avLst/>
+          </a:prstGeom>
+          <a:noFill/>
+          <a:ln/>
+        </p:spPr>
+        <p:txBody>
+          <a:bodyPr wrap="square" lIns="0" tIns="0" rIns="0" bIns="0" rtlCol="0" anchor="ctr"/>
+          <a:lstStyle/>
+          <a:p>
+            <a:pPr marL="0" indent="0" algn="l">
+              <a:buNone/>
+            </a:pPr>
+            <a:r>
+              <a:rPr lang="en-US" sz="3000" b="1" kern="0" spc="100" dirty="0">
+                <a:solidFill>
+                  <a:srgbClr val="0F1B2E"/>
+                </a:solidFill>
+                <a:latin typeface="Arial Black" pitchFamily="34" charset="0"/>
+              </a:rPr>
+              <a:t>8 AM</a:t>
+            </a:r>
+            <a:endParaRPr lang="en-US" sz="3000" dirty="0"/>
+          </a:p>
+        </p:txBody>
+      </p:sp>
+      <p:grpSp>
+        <p:nvGrpSpPr>
+          <p:cNvPr id="60" name="PillGroup"/>
+          <p:cNvGrpSpPr/>
+          <p:nvPr/>
+        </p:nvGrpSpPr>
+        <p:grpSpPr>
+          <a:xfrm>
+            <a:off x="2838288" y="192416"/>
+            <a:ext cx="3467425" cy="429768"/>
+            <a:chOff x="2838288" y="114301"/>
+            <a:chExt cx="3467425" cy="429768"/>
+          </a:xfrm>
+        </p:grpSpPr>
+        <p:sp>
+          <p:nvSpPr>
+            <p:cNvPr id="3" name="Pill"/>
+            <p:cNvSpPr/>
+            <p:nvPr/>
+          </p:nvSpPr>
+          <p:spPr>
+            <a:xfrm>
+              <a:off x="2838288" y="114301"/>
+              <a:ext cx="3467425" cy="429768"/>
+            </a:xfrm>
+            <a:prstGeom prst="roundRect">
+              <a:avLst>
+                <a:gd name="adj" fmla="val 50000"/>
+              </a:avLst>
+            </a:prstGeom>
+            <a:solidFill>
+              <a:srgbClr val="1D4ED8"/>
+            </a:solidFill>
+            <a:ln w="12700">
+              <a:solidFill>
+                <a:srgbClr val="1D4ED8"/>
+              </a:solidFill>
+              <a:prstDash val="solid"/>
+            </a:ln>
+          </p:spPr>
+          <p:txBody>
+            <a:bodyPr/>
+            <a:lstStyle/>
+            <a:p>
+              <a:endParaRPr lang="en-US"/>
+            </a:p>
+          </p:txBody>
+        </p:sp>
+        <p:sp>
+          <p:nvSpPr>
+            <p:cNvPr id="4" name="PillText"/>
+            <p:cNvSpPr/>
+            <p:nvPr/>
+          </p:nvSpPr>
+          <p:spPr>
+            <a:xfrm>
+              <a:off x="3050073" y="164616"/>
+              <a:ext cx="3150000" cy="310896"/>
+            </a:xfrm>
+            <a:prstGeom prst="rect">
+              <a:avLst/>
+            </a:prstGeom>
+            <a:noFill/>
+            <a:ln/>
+          </p:spPr>
+          <p:txBody>
+            <a:bodyPr wrap="none" lIns="0" tIns="0" rIns="0" bIns="0" rtlCol="0" anchor="ctr"/>
+            <a:lstStyle/>
+            <a:p>
+              <a:pPr algn="ctr"/>
+              <a:r>
+                <a:rPr lang="en-US" sz="1100" b="1" kern="0" spc="600" dirty="0">
+                  <a:solidFill>
+                    <a:srgbClr val="FFFFFF"/>
+                  </a:solidFill>
+                  <a:latin typeface="Arial Black" pitchFamily="34" charset="0"/>
+                </a:rPr>
+                <a:t>CLINIC K</a:t>
+              </a:r>
+              <a:endParaRPr lang="en-US" sz="1100" dirty="0"/>
+            </a:p>
+          </p:txBody>
+        </p:sp>
+      </p:grpSp>
+      <p:sp>
+        <p:nvSpPr>
+          <p:cNvPr id="6" name="HRTop"/>
+          <p:cNvSpPr/>
+          <p:nvPr/>
+        </p:nvSpPr>
+        <p:spPr>
+          <a:xfrm>
+            <a:off x="365760" y="713232"/>
+            <a:ext cx="8412480" cy="0"/>
+          </a:xfrm>
+          <a:prstGeom prst="line">
+            <a:avLst/>
+          </a:prstGeom>
+          <a:noFill/>
+          <a:ln w="9525">
+            <a:solidFill>
+              <a:srgbClr val="C9BFAE"/>
+            </a:solidFill>
+            <a:prstDash val="solid"/>
+          </a:ln>
+        </p:spPr>
+        <p:txBody>
+          <a:bodyPr/>
+          <a:lstStyle/>
+          <a:p>
+            <a:endParaRPr lang="en-US"/>
+          </a:p>
+        </p:txBody>
+      </p:sp>
+      <p:sp>
+        <p:nvSpPr>
+          <p:cNvPr id="7" name="CourtRect"/>
+          <p:cNvSpPr/>
+          <p:nvPr/>
+        </p:nvSpPr>
+        <p:spPr>
+          <a:xfrm>
+            <a:off x="457200" y="914400"/>
+            <a:ext cx="8229600" cy="3749040"/>
+          </a:xfrm>
+          <a:prstGeom prst="rect">
+            <a:avLst/>
+          </a:prstGeom>
+          <a:ln w="19050">
+            <a:solidFill>
+              <a:srgbClr val="283241"/>
+            </a:solidFill>
+            <a:prstDash val="solid"/>
+          </a:ln>
+        </p:spPr>
+        <p:txBody>
+          <a:bodyPr/>
+          <a:lstStyle/>
+          <a:p>
+            <a:endParaRPr lang="en-US"/>
+          </a:p>
+        </p:txBody>
+      </p:sp>
+      <p:sp>
+        <p:nvSpPr>
+          <p:cNvPr id="1001" name="HalfCourtTop"/>
+          <p:cNvSpPr/>
+          <p:nvPr/>
+        </p:nvSpPr>
+        <p:spPr>
+          <a:xfrm>
+            <a:off x="4572000" y="914400"/>
+            <a:ext cx="0" cy="1340131"/>
+          </a:xfrm>
+          <a:prstGeom prst="line">
+            <a:avLst/>
+          </a:prstGeom>
+          <a:noFill/>
+          <a:ln w="15875">
+            <a:solidFill>
+              <a:srgbClr val="283241"/>
+            </a:solidFill>
+            <a:prstDash val="solid"/>
+          </a:ln>
+        </p:spPr>
+        <p:txBody>
+          <a:bodyPr/>
+          <a:lstStyle/>
+          <a:p>
+            <a:endParaRPr lang="en-US"/>
+          </a:p>
+        </p:txBody>
+      </p:sp>
+      <p:sp>
+        <p:nvSpPr>
+          <p:cNvPr id="1002" name="HalfCourtBottom"/>
+          <p:cNvSpPr/>
+          <p:nvPr/>
+        </p:nvSpPr>
+        <p:spPr>
+          <a:xfrm>
+            <a:off x="4572000" y="3286733"/>
+            <a:ext cx="0" cy="1376707"/>
+          </a:xfrm>
+          <a:prstGeom prst="line">
+            <a:avLst/>
+          </a:prstGeom>
+          <a:noFill/>
+          <a:ln w="15875">
+            <a:solidFill>
+              <a:srgbClr val="283241"/>
+            </a:solidFill>
+            <a:prstDash val="solid"/>
+          </a:ln>
+        </p:spPr>
+        <p:txBody>
+          <a:bodyPr/>
+          <a:lstStyle/>
+          <a:p>
+            <a:endParaRPr lang="en-US"/>
+          </a:p>
+        </p:txBody>
+      </p:sp>
+      <p:sp>
+        <p:nvSpPr>
+          <p:cNvPr id="10" name="LSquareL"/>
+          <p:cNvSpPr/>
+          <p:nvPr/>
+        </p:nvSpPr>
+        <p:spPr>
+          <a:xfrm>
+            <a:off x="457200" y="1889150"/>
+            <a:ext cx="1728216" cy="1799539"/>
+          </a:xfrm>
+          <a:prstGeom prst="rect">
+            <a:avLst/>
+          </a:prstGeom>
+          <a:ln w="15875">
+            <a:solidFill>
+              <a:srgbClr val="283241"/>
+            </a:solidFill>
+            <a:prstDash val="solid"/>
+          </a:ln>
+        </p:spPr>
+        <p:txBody>
+          <a:bodyPr/>
+          <a:lstStyle/>
+          <a:p>
+            <a:endParaRPr lang="en-US"/>
+          </a:p>
+        </p:txBody>
+      </p:sp>
+      <p:sp>
+        <p:nvSpPr>
+          <p:cNvPr id="11" name="LCircleL"/>
+          <p:cNvSpPr/>
+          <p:nvPr/>
+        </p:nvSpPr>
+        <p:spPr>
+          <a:xfrm>
+            <a:off x="1321637" y="1925141"/>
+            <a:ext cx="1727558" cy="1727558"/>
+          </a:xfrm>
+          <a:prstGeom prst="ellipse">
+            <a:avLst/>
+          </a:prstGeom>
+          <a:ln w="15875">
+            <a:solidFill>
+              <a:srgbClr val="283241"/>
+            </a:solidFill>
+            <a:prstDash val="dash"/>
+          </a:ln>
+        </p:spPr>
+        <p:txBody>
+          <a:bodyPr/>
+          <a:lstStyle/>
+          <a:p>
+            <a:endParaRPr lang="en-US"/>
+          </a:p>
+        </p:txBody>
+      </p:sp>
+      <p:sp>
+        <p:nvSpPr>
+          <p:cNvPr id="12" name="LMaskL"/>
+          <p:cNvSpPr/>
+          <p:nvPr/>
+        </p:nvSpPr>
+        <p:spPr>
+          <a:xfrm>
+            <a:off x="1312493" y="1879421"/>
+            <a:ext cx="882067" cy="1818998"/>
+          </a:xfrm>
+          <a:prstGeom prst="rect">
+            <a:avLst/>
+          </a:prstGeom>
+          <a:solidFill>
+            <a:srgbClr val="FFFFFF"/>
+          </a:solidFill>
+          <a:ln w="12700">
+            <a:solidFill>
+              <a:srgbClr val="FFFFFF"/>
+            </a:solidFill>
+            <a:prstDash val="solid"/>
+          </a:ln>
+        </p:spPr>
+        <p:txBody>
+          <a:bodyPr/>
+          <a:lstStyle/>
+          <a:p>
+            <a:endParaRPr lang="en-US"/>
+          </a:p>
+        </p:txBody>
+      </p:sp>
+      <p:sp>
+        <p:nvSpPr>
+          <p:cNvPr id="13" name="LSquareLOver"/>
+          <p:cNvSpPr/>
+          <p:nvPr/>
+        </p:nvSpPr>
+        <p:spPr>
+          <a:xfrm>
+            <a:off x="457200" y="1889150"/>
+            <a:ext cx="1728216" cy="1799539"/>
+          </a:xfrm>
+          <a:prstGeom prst="rect">
+            <a:avLst/>
+          </a:prstGeom>
+          <a:ln w="15875">
+            <a:solidFill>
+              <a:srgbClr val="283241"/>
+            </a:solidFill>
+            <a:prstDash val="solid"/>
+          </a:ln>
+        </p:spPr>
+        <p:txBody>
+          <a:bodyPr/>
+          <a:lstStyle/>
+          <a:p>
+            <a:endParaRPr lang="en-US"/>
+          </a:p>
+        </p:txBody>
+      </p:sp>
+      <p:sp>
+        <p:nvSpPr>
+          <p:cNvPr id="24" name="RSquareR"/>
+          <p:cNvSpPr/>
+          <p:nvPr/>
+        </p:nvSpPr>
+        <p:spPr>
+          <a:xfrm>
+            <a:off x="6958584" y="1889150"/>
+            <a:ext cx="1728216" cy="1799539"/>
+          </a:xfrm>
+          <a:prstGeom prst="rect">
+            <a:avLst/>
+          </a:prstGeom>
+          <a:ln w="15875">
+            <a:solidFill>
+              <a:srgbClr val="283241"/>
+            </a:solidFill>
+            <a:prstDash val="solid"/>
+          </a:ln>
+        </p:spPr>
+        <p:txBody>
+          <a:bodyPr/>
+          <a:lstStyle/>
+          <a:p>
+            <a:endParaRPr lang="en-US"/>
+          </a:p>
+        </p:txBody>
+      </p:sp>
+      <p:sp>
+        <p:nvSpPr>
+          <p:cNvPr id="25" name="RCircleR"/>
+          <p:cNvSpPr/>
+          <p:nvPr/>
+        </p:nvSpPr>
+        <p:spPr>
+          <a:xfrm>
+            <a:off x="6094805" y="1925141"/>
+            <a:ext cx="1727558" cy="1727558"/>
+          </a:xfrm>
+          <a:prstGeom prst="ellipse">
+            <a:avLst/>
+          </a:prstGeom>
+          <a:ln w="15875">
+            <a:solidFill>
+              <a:srgbClr val="283241"/>
+            </a:solidFill>
+            <a:prstDash val="dash"/>
+          </a:ln>
+        </p:spPr>
+        <p:txBody>
+          <a:bodyPr/>
+          <a:lstStyle/>
+          <a:p>
+            <a:endParaRPr lang="en-US"/>
+          </a:p>
+        </p:txBody>
+      </p:sp>
+      <p:sp>
+        <p:nvSpPr>
+          <p:cNvPr id="26" name="RMaskR"/>
+          <p:cNvSpPr/>
+          <p:nvPr/>
+        </p:nvSpPr>
+        <p:spPr>
+          <a:xfrm>
+            <a:off x="6958584" y="1879421"/>
+            <a:ext cx="882067" cy="1818998"/>
+          </a:xfrm>
+          <a:prstGeom prst="rect">
+            <a:avLst/>
+          </a:prstGeom>
+          <a:solidFill>
+            <a:srgbClr val="FFFFFF"/>
+          </a:solidFill>
+          <a:ln w="12700">
+            <a:solidFill>
+              <a:srgbClr val="FFFFFF"/>
+            </a:solidFill>
+            <a:prstDash val="solid"/>
+          </a:ln>
+        </p:spPr>
+        <p:txBody>
+          <a:bodyPr/>
+          <a:lstStyle/>
+          <a:p>
+            <a:endParaRPr lang="en-US"/>
+          </a:p>
+        </p:txBody>
+      </p:sp>
+      <p:sp>
+        <p:nvSpPr>
+          <p:cNvPr id="27" name="RSquareROver"/>
+          <p:cNvSpPr/>
+          <p:nvPr/>
+        </p:nvSpPr>
+        <p:spPr>
+          <a:xfrm>
+            <a:off x="6958584" y="1889150"/>
+            <a:ext cx="1728216" cy="1799539"/>
+          </a:xfrm>
+          <a:prstGeom prst="rect">
+            <a:avLst/>
+          </a:prstGeom>
+          <a:ln w="15875">
+            <a:solidFill>
+              <a:srgbClr val="283241"/>
+            </a:solidFill>
+            <a:prstDash val="solid"/>
+          </a:ln>
+        </p:spPr>
+        <p:txBody>
+          <a:bodyPr/>
+          <a:lstStyle/>
+          <a:p>
+            <a:endParaRPr lang="en-US"/>
+          </a:p>
+        </p:txBody>
+      </p:sp>
+      <p:sp>
+        <p:nvSpPr>
+          <p:cNvPr id="1003" name="HalfCourtHorizLeft"/>
+          <p:cNvSpPr/>
+          <p:nvPr/>
+        </p:nvSpPr>
+        <p:spPr>
+          <a:xfrm>
+            <a:off x="457200" y="2788920"/>
+            <a:ext cx="3589440" cy="0"/>
+          </a:xfrm>
+          <a:prstGeom prst="line">
+            <a:avLst/>
+          </a:prstGeom>
+          <a:noFill/>
+          <a:ln w="15875">
+            <a:solidFill>
+              <a:srgbClr val="283241"/>
+            </a:solidFill>
+            <a:prstDash val="solid"/>
+          </a:ln>
+        </p:spPr>
+        <p:txBody>
+          <a:bodyPr/>
+          <a:lstStyle/>
+          <a:p>
+            <a:endParaRPr lang="en-US"/>
+          </a:p>
+        </p:txBody>
+      </p:sp>
+      <p:sp>
+        <p:nvSpPr>
+          <p:cNvPr id="1004" name="HalfCourtHorizRight"/>
+          <p:cNvSpPr/>
+          <p:nvPr/>
+        </p:nvSpPr>
+        <p:spPr>
+          <a:xfrm>
+            <a:off x="5078368" y="2788920"/>
+            <a:ext cx="3608432" cy="0"/>
+          </a:xfrm>
+          <a:prstGeom prst="line">
+            <a:avLst/>
+          </a:prstGeom>
+          <a:noFill/>
+          <a:ln w="15875">
+            <a:solidFill>
+              <a:srgbClr val="283241"/>
+            </a:solidFill>
+            <a:prstDash val="solid"/>
+          </a:ln>
+        </p:spPr>
+        <p:txBody>
+          <a:bodyPr/>
+          <a:lstStyle/>
+          <a:p>
+            <a:endParaRPr lang="en-US"/>
+          </a:p>
+        </p:txBody>
+      </p:sp>
+      <p:sp>
+        <p:nvSpPr>
+          <p:cNvPr id="101" name="CardBG"/>
+          <p:cNvSpPr/>
+          <p:nvPr/>
+        </p:nvSpPr>
+        <p:spPr>
+          <a:xfrm>
+            <a:off x="1560900" y="939160"/>
+            <a:ext cx="1907400" cy="1825000"/>
+          </a:xfrm>
+          <a:prstGeom prst="rect">
+            <a:avLst/>
+          </a:prstGeom>
+          <a:solidFill>
+            <a:srgbClr val="FFFFFF"/>
+          </a:solidFill>
+          <a:ln w="9525">
+            <a:solidFill>
+              <a:srgbClr val="E5DFCE"/>
+            </a:solidFill>
+            <a:prstDash val="solid"/>
+          </a:ln>
+          <a:effectLst>
+            <a:outerShdw blurRad="127000" dist="25400" dir="5400000" algn="bl" rotWithShape="0">
+              <a:srgbClr val="000000">
+                <a:alpha val="12000"/>
+              </a:srgbClr>
+            </a:outerShdw>
+          </a:effectLst>
+        </p:spPr>
+        <p:txBody>
+          <a:bodyPr/>
+          <a:lstStyle/>
+          <a:p>
+            <a:endParaRPr lang="en-US" dirty="0"/>
+          </a:p>
+        </p:txBody>
+      </p:sp>
+      <p:sp>
+        <p:nvSpPr>
+          <p:cNvPr id="102" name="CardStripe"/>
+          <p:cNvSpPr/>
+          <p:nvPr/>
+        </p:nvSpPr>
+        <p:spPr>
+          <a:xfrm>
+            <a:off x="1560900" y="939160"/>
+            <a:ext cx="1907400" cy="73152"/>
+          </a:xfrm>
+          <a:prstGeom prst="rect">
+            <a:avLst/>
+          </a:prstGeom>
+          <a:solidFill>
+            <a:srgbClr val="1D4ED8"/>
+          </a:solidFill>
+          <a:ln w="12700">
+            <a:solidFill>
+              <a:srgbClr val="1D4ED8"/>
+            </a:solidFill>
+            <a:prstDash val="solid"/>
+          </a:ln>
+        </p:spPr>
+        <p:txBody>
+          <a:bodyPr/>
+          <a:lstStyle/>
+          <a:p>
+            <a:endParaRPr lang="en-US" dirty="0"/>
+          </a:p>
+        </p:txBody>
+      </p:sp>
+      <p:sp>
+        <p:nvSpPr>
+          <p:cNvPr id="103" name="Label"/>
+          <p:cNvSpPr/>
+          <p:nvPr/>
+        </p:nvSpPr>
+        <p:spPr>
+          <a:xfrm>
+            <a:off x="1743780" y="1029160"/>
+            <a:ext cx="1541640" cy="228600"/>
+          </a:xfrm>
+          <a:prstGeom prst="rect">
+            <a:avLst/>
+          </a:prstGeom>
+          <a:noFill/>
+          <a:ln/>
+        </p:spPr>
+        <p:txBody>
+          <a:bodyPr wrap="square" lIns="0" tIns="0" rIns="0" bIns="0" rtlCol="0" anchor="ctr"/>
+          <a:lstStyle/>
+          <a:p>
+            <a:pPr marL="0" indent="0" algn="l">
+              <a:buNone/>
+            </a:pPr>
+            <a:r>
+              <a:rPr lang="en-US" sz="1000" b="1" kern="0" spc="600" dirty="0">
+                <a:solidFill>
+                  <a:srgbClr val="5B6573"/>
+                </a:solidFill>
+                <a:latin typeface="Arial" pitchFamily="34" charset="0"/>
+              </a:rPr>
+              <a:t>COURT 1</a:t>
+            </a:r>
+            <a:endParaRPr lang="en-US" sz="1000" dirty="0"/>
+          </a:p>
+        </p:txBody>
+      </p:sp>
+      <p:sp>
+        <p:nvSpPr>
+          <p:cNvPr id="104" name="Label"/>
+          <p:cNvSpPr/>
+          <p:nvPr/>
+        </p:nvSpPr>
+        <p:spPr>
+          <a:xfrm>
+            <a:off x="1743780" y="1029160"/>
+            <a:ext cx="1541640" cy="228600"/>
+          </a:xfrm>
+          <a:prstGeom prst="rect">
+            <a:avLst/>
+          </a:prstGeom>
+          <a:noFill/>
+          <a:ln/>
+        </p:spPr>
+        <p:txBody>
+          <a:bodyPr wrap="square" lIns="0" tIns="0" rIns="0" bIns="0" rtlCol="0" anchor="ctr"/>
+          <a:lstStyle/>
+          <a:p>
+            <a:pPr marL="0" indent="0" algn="r">
+              <a:buNone/>
+            </a:pPr>
+            <a:r>
+              <a:rPr lang="en-US" sz="1000" b="1" kern="0" spc="600" dirty="0">
+                <a:solidFill>
+                  <a:srgbClr val="1D4ED8"/>
+                </a:solidFill>
+                <a:latin typeface="Arial" pitchFamily="34" charset="0"/>
+              </a:rPr>
+              <a:t>CK</a:t>
+            </a:r>
+            <a:endParaRPr lang="en-US" sz="1000" dirty="0"/>
+          </a:p>
+        </p:txBody>
+      </p:sp>
+      <p:pic>
+        <p:nvPicPr>
+          <p:cNvPr id="105" name="Jersey"/>
+          <p:cNvPicPr>
+            <a:picLocks noChangeAspect="1"/>
+          </p:cNvPicPr>
+          <p:nvPr/>
+        </p:nvPicPr>
+        <p:blipFill>
+          <a:blip r:embed="rId6"/>
+          <a:srcRect l="16071" t="10057" r="14881" b="8908"/>
+          <a:stretch>
+            <a:fillRect/>
+          </a:stretch>
+        </p:blipFill>
+        <p:spPr>
+          <a:xfrm>
+            <a:off x="1620900" y="1297760"/>
+            <a:ext cx="828700" cy="1044990"/>
+          </a:xfrm>
+          <a:prstGeom prst="rect">
+            <a:avLst/>
+          </a:prstGeom>
+        </p:spPr>
+      </p:pic>
+      <p:pic>
+        <p:nvPicPr>
+          <p:cNvPr id="106" name="Jersey"/>
+          <p:cNvPicPr>
+            <a:picLocks noChangeAspect="1"/>
+          </p:cNvPicPr>
+          <p:nvPr/>
+        </p:nvPicPr>
+        <p:blipFill>
+          <a:blip r:embed="rId3"/>
+          <a:srcRect l="15774" t="8621" r="15476" b="10057"/>
+          <a:stretch>
+            <a:fillRect/>
+          </a:stretch>
+        </p:blipFill>
+        <p:spPr>
+          <a:xfrm>
+            <a:off x="2579600" y="1297760"/>
+            <a:ext cx="828700" cy="1044990"/>
+          </a:xfrm>
+          <a:prstGeom prst="rect">
+            <a:avLst/>
+          </a:prstGeom>
+        </p:spPr>
+      </p:pic>
+      <p:sp>
+        <p:nvSpPr>
+          <p:cNvPr id="107" name="AtLabel"/>
+          <p:cNvSpPr/>
+          <p:nvPr/>
+        </p:nvSpPr>
+        <p:spPr>
+          <a:xfrm>
+            <a:off x="2449600" y="1735255"/>
+            <a:ext cx="170000" cy="170000"/>
+          </a:xfrm>
+          <a:prstGeom prst="rect">
+            <a:avLst/>
+          </a:prstGeom>
+          <a:noFill/>
+          <a:ln/>
+        </p:spPr>
+        <p:txBody>
+          <a:bodyPr wrap="none" lIns="0" tIns="0" rIns="0" bIns="0" rtlCol="0" anchor="ctr"/>
+          <a:lstStyle/>
+          <a:p>
+            <a:pPr marL="0" indent="0" algn="ctr">
+              <a:buNone/>
+            </a:pPr>
+            <a:r>
+              <a:rPr lang="en-US" sz="1200" i="1" kern="0" spc="0" dirty="0">
+                <a:solidFill>
+                  <a:srgbClr val="5B6573"/>
+                </a:solidFill>
+                <a:latin typeface="Arial" pitchFamily="34" charset="0"/>
+              </a:rPr>
+              <a:t>vs</a:t>
+            </a:r>
+            <a:endParaRPr lang="en-US" sz="1200" dirty="0"/>
+          </a:p>
+        </p:txBody>
+      </p:sp>
+      <p:sp>
+        <p:nvSpPr>
+          <p:cNvPr id="108" name="TeamName"/>
+          <p:cNvSpPr/>
+          <p:nvPr/>
+        </p:nvSpPr>
+        <p:spPr>
+          <a:xfrm>
+            <a:off x="1620900" y="2367750"/>
+            <a:ext cx="828700" cy="300000"/>
+          </a:xfrm>
+          <a:prstGeom prst="rect">
+            <a:avLst/>
+          </a:prstGeom>
+          <a:noFill/>
+          <a:ln/>
+        </p:spPr>
+        <p:txBody>
+          <a:bodyPr wrap="square" lIns="0" tIns="0" rIns="0" bIns="0" rtlCol="0" anchor="t"/>
+          <a:lstStyle/>
+          <a:p>
+            <a:pPr marL="0" indent="0" algn="ctr">
+              <a:buNone/>
+            </a:pPr>
+            <a:r>
+              <a:rPr lang="en-US" sz="1100" b="1" kern="0" dirty="0">
+                <a:solidFill>
+                  <a:srgbClr val="0F1B2E"/>
+                </a:solidFill>
+                <a:latin typeface="Arial Black" pitchFamily="34" charset="0"/>
+              </a:rPr>
+              <a:t>The Tigers</a:t>
+            </a:r>
+            <a:endParaRPr lang="en-US" sz="1100" dirty="0"/>
+          </a:p>
+        </p:txBody>
+      </p:sp>
+      <p:sp>
+        <p:nvSpPr>
+          <p:cNvPr id="109" name="TeamName"/>
+          <p:cNvSpPr/>
+          <p:nvPr/>
+        </p:nvSpPr>
+        <p:spPr>
+          <a:xfrm>
+            <a:off x="2579600" y="2367750"/>
+            <a:ext cx="828700" cy="300000"/>
+          </a:xfrm>
+          <a:prstGeom prst="rect">
+            <a:avLst/>
+          </a:prstGeom>
+          <a:noFill/>
+          <a:ln/>
+        </p:spPr>
+        <p:txBody>
+          <a:bodyPr wrap="square" lIns="0" tIns="0" rIns="0" bIns="0" rtlCol="0" anchor="t"/>
+          <a:lstStyle/>
+          <a:p>
+            <a:pPr marL="0" indent="0" algn="ctr">
+              <a:buNone/>
+            </a:pPr>
+            <a:r>
+              <a:rPr lang="en-US" sz="1100" b="1" kern="0" dirty="0">
+                <a:solidFill>
+                  <a:srgbClr val="0F1B2E"/>
+                </a:solidFill>
+                <a:latin typeface="Arial Black" pitchFamily="34" charset="0"/>
+              </a:rPr>
+              <a:t>The Pink Tigers</a:t>
+            </a:r>
+            <a:endParaRPr lang="en-US" sz="1100" dirty="0"/>
+          </a:p>
+        </p:txBody>
+      </p:sp>
+      <p:sp>
+        <p:nvSpPr>
+          <p:cNvPr id="110" name="CardBG"/>
+          <p:cNvSpPr/>
+          <p:nvPr/>
+        </p:nvSpPr>
+        <p:spPr>
+          <a:xfrm>
+            <a:off x="1560900" y="2813680"/>
+            <a:ext cx="1907400" cy="1825000"/>
+          </a:xfrm>
+          <a:prstGeom prst="rect">
+            <a:avLst/>
+          </a:prstGeom>
+          <a:solidFill>
+            <a:srgbClr val="FFFFFF"/>
+          </a:solidFill>
+          <a:ln w="9525">
+            <a:solidFill>
+              <a:srgbClr val="E5DFCE"/>
+            </a:solidFill>
+            <a:prstDash val="solid"/>
+          </a:ln>
+          <a:effectLst>
+            <a:outerShdw blurRad="127000" dist="25400" dir="5400000" algn="bl" rotWithShape="0">
+              <a:srgbClr val="000000">
+                <a:alpha val="12000"/>
+              </a:srgbClr>
+            </a:outerShdw>
+          </a:effectLst>
+        </p:spPr>
+        <p:txBody>
+          <a:bodyPr/>
+          <a:lstStyle/>
+          <a:p>
+            <a:endParaRPr lang="en-US" dirty="0"/>
+          </a:p>
+        </p:txBody>
+      </p:sp>
+      <p:sp>
+        <p:nvSpPr>
+          <p:cNvPr id="111" name="CardStripe"/>
+          <p:cNvSpPr/>
+          <p:nvPr/>
+        </p:nvSpPr>
+        <p:spPr>
+          <a:xfrm>
+            <a:off x="1560900" y="2813680"/>
+            <a:ext cx="1907400" cy="73152"/>
+          </a:xfrm>
+          <a:prstGeom prst="rect">
+            <a:avLst/>
+          </a:prstGeom>
+          <a:solidFill>
+            <a:srgbClr val="1D4ED8"/>
+          </a:solidFill>
+          <a:ln w="12700">
+            <a:solidFill>
+              <a:srgbClr val="1D4ED8"/>
+            </a:solidFill>
+            <a:prstDash val="solid"/>
+          </a:ln>
+        </p:spPr>
+        <p:txBody>
+          <a:bodyPr/>
+          <a:lstStyle/>
+          <a:p>
+            <a:endParaRPr lang="en-US" dirty="0"/>
+          </a:p>
+        </p:txBody>
+      </p:sp>
+      <p:sp>
+        <p:nvSpPr>
+          <p:cNvPr id="112" name="Label"/>
+          <p:cNvSpPr/>
+          <p:nvPr/>
+        </p:nvSpPr>
+        <p:spPr>
+          <a:xfrm>
+            <a:off x="1743780" y="2903680"/>
+            <a:ext cx="1541640" cy="228600"/>
+          </a:xfrm>
+          <a:prstGeom prst="rect">
+            <a:avLst/>
+          </a:prstGeom>
+          <a:noFill/>
+          <a:ln/>
+        </p:spPr>
+        <p:txBody>
+          <a:bodyPr wrap="square" lIns="0" tIns="0" rIns="0" bIns="0" rtlCol="0" anchor="ctr"/>
+          <a:lstStyle/>
+          <a:p>
+            <a:pPr marL="0" indent="0" algn="l">
+              <a:buNone/>
+            </a:pPr>
+            <a:r>
+              <a:rPr lang="en-US" sz="1000" b="1" kern="0" spc="600" dirty="0">
+                <a:solidFill>
+                  <a:srgbClr val="5B6573"/>
+                </a:solidFill>
+                <a:latin typeface="Arial" pitchFamily="34" charset="0"/>
+              </a:rPr>
+              <a:t>COURT 2</a:t>
+            </a:r>
+            <a:endParaRPr lang="en-US" sz="1000" dirty="0"/>
+          </a:p>
+        </p:txBody>
+      </p:sp>
+      <p:sp>
+        <p:nvSpPr>
+          <p:cNvPr id="113" name="Label"/>
+          <p:cNvSpPr/>
+          <p:nvPr/>
+        </p:nvSpPr>
+        <p:spPr>
+          <a:xfrm>
+            <a:off x="1743780" y="2903680"/>
+            <a:ext cx="1541640" cy="228600"/>
+          </a:xfrm>
+          <a:prstGeom prst="rect">
+            <a:avLst/>
+          </a:prstGeom>
+          <a:noFill/>
+          <a:ln/>
+        </p:spPr>
+        <p:txBody>
+          <a:bodyPr wrap="square" lIns="0" tIns="0" rIns="0" bIns="0" rtlCol="0" anchor="ctr"/>
+          <a:lstStyle/>
+          <a:p>
+            <a:pPr marL="0" indent="0" algn="r">
+              <a:buNone/>
+            </a:pPr>
+            <a:r>
+              <a:rPr lang="en-US" sz="1000" b="1" kern="0" spc="600" dirty="0">
+                <a:solidFill>
+                  <a:srgbClr val="1D4ED8"/>
+                </a:solidFill>
+                <a:latin typeface="Arial" pitchFamily="34" charset="0"/>
+              </a:rPr>
+              <a:t>CK</a:t>
+            </a:r>
+            <a:endParaRPr lang="en-US" sz="1000" dirty="0"/>
+          </a:p>
+        </p:txBody>
+      </p:sp>
+      <p:pic>
+        <p:nvPicPr>
+          <p:cNvPr id="114" name="Jersey"/>
+          <p:cNvPicPr>
+            <a:picLocks noChangeAspect="1"/>
+          </p:cNvPicPr>
+          <p:nvPr/>
+        </p:nvPicPr>
+        <p:blipFill>
+          <a:blip r:embed="rId9"/>
+          <a:srcRect l="15476" t="8908" r="15476" b="10057"/>
+          <a:stretch>
+            <a:fillRect/>
+          </a:stretch>
+        </p:blipFill>
+        <p:spPr>
+          <a:xfrm>
+            <a:off x="1620900" y="3172280"/>
+            <a:ext cx="828700" cy="1044990"/>
+          </a:xfrm>
+          <a:prstGeom prst="rect">
+            <a:avLst/>
+          </a:prstGeom>
+        </p:spPr>
+      </p:pic>
+      <p:pic>
+        <p:nvPicPr>
+          <p:cNvPr id="115" name="Jersey"/>
+          <p:cNvPicPr>
+            <a:picLocks noChangeAspect="1"/>
+          </p:cNvPicPr>
+          <p:nvPr/>
+        </p:nvPicPr>
+        <p:blipFill>
+          <a:blip r:embed="rId2"/>
+          <a:srcRect l="15179" t="8908" r="15179" b="9770"/>
+          <a:stretch>
+            <a:fillRect/>
+          </a:stretch>
+        </p:blipFill>
+        <p:spPr>
+          <a:xfrm>
+            <a:off x="2579600" y="3172280"/>
+            <a:ext cx="828700" cy="1044990"/>
+          </a:xfrm>
+          <a:prstGeom prst="rect">
+            <a:avLst/>
+          </a:prstGeom>
+        </p:spPr>
+      </p:pic>
+      <p:sp>
+        <p:nvSpPr>
+          <p:cNvPr id="116" name="AtLabel"/>
+          <p:cNvSpPr/>
+          <p:nvPr/>
+        </p:nvSpPr>
+        <p:spPr>
+          <a:xfrm>
+            <a:off x="2449600" y="3609775"/>
+            <a:ext cx="170000" cy="170000"/>
+          </a:xfrm>
+          <a:prstGeom prst="rect">
+            <a:avLst/>
+          </a:prstGeom>
+          <a:noFill/>
+          <a:ln/>
+        </p:spPr>
+        <p:txBody>
+          <a:bodyPr wrap="none" lIns="0" tIns="0" rIns="0" bIns="0" rtlCol="0" anchor="ctr"/>
+          <a:lstStyle/>
+          <a:p>
+            <a:pPr marL="0" indent="0" algn="ctr">
+              <a:buNone/>
+            </a:pPr>
+            <a:r>
+              <a:rPr lang="en-US" sz="1200" i="1" kern="0" spc="0" dirty="0">
+                <a:solidFill>
+                  <a:srgbClr val="5B6573"/>
+                </a:solidFill>
+                <a:latin typeface="Arial" pitchFamily="34" charset="0"/>
+              </a:rPr>
+              <a:t>vs</a:t>
+            </a:r>
+            <a:endParaRPr lang="en-US" sz="1200" dirty="0"/>
+          </a:p>
+        </p:txBody>
+      </p:sp>
+      <p:sp>
+        <p:nvSpPr>
+          <p:cNvPr id="117" name="TeamName"/>
+          <p:cNvSpPr/>
+          <p:nvPr/>
+        </p:nvSpPr>
+        <p:spPr>
+          <a:xfrm>
+            <a:off x="1620900" y="4242270"/>
+            <a:ext cx="828700" cy="300000"/>
+          </a:xfrm>
+          <a:prstGeom prst="rect">
+            <a:avLst/>
+          </a:prstGeom>
+          <a:noFill/>
+          <a:ln/>
+        </p:spPr>
+        <p:txBody>
+          <a:bodyPr wrap="square" lIns="0" tIns="0" rIns="0" bIns="0" rtlCol="0" anchor="t"/>
+          <a:lstStyle/>
+          <a:p>
+            <a:pPr marL="0" indent="0" algn="ctr">
+              <a:buNone/>
+            </a:pPr>
+            <a:r>
+              <a:rPr lang="en-US" sz="1100" b="1" kern="0" dirty="0">
+                <a:solidFill>
+                  <a:srgbClr val="0F1B2E"/>
+                </a:solidFill>
+                <a:latin typeface="Arial Black" pitchFamily="34" charset="0"/>
+              </a:rPr>
+              <a:t>Green Dragons</a:t>
+            </a:r>
+            <a:endParaRPr lang="en-US" sz="1100" dirty="0"/>
+          </a:p>
+        </p:txBody>
+      </p:sp>
+      <p:sp>
+        <p:nvSpPr>
+          <p:cNvPr id="118" name="TeamName"/>
+          <p:cNvSpPr/>
+          <p:nvPr/>
+        </p:nvSpPr>
+        <p:spPr>
+          <a:xfrm>
+            <a:off x="2579600" y="4242270"/>
+            <a:ext cx="828700" cy="300000"/>
+          </a:xfrm>
+          <a:prstGeom prst="rect">
+            <a:avLst/>
+          </a:prstGeom>
+          <a:noFill/>
+          <a:ln/>
+        </p:spPr>
+        <p:txBody>
+          <a:bodyPr wrap="square" lIns="0" tIns="0" rIns="0" bIns="0" rtlCol="0" anchor="t"/>
+          <a:lstStyle/>
+          <a:p>
+            <a:pPr marL="0" indent="0" algn="ctr">
+              <a:buNone/>
+            </a:pPr>
+            <a:r>
+              <a:rPr lang="en-US" sz="1100" b="1" kern="0" dirty="0">
+                <a:solidFill>
+                  <a:srgbClr val="0F1B2E"/>
+                </a:solidFill>
+                <a:latin typeface="Arial Black" pitchFamily="34" charset="0"/>
+              </a:rPr>
+              <a:t>Team 2</a:t>
+            </a:r>
+            <a:endParaRPr lang="en-US" sz="1100" dirty="0"/>
+          </a:p>
+        </p:txBody>
+      </p:sp>
+      <p:sp>
+        <p:nvSpPr>
+          <p:cNvPr id="119" name="CardBG"/>
+          <p:cNvSpPr/>
+          <p:nvPr/>
+        </p:nvSpPr>
+        <p:spPr>
+          <a:xfrm>
+            <a:off x="5675700" y="939160"/>
+            <a:ext cx="1907400" cy="1825000"/>
+          </a:xfrm>
+          <a:prstGeom prst="rect">
+            <a:avLst/>
+          </a:prstGeom>
+          <a:solidFill>
+            <a:srgbClr val="FFFFFF"/>
+          </a:solidFill>
+          <a:ln w="9525">
+            <a:solidFill>
+              <a:srgbClr val="E5DFCE"/>
+            </a:solidFill>
+            <a:prstDash val="solid"/>
+          </a:ln>
+          <a:effectLst>
+            <a:outerShdw blurRad="127000" dist="25400" dir="5400000" algn="bl" rotWithShape="0">
+              <a:srgbClr val="000000">
+                <a:alpha val="12000"/>
+              </a:srgbClr>
+            </a:outerShdw>
+          </a:effectLst>
+        </p:spPr>
+        <p:txBody>
+          <a:bodyPr/>
+          <a:lstStyle/>
+          <a:p>
+            <a:endParaRPr lang="en-US" dirty="0"/>
+          </a:p>
+        </p:txBody>
+      </p:sp>
+      <p:sp>
+        <p:nvSpPr>
+          <p:cNvPr id="120" name="CardStripe"/>
+          <p:cNvSpPr/>
+          <p:nvPr/>
+        </p:nvSpPr>
+        <p:spPr>
+          <a:xfrm>
+            <a:off x="5675700" y="939160"/>
+            <a:ext cx="1907400" cy="73152"/>
+          </a:xfrm>
+          <a:prstGeom prst="rect">
+            <a:avLst/>
+          </a:prstGeom>
+          <a:solidFill>
+            <a:srgbClr val="1D4ED8"/>
+          </a:solidFill>
+          <a:ln w="12700">
+            <a:solidFill>
+              <a:srgbClr val="1D4ED8"/>
+            </a:solidFill>
+            <a:prstDash val="solid"/>
+          </a:ln>
+        </p:spPr>
+        <p:txBody>
+          <a:bodyPr/>
+          <a:lstStyle/>
+          <a:p>
+            <a:endParaRPr lang="en-US" dirty="0"/>
+          </a:p>
+        </p:txBody>
+      </p:sp>
+      <p:sp>
+        <p:nvSpPr>
+          <p:cNvPr id="121" name="Label"/>
+          <p:cNvSpPr/>
+          <p:nvPr/>
+        </p:nvSpPr>
+        <p:spPr>
+          <a:xfrm>
+            <a:off x="5858580" y="1029160"/>
+            <a:ext cx="1541640" cy="228600"/>
+          </a:xfrm>
+          <a:prstGeom prst="rect">
+            <a:avLst/>
+          </a:prstGeom>
+          <a:noFill/>
+          <a:ln/>
+        </p:spPr>
+        <p:txBody>
+          <a:bodyPr wrap="square" lIns="0" tIns="0" rIns="0" bIns="0" rtlCol="0" anchor="ctr"/>
+          <a:lstStyle/>
+          <a:p>
+            <a:pPr marL="0" indent="0" algn="l">
+              <a:buNone/>
+            </a:pPr>
+            <a:r>
+              <a:rPr lang="en-US" sz="1000" b="1" kern="0" spc="600" dirty="0">
+                <a:solidFill>
+                  <a:srgbClr val="5B6573"/>
+                </a:solidFill>
+                <a:latin typeface="Arial" pitchFamily="34" charset="0"/>
+              </a:rPr>
+              <a:t>COURT 3</a:t>
+            </a:r>
+            <a:endParaRPr lang="en-US" sz="1000" dirty="0"/>
+          </a:p>
+        </p:txBody>
+      </p:sp>
+      <p:sp>
+        <p:nvSpPr>
+          <p:cNvPr id="122" name="Label"/>
+          <p:cNvSpPr/>
+          <p:nvPr/>
+        </p:nvSpPr>
+        <p:spPr>
+          <a:xfrm>
+            <a:off x="5858580" y="1029160"/>
+            <a:ext cx="1541640" cy="228600"/>
+          </a:xfrm>
+          <a:prstGeom prst="rect">
+            <a:avLst/>
+          </a:prstGeom>
+          <a:noFill/>
+          <a:ln/>
+        </p:spPr>
+        <p:txBody>
+          <a:bodyPr wrap="square" lIns="0" tIns="0" rIns="0" bIns="0" rtlCol="0" anchor="ctr"/>
+          <a:lstStyle/>
+          <a:p>
+            <a:pPr marL="0" indent="0" algn="r">
+              <a:buNone/>
+            </a:pPr>
+            <a:r>
+              <a:rPr lang="en-US" sz="1000" b="1" kern="0" spc="600" dirty="0">
+                <a:solidFill>
+                  <a:srgbClr val="1D4ED8"/>
+                </a:solidFill>
+                <a:latin typeface="Arial" pitchFamily="34" charset="0"/>
+              </a:rPr>
+              <a:t>CK</a:t>
+            </a:r>
+            <a:endParaRPr lang="en-US" sz="1000" dirty="0"/>
+          </a:p>
+        </p:txBody>
+      </p:sp>
+      <p:pic>
+        <p:nvPicPr>
+          <p:cNvPr id="123" name="Jersey"/>
+          <p:cNvPicPr>
+            <a:picLocks noChangeAspect="1"/>
+          </p:cNvPicPr>
+          <p:nvPr/>
+        </p:nvPicPr>
+        <p:blipFill>
+          <a:blip r:embed="rId8"/>
+          <a:srcRect l="16667" t="10057" r="15179" b="9195"/>
+          <a:stretch>
+            <a:fillRect/>
+          </a:stretch>
+        </p:blipFill>
+        <p:spPr>
+          <a:xfrm>
+            <a:off x="5735700" y="1297760"/>
+            <a:ext cx="828700" cy="1044990"/>
+          </a:xfrm>
+          <a:prstGeom prst="rect">
+            <a:avLst/>
+          </a:prstGeom>
+        </p:spPr>
+      </p:pic>
+      <p:pic>
+        <p:nvPicPr>
+          <p:cNvPr id="124" name="Jersey"/>
+          <p:cNvPicPr>
+            <a:picLocks noChangeAspect="1"/>
+          </p:cNvPicPr>
+          <p:nvPr/>
+        </p:nvPicPr>
+        <p:blipFill>
+          <a:blip r:embed="rId5"/>
+          <a:srcRect l="16071" t="8621" r="15774" b="10057"/>
+          <a:stretch>
+            <a:fillRect/>
+          </a:stretch>
+        </p:blipFill>
+        <p:spPr>
+          <a:xfrm>
+            <a:off x="6694400" y="1297760"/>
+            <a:ext cx="828700" cy="1044990"/>
+          </a:xfrm>
+          <a:prstGeom prst="rect">
+            <a:avLst/>
+          </a:prstGeom>
+        </p:spPr>
+      </p:pic>
+      <p:sp>
+        <p:nvSpPr>
+          <p:cNvPr id="125" name="AtLabel"/>
+          <p:cNvSpPr/>
+          <p:nvPr/>
+        </p:nvSpPr>
+        <p:spPr>
+          <a:xfrm>
+            <a:off x="6564400" y="1735255"/>
+            <a:ext cx="170000" cy="170000"/>
+          </a:xfrm>
+          <a:prstGeom prst="rect">
+            <a:avLst/>
+          </a:prstGeom>
+          <a:noFill/>
+          <a:ln/>
+        </p:spPr>
+        <p:txBody>
+          <a:bodyPr wrap="none" lIns="0" tIns="0" rIns="0" bIns="0" rtlCol="0" anchor="ctr"/>
+          <a:lstStyle/>
+          <a:p>
+            <a:pPr marL="0" indent="0" algn="ctr">
+              <a:buNone/>
+            </a:pPr>
+            <a:r>
+              <a:rPr lang="en-US" sz="1200" i="1" kern="0" spc="0" dirty="0">
+                <a:solidFill>
+                  <a:srgbClr val="5B6573"/>
+                </a:solidFill>
+                <a:latin typeface="Arial" pitchFamily="34" charset="0"/>
+              </a:rPr>
+              <a:t>vs</a:t>
+            </a:r>
+            <a:endParaRPr lang="en-US" sz="1200" dirty="0"/>
+          </a:p>
+        </p:txBody>
+      </p:sp>
+      <p:sp>
+        <p:nvSpPr>
+          <p:cNvPr id="126" name="TeamName"/>
+          <p:cNvSpPr/>
+          <p:nvPr/>
+        </p:nvSpPr>
+        <p:spPr>
+          <a:xfrm>
+            <a:off x="5735700" y="2367750"/>
+            <a:ext cx="828700" cy="300000"/>
+          </a:xfrm>
+          <a:prstGeom prst="rect">
+            <a:avLst/>
+          </a:prstGeom>
+          <a:noFill/>
+          <a:ln/>
+        </p:spPr>
+        <p:txBody>
+          <a:bodyPr wrap="square" lIns="0" tIns="0" rIns="0" bIns="0" rtlCol="0" anchor="t"/>
+          <a:lstStyle/>
+          <a:p>
+            <a:pPr marL="0" indent="0" algn="ctr">
+              <a:buNone/>
+            </a:pPr>
+            <a:r>
+              <a:rPr lang="en-US" sz="1100" b="1" kern="0" dirty="0">
+                <a:solidFill>
+                  <a:srgbClr val="0F1B2E"/>
+                </a:solidFill>
+                <a:latin typeface="Arial Black" pitchFamily="34" charset="0"/>
+              </a:rPr>
+              <a:t>Purple Hippos</a:t>
+            </a:r>
+            <a:endParaRPr lang="en-US" sz="1100" dirty="0"/>
+          </a:p>
+        </p:txBody>
+      </p:sp>
+      <p:sp>
+        <p:nvSpPr>
+          <p:cNvPr id="127" name="TeamName"/>
+          <p:cNvSpPr/>
+          <p:nvPr/>
+        </p:nvSpPr>
+        <p:spPr>
+          <a:xfrm>
+            <a:off x="6694400" y="2367750"/>
+            <a:ext cx="828700" cy="300000"/>
+          </a:xfrm>
+          <a:prstGeom prst="rect">
+            <a:avLst/>
+          </a:prstGeom>
+          <a:noFill/>
+          <a:ln/>
+        </p:spPr>
+        <p:txBody>
+          <a:bodyPr wrap="square" lIns="0" tIns="0" rIns="0" bIns="0" rtlCol="0" anchor="t"/>
+          <a:lstStyle/>
+          <a:p>
+            <a:pPr marL="0" indent="0" algn="ctr">
+              <a:buNone/>
+            </a:pPr>
+            <a:r>
+              <a:rPr lang="en-US" sz="1100" b="1" kern="0" dirty="0">
+                <a:solidFill>
+                  <a:srgbClr val="0F1B2E"/>
+                </a:solidFill>
+                <a:latin typeface="Arial Black" pitchFamily="34" charset="0"/>
+              </a:rPr>
+              <a:t>Team 3</a:t>
+            </a:r>
+            <a:endParaRPr lang="en-US" sz="1100" dirty="0"/>
+          </a:p>
+        </p:txBody>
+      </p:sp>
+      <p:sp>
+        <p:nvSpPr>
+          <p:cNvPr id="128" name="CardBG"/>
+          <p:cNvSpPr/>
+          <p:nvPr/>
+        </p:nvSpPr>
+        <p:spPr>
+          <a:xfrm>
+            <a:off x="5675700" y="2813680"/>
+            <a:ext cx="1907400" cy="1825000"/>
+          </a:xfrm>
+          <a:prstGeom prst="rect">
+            <a:avLst/>
+          </a:prstGeom>
+          <a:solidFill>
+            <a:srgbClr val="FFFFFF"/>
+          </a:solidFill>
+          <a:ln w="9525">
+            <a:solidFill>
+              <a:srgbClr val="E5DFCE"/>
+            </a:solidFill>
+            <a:prstDash val="solid"/>
+          </a:ln>
+          <a:effectLst>
+            <a:outerShdw blurRad="127000" dist="25400" dir="5400000" algn="bl" rotWithShape="0">
+              <a:srgbClr val="000000">
+                <a:alpha val="12000"/>
+              </a:srgbClr>
+            </a:outerShdw>
+          </a:effectLst>
+        </p:spPr>
+        <p:txBody>
+          <a:bodyPr/>
+          <a:lstStyle/>
+          <a:p>
+            <a:endParaRPr lang="en-US" dirty="0"/>
+          </a:p>
+        </p:txBody>
+      </p:sp>
+      <p:sp>
+        <p:nvSpPr>
+          <p:cNvPr id="129" name="CardStripe"/>
+          <p:cNvSpPr/>
+          <p:nvPr/>
+        </p:nvSpPr>
+        <p:spPr>
+          <a:xfrm>
+            <a:off x="5675700" y="2813680"/>
+            <a:ext cx="1907400" cy="73152"/>
+          </a:xfrm>
+          <a:prstGeom prst="rect">
+            <a:avLst/>
+          </a:prstGeom>
+          <a:solidFill>
+            <a:srgbClr val="1D4ED8"/>
+          </a:solidFill>
+          <a:ln w="12700">
+            <a:solidFill>
+              <a:srgbClr val="1D4ED8"/>
+            </a:solidFill>
+            <a:prstDash val="solid"/>
+          </a:ln>
+        </p:spPr>
+        <p:txBody>
+          <a:bodyPr/>
+          <a:lstStyle/>
+          <a:p>
+            <a:endParaRPr lang="en-US" dirty="0"/>
+          </a:p>
+        </p:txBody>
+      </p:sp>
+      <p:sp>
+        <p:nvSpPr>
+          <p:cNvPr id="130" name="Label"/>
+          <p:cNvSpPr/>
+          <p:nvPr/>
+        </p:nvSpPr>
+        <p:spPr>
+          <a:xfrm>
+            <a:off x="5858580" y="2903680"/>
+            <a:ext cx="1541640" cy="228600"/>
+          </a:xfrm>
+          <a:prstGeom prst="rect">
+            <a:avLst/>
+          </a:prstGeom>
+          <a:noFill/>
+          <a:ln/>
+        </p:spPr>
+        <p:txBody>
+          <a:bodyPr wrap="square" lIns="0" tIns="0" rIns="0" bIns="0" rtlCol="0" anchor="ctr"/>
+          <a:lstStyle/>
+          <a:p>
+            <a:pPr marL="0" indent="0" algn="l">
+              <a:buNone/>
+            </a:pPr>
+            <a:r>
+              <a:rPr lang="en-US" sz="1000" b="1" kern="0" spc="600" dirty="0">
+                <a:solidFill>
+                  <a:srgbClr val="5B6573"/>
+                </a:solidFill>
+                <a:latin typeface="Arial" pitchFamily="34" charset="0"/>
+              </a:rPr>
+              <a:t>COURT 4</a:t>
+            </a:r>
+            <a:endParaRPr lang="en-US" sz="1000" dirty="0"/>
+          </a:p>
+        </p:txBody>
+      </p:sp>
+      <p:sp>
+        <p:nvSpPr>
+          <p:cNvPr id="131" name="Label"/>
+          <p:cNvSpPr/>
+          <p:nvPr/>
+        </p:nvSpPr>
+        <p:spPr>
+          <a:xfrm>
+            <a:off x="5858580" y="2903680"/>
+            <a:ext cx="1541640" cy="228600"/>
+          </a:xfrm>
+          <a:prstGeom prst="rect">
+            <a:avLst/>
+          </a:prstGeom>
+          <a:noFill/>
+          <a:ln/>
+        </p:spPr>
+        <p:txBody>
+          <a:bodyPr wrap="square" lIns="0" tIns="0" rIns="0" bIns="0" rtlCol="0" anchor="ctr"/>
+          <a:lstStyle/>
+          <a:p>
+            <a:pPr marL="0" indent="0" algn="r">
+              <a:buNone/>
+            </a:pPr>
+            <a:r>
+              <a:rPr lang="en-US" sz="1000" b="1" kern="0" spc="600" dirty="0">
+                <a:solidFill>
+                  <a:srgbClr val="1D4ED8"/>
+                </a:solidFill>
+                <a:latin typeface="Arial" pitchFamily="34" charset="0"/>
+              </a:rPr>
+              <a:t>CK</a:t>
+            </a:r>
+            <a:endParaRPr lang="en-US" sz="1000" dirty="0"/>
+          </a:p>
+        </p:txBody>
+      </p:sp>
+      <p:pic>
+        <p:nvPicPr>
+          <p:cNvPr id="132" name="Jersey"/>
+          <p:cNvPicPr>
+            <a:picLocks noChangeAspect="1"/>
+          </p:cNvPicPr>
+          <p:nvPr/>
+        </p:nvPicPr>
+        <p:blipFill>
+          <a:blip r:embed="rId4"/>
+          <a:srcRect l="16369" t="10057" r="14881" b="9195"/>
+          <a:stretch>
+            <a:fillRect/>
+          </a:stretch>
+        </p:blipFill>
+        <p:spPr>
+          <a:xfrm>
+            <a:off x="5735700" y="3172280"/>
+            <a:ext cx="828700" cy="1044990"/>
+          </a:xfrm>
+          <a:prstGeom prst="rect">
+            <a:avLst/>
+          </a:prstGeom>
+        </p:spPr>
+      </p:pic>
+      <p:pic>
+        <p:nvPicPr>
+          <p:cNvPr id="133" name="Jersey"/>
+          <p:cNvPicPr>
+            <a:picLocks noChangeAspect="1"/>
+          </p:cNvPicPr>
+          <p:nvPr/>
+        </p:nvPicPr>
+        <p:blipFill>
+          <a:blip r:embed="rId7"/>
+          <a:srcRect l="16071" t="10057" r="15179" b="8908"/>
+          <a:stretch>
+            <a:fillRect/>
+          </a:stretch>
+        </p:blipFill>
+        <p:spPr>
+          <a:xfrm>
+            <a:off x="6694400" y="3172280"/>
+            <a:ext cx="828700" cy="1044990"/>
+          </a:xfrm>
+          <a:prstGeom prst="rect">
+            <a:avLst/>
+          </a:prstGeom>
+        </p:spPr>
+      </p:pic>
+      <p:sp>
+        <p:nvSpPr>
+          <p:cNvPr id="134" name="AtLabel"/>
+          <p:cNvSpPr/>
+          <p:nvPr/>
+        </p:nvSpPr>
+        <p:spPr>
+          <a:xfrm>
+            <a:off x="6564400" y="3609775"/>
+            <a:ext cx="170000" cy="170000"/>
+          </a:xfrm>
+          <a:prstGeom prst="rect">
+            <a:avLst/>
+          </a:prstGeom>
+          <a:noFill/>
+          <a:ln/>
+        </p:spPr>
+        <p:txBody>
+          <a:bodyPr wrap="none" lIns="0" tIns="0" rIns="0" bIns="0" rtlCol="0" anchor="ctr"/>
+          <a:lstStyle/>
+          <a:p>
+            <a:pPr marL="0" indent="0" algn="ctr">
+              <a:buNone/>
+            </a:pPr>
+            <a:r>
+              <a:rPr lang="en-US" sz="1200" i="1" kern="0" spc="0" dirty="0">
+                <a:solidFill>
+                  <a:srgbClr val="5B6573"/>
+                </a:solidFill>
+                <a:latin typeface="Arial" pitchFamily="34" charset="0"/>
+              </a:rPr>
+              <a:t>vs</a:t>
+            </a:r>
+            <a:endParaRPr lang="en-US" sz="1200" dirty="0"/>
+          </a:p>
+        </p:txBody>
+      </p:sp>
+      <p:sp>
+        <p:nvSpPr>
+          <p:cNvPr id="135" name="TeamName"/>
+          <p:cNvSpPr/>
+          <p:nvPr/>
+        </p:nvSpPr>
+        <p:spPr>
+          <a:xfrm>
+            <a:off x="5735700" y="4242270"/>
+            <a:ext cx="828700" cy="300000"/>
+          </a:xfrm>
+          <a:prstGeom prst="rect">
+            <a:avLst/>
+          </a:prstGeom>
+          <a:noFill/>
+          <a:ln/>
+        </p:spPr>
+        <p:txBody>
+          <a:bodyPr wrap="square" lIns="0" tIns="0" rIns="0" bIns="0" rtlCol="0" anchor="t"/>
+          <a:lstStyle/>
+          <a:p>
+            <a:pPr marL="0" indent="0" algn="ctr">
+              <a:buNone/>
+            </a:pPr>
+            <a:r>
+              <a:rPr lang="en-US" sz="1100" b="1" kern="0" dirty="0">
+                <a:solidFill>
+                  <a:srgbClr val="0F1B2E"/>
+                </a:solidFill>
+                <a:latin typeface="Arial Black" pitchFamily="34" charset="0"/>
+              </a:rPr>
+              <a:t>Team 5</a:t>
+            </a:r>
+            <a:endParaRPr lang="en-US" sz="1100" dirty="0"/>
+          </a:p>
+        </p:txBody>
+      </p:sp>
+      <p:sp>
+        <p:nvSpPr>
+          <p:cNvPr id="136" name="TeamName"/>
+          <p:cNvSpPr/>
+          <p:nvPr/>
+        </p:nvSpPr>
+        <p:spPr>
+          <a:xfrm>
+            <a:off x="6694400" y="4242270"/>
+            <a:ext cx="828700" cy="300000"/>
+          </a:xfrm>
+          <a:prstGeom prst="rect">
+            <a:avLst/>
+          </a:prstGeom>
+          <a:noFill/>
+          <a:ln/>
+        </p:spPr>
+        <p:txBody>
+          <a:bodyPr wrap="square" lIns="0" tIns="0" rIns="0" bIns="0" rtlCol="0" anchor="t"/>
+          <a:lstStyle/>
+          <a:p>
+            <a:pPr marL="0" indent="0" algn="ctr">
+              <a:buNone/>
+            </a:pPr>
+            <a:r>
+              <a:rPr lang="en-US" sz="1100" b="1" kern="0" dirty="0">
+                <a:solidFill>
+                  <a:srgbClr val="0F1B2E"/>
+                </a:solidFill>
+                <a:latin typeface="Arial Black" pitchFamily="34" charset="0"/>
+              </a:rPr>
+              <a:t>Black Panthers</a:t>
+            </a:r>
+            <a:endParaRPr lang="en-US" sz="1100" dirty="0"/>
+          </a:p>
+        </p:txBody>
+      </p:sp>
+      <p:sp>
+        <p:nvSpPr>
+          <p:cNvPr id="57" name="HRBottom"/>
+          <p:cNvSpPr/>
+          <p:nvPr/>
+        </p:nvSpPr>
+        <p:spPr>
+          <a:xfrm>
+            <a:off x="365760" y="4828032"/>
+            <a:ext cx="8412480" cy="0"/>
+          </a:xfrm>
+          <a:prstGeom prst="line">
+            <a:avLst/>
+          </a:prstGeom>
+          <a:noFill/>
+          <a:ln w="9525">
+            <a:solidFill>
+              <a:srgbClr val="C9BFAE"/>
+            </a:solidFill>
+            <a:prstDash val="solid"/>
+          </a:ln>
+        </p:spPr>
+        <p:txBody>
+          <a:bodyPr/>
+          <a:lstStyle/>
+          <a:p>
+            <a:endParaRPr lang="en-US"/>
+          </a:p>
+        </p:txBody>
+      </p:sp>
+      <p:sp>
+        <p:nvSpPr>
+          <p:cNvPr id="58" name="FooterL"/>
+          <p:cNvSpPr/>
+          <p:nvPr/>
+        </p:nvSpPr>
+        <p:spPr>
+          <a:xfrm>
+            <a:off x="365760" y="4892040"/>
+            <a:ext cx="3657600" cy="228600"/>
+          </a:xfrm>
+          <a:prstGeom prst="rect">
+            <a:avLst/>
+          </a:prstGeom>
+          <a:noFill/>
+          <a:ln/>
+        </p:spPr>
+        <p:txBody>
+          <a:bodyPr wrap="square" lIns="0" tIns="0" rIns="0" bIns="0" rtlCol="0" anchor="ctr"/>
+          <a:lstStyle/>
+          <a:p>
+            <a:pPr marL="0" indent="0" algn="l">
+              <a:buNone/>
+            </a:pPr>
+            <a:r>
+              <a:rPr lang="en-US" sz="900" b="1" kern="0" spc="800" dirty="0">
+                <a:solidFill>
+                  <a:srgbClr val="0F1B2E"/>
+                </a:solidFill>
+                <a:latin typeface="Arial Black" pitchFamily="34" charset="0"/>
+              </a:rPr>
+              <a:t>WACC SPORTS</a:t>
+            </a:r>
+            <a:endParaRPr lang="en-US" sz="900" dirty="0"/>
+          </a:p>
+        </p:txBody>
+      </p:sp>
+      <p:sp>
+        <p:nvSpPr>
+          <p:cNvPr id="59" name="FooterR"/>
+          <p:cNvSpPr/>
+          <p:nvPr/>
+        </p:nvSpPr>
+        <p:spPr>
+          <a:xfrm>
+            <a:off x="5120640" y="4892040"/>
+            <a:ext cx="3657600" cy="228600"/>
+          </a:xfrm>
+          <a:prstGeom prst="rect">
+            <a:avLst/>
+          </a:prstGeom>
+          <a:noFill/>
+          <a:ln/>
+        </p:spPr>
+        <p:txBody>
+          <a:bodyPr wrap="square" lIns="0" tIns="0" rIns="0" bIns="0" rtlCol="0" anchor="ctr"/>
+          <a:lstStyle/>
+          <a:p>
+            <a:pPr marL="0" indent="0" algn="r">
+              <a:buNone/>
+            </a:pPr>
+            <a:r>
+              <a:rPr lang="en-US" sz="900" b="1" kern="0" spc="800" dirty="0">
+                <a:solidFill>
+                  <a:srgbClr val="5B6573"/>
+                </a:solidFill>
+                <a:latin typeface="Arial" pitchFamily="34" charset="0"/>
+              </a:rPr>
+              <a:t>OCTOBER 17, 2026</a:t>
+            </a:r>
+            <a:endParaRPr lang="en-US" sz="900" dirty="0"/>
+          </a:p>
+        </p:txBody>
+      </p:sp>
+      <p:pic>
+        <p:nvPicPr>
+          <p:cNvPr id="998" name="Image 0" descr="preencoded.png"/>
+          <p:cNvPicPr>
+            <a:picLocks noChangeAspect="1"/>
+          </p:cNvPicPr>
+          <p:nvPr/>
+        </p:nvPicPr>
+        <p:blipFill>
+          <a:blip r:embed="rId10"/>
+          <a:stretch>
+            <a:fillRect/>
+          </a:stretch>
+        </p:blipFill>
+        <p:spPr>
+          <a:xfrm>
+            <a:off x="4046316" y="2254444"/>
+            <a:ext cx="1032376" cy="1032376"/>
+          </a:xfrm>
+          <a:prstGeom prst="rect">
+            <a:avLst/>
+          </a:prstGeom>
+        </p:spPr>
+      </p:pic>
+    </p:spTree>
+  </p:cSld>
+  <p:clrMapOvr>
+    <a:masterClrMapping/>
+  </p:clrMapOvr>
+</p:sld>
+</file>
+
+<file path=ppt/slides/slide3.xml><?xml version="1.0" encoding="utf-8"?>
+<p:sld xmlns:a="http://schemas.openxmlformats.org/drawingml/2006/main" xmlns:r="http://schemas.openxmlformats.org/officeDocument/2006/relationships" xmlns:p="http://schemas.openxmlformats.org/presentationml/2006/main">
+  <p:cSld>
+    <p:spTree>
+      <p:nvGrpSpPr>
+        <p:cNvPr id="1" name=""/>
+        <p:cNvGrpSpPr/>
+        <p:nvPr/>
+      </p:nvGrpSpPr>
+      <p:grpSpPr>
+        <a:xfrm>
+          <a:off x="0" y="0"/>
+          <a:ext cx="0" cy="0"/>
+          <a:chOff x="0" y="0"/>
+          <a:chExt cx="0" cy="0"/>
+        </a:xfrm>
+      </p:grpSpPr>
+      <p:sp>
+        <p:nvSpPr>
+          <p:cNvPr id="2" name="Time"/>
+          <p:cNvSpPr/>
+          <p:nvPr/>
+        </p:nvSpPr>
+        <p:spPr>
+          <a:xfrm>
+            <a:off x="365760" y="137160"/>
+            <a:ext cx="2743200" cy="502920"/>
+          </a:xfrm>
+          <a:prstGeom prst="rect">
+            <a:avLst/>
+          </a:prstGeom>
+          <a:noFill/>
+          <a:ln/>
+        </p:spPr>
+        <p:txBody>
+          <a:bodyPr wrap="square" lIns="0" tIns="0" rIns="0" bIns="0" rtlCol="0" anchor="ctr"/>
+          <a:lstStyle/>
+          <a:p>
+            <a:pPr marL="0" indent="0" algn="l">
+              <a:buNone/>
+            </a:pPr>
+            <a:r>
+              <a:rPr lang="en-US" sz="3000" b="1" kern="0" spc="100" dirty="0">
+                <a:solidFill>
+                  <a:srgbClr val="0F1B2E"/>
+                </a:solidFill>
+                <a:latin typeface="Arial Black" pitchFamily="34" charset="0"/>
+              </a:rPr>
+              <a:t>9 AM</a:t>
+            </a:r>
+            <a:endParaRPr lang="en-US" sz="3000" dirty="0"/>
+          </a:p>
+        </p:txBody>
+      </p:sp>
+      <p:grpSp>
+        <p:nvGrpSpPr>
+          <p:cNvPr id="60" name="PillGroup"/>
+          <p:cNvGrpSpPr/>
+          <p:nvPr/>
+        </p:nvGrpSpPr>
+        <p:grpSpPr>
+          <a:xfrm>
+            <a:off x="2838288" y="192416"/>
+            <a:ext cx="3467425" cy="429768"/>
+            <a:chOff x="2838288" y="114301"/>
+            <a:chExt cx="3467425" cy="429768"/>
+          </a:xfrm>
+        </p:grpSpPr>
+        <p:sp>
+          <p:nvSpPr>
+            <p:cNvPr id="3" name="Pill"/>
+            <p:cNvSpPr/>
+            <p:nvPr/>
+          </p:nvSpPr>
+          <p:spPr>
+            <a:xfrm>
+              <a:off x="2838288" y="114301"/>
+              <a:ext cx="3467425" cy="429768"/>
+            </a:xfrm>
+            <a:prstGeom prst="roundRect">
+              <a:avLst>
+                <a:gd name="adj" fmla="val 50000"/>
+              </a:avLst>
+            </a:prstGeom>
+            <a:solidFill>
+              <a:srgbClr val="1D4ED8"/>
+            </a:solidFill>
+            <a:ln w="12700">
+              <a:solidFill>
+                <a:srgbClr val="1D4ED8"/>
+              </a:solidFill>
+              <a:prstDash val="solid"/>
+            </a:ln>
+          </p:spPr>
+          <p:txBody>
+            <a:bodyPr/>
+            <a:lstStyle/>
+            <a:p>
+              <a:endParaRPr lang="en-US"/>
+            </a:p>
+          </p:txBody>
+        </p:sp>
+        <p:sp>
+          <p:nvSpPr>
+            <p:cNvPr id="4" name="PillText"/>
+            <p:cNvSpPr/>
+            <p:nvPr/>
+          </p:nvSpPr>
+          <p:spPr>
+            <a:xfrm>
+              <a:off x="3050073" y="164616"/>
+              <a:ext cx="3150000" cy="310896"/>
+            </a:xfrm>
+            <a:prstGeom prst="rect">
+              <a:avLst/>
+            </a:prstGeom>
+            <a:noFill/>
+            <a:ln/>
+          </p:spPr>
+          <p:txBody>
+            <a:bodyPr wrap="none" lIns="0" tIns="0" rIns="0" bIns="0" rtlCol="0" anchor="ctr"/>
+            <a:lstStyle/>
+            <a:p>
+              <a:pPr algn="ctr"/>
+              <a:r>
+                <a:rPr lang="en-US" sz="1100" b="1" kern="0" spc="600" dirty="0">
+                  <a:solidFill>
+                    <a:srgbClr val="FFFFFF"/>
+                  </a:solidFill>
+                  <a:latin typeface="Arial Black" pitchFamily="34" charset="0"/>
+                </a:rPr>
+                <a:t>PEE WEE</a:t>
+              </a:r>
+              <a:endParaRPr lang="en-US" sz="1100" dirty="0"/>
+            </a:p>
+          </p:txBody>
+        </p:sp>
+      </p:grpSp>
+      <p:sp>
+        <p:nvSpPr>
+          <p:cNvPr id="6" name="HRTop"/>
+          <p:cNvSpPr/>
+          <p:nvPr/>
+        </p:nvSpPr>
+        <p:spPr>
+          <a:xfrm>
+            <a:off x="365760" y="713232"/>
+            <a:ext cx="8412480" cy="0"/>
+          </a:xfrm>
+          <a:prstGeom prst="line">
+            <a:avLst/>
+          </a:prstGeom>
+          <a:noFill/>
+          <a:ln w="9525">
+            <a:solidFill>
+              <a:srgbClr val="C9BFAE"/>
+            </a:solidFill>
+            <a:prstDash val="solid"/>
+          </a:ln>
+        </p:spPr>
+        <p:txBody>
+          <a:bodyPr/>
+          <a:lstStyle/>
+          <a:p>
+            <a:endParaRPr lang="en-US"/>
+          </a:p>
+        </p:txBody>
+      </p:sp>
+      <p:sp>
+        <p:nvSpPr>
+          <p:cNvPr id="7" name="CourtRect"/>
+          <p:cNvSpPr/>
+          <p:nvPr/>
+        </p:nvSpPr>
+        <p:spPr>
+          <a:xfrm>
+            <a:off x="457200" y="914400"/>
+            <a:ext cx="8229600" cy="3749040"/>
+          </a:xfrm>
+          <a:prstGeom prst="rect">
+            <a:avLst/>
+          </a:prstGeom>
+          <a:ln w="19050">
+            <a:solidFill>
+              <a:srgbClr val="283241"/>
+            </a:solidFill>
+            <a:prstDash val="solid"/>
+          </a:ln>
+        </p:spPr>
+        <p:txBody>
+          <a:bodyPr/>
+          <a:lstStyle/>
+          <a:p>
+            <a:endParaRPr lang="en-US"/>
+          </a:p>
+        </p:txBody>
+      </p:sp>
+      <p:sp>
+        <p:nvSpPr>
+          <p:cNvPr id="1001" name="HalfCourtTop"/>
+          <p:cNvSpPr/>
+          <p:nvPr/>
+        </p:nvSpPr>
+        <p:spPr>
+          <a:xfrm>
+            <a:off x="4572000" y="914400"/>
+            <a:ext cx="0" cy="1340131"/>
+          </a:xfrm>
+          <a:prstGeom prst="line">
+            <a:avLst/>
+          </a:prstGeom>
+          <a:noFill/>
+          <a:ln w="15875">
+            <a:solidFill>
+              <a:srgbClr val="283241"/>
+            </a:solidFill>
+            <a:prstDash val="solid"/>
+          </a:ln>
+        </p:spPr>
+        <p:txBody>
+          <a:bodyPr/>
+          <a:lstStyle/>
+          <a:p>
+            <a:endParaRPr lang="en-US"/>
+          </a:p>
+        </p:txBody>
+      </p:sp>
+      <p:sp>
+        <p:nvSpPr>
+          <p:cNvPr id="1002" name="HalfCourtBottom"/>
+          <p:cNvSpPr/>
+          <p:nvPr/>
+        </p:nvSpPr>
+        <p:spPr>
+          <a:xfrm>
+            <a:off x="4572000" y="3286733"/>
+            <a:ext cx="0" cy="1376707"/>
+          </a:xfrm>
+          <a:prstGeom prst="line">
+            <a:avLst/>
+          </a:prstGeom>
+          <a:noFill/>
+          <a:ln w="15875">
+            <a:solidFill>
+              <a:srgbClr val="283241"/>
+            </a:solidFill>
+            <a:prstDash val="solid"/>
+          </a:ln>
+        </p:spPr>
+        <p:txBody>
+          <a:bodyPr/>
+          <a:lstStyle/>
+          <a:p>
+            <a:endParaRPr lang="en-US"/>
+          </a:p>
+        </p:txBody>
+      </p:sp>
+      <p:sp>
+        <p:nvSpPr>
+          <p:cNvPr id="10" name="LSquareL"/>
+          <p:cNvSpPr/>
+          <p:nvPr/>
+        </p:nvSpPr>
+        <p:spPr>
+          <a:xfrm>
+            <a:off x="457200" y="1889150"/>
+            <a:ext cx="1728216" cy="1799539"/>
+          </a:xfrm>
+          <a:prstGeom prst="rect">
+            <a:avLst/>
+          </a:prstGeom>
+          <a:ln w="15875">
+            <a:solidFill>
+              <a:srgbClr val="283241"/>
+            </a:solidFill>
+            <a:prstDash val="solid"/>
+          </a:ln>
+        </p:spPr>
+        <p:txBody>
+          <a:bodyPr/>
+          <a:lstStyle/>
+          <a:p>
+            <a:endParaRPr lang="en-US"/>
+          </a:p>
+        </p:txBody>
+      </p:sp>
+      <p:sp>
+        <p:nvSpPr>
+          <p:cNvPr id="11" name="LCircleL"/>
+          <p:cNvSpPr/>
+          <p:nvPr/>
+        </p:nvSpPr>
+        <p:spPr>
+          <a:xfrm>
+            <a:off x="1321637" y="1925141"/>
+            <a:ext cx="1727558" cy="1727558"/>
+          </a:xfrm>
+          <a:prstGeom prst="ellipse">
+            <a:avLst/>
+          </a:prstGeom>
+          <a:ln w="15875">
+            <a:solidFill>
+              <a:srgbClr val="283241"/>
+            </a:solidFill>
+            <a:prstDash val="dash"/>
+          </a:ln>
+        </p:spPr>
+        <p:txBody>
+          <a:bodyPr/>
+          <a:lstStyle/>
+          <a:p>
+            <a:endParaRPr lang="en-US"/>
+          </a:p>
+        </p:txBody>
+      </p:sp>
+      <p:sp>
+        <p:nvSpPr>
+          <p:cNvPr id="12" name="LMaskL"/>
+          <p:cNvSpPr/>
+          <p:nvPr/>
+        </p:nvSpPr>
+        <p:spPr>
+          <a:xfrm>
+            <a:off x="1312493" y="1879421"/>
+            <a:ext cx="882067" cy="1818998"/>
+          </a:xfrm>
+          <a:prstGeom prst="rect">
+            <a:avLst/>
+          </a:prstGeom>
+          <a:solidFill>
+            <a:srgbClr val="FFFFFF"/>
+          </a:solidFill>
+          <a:ln w="12700">
+            <a:solidFill>
+              <a:srgbClr val="FFFFFF"/>
+            </a:solidFill>
+            <a:prstDash val="solid"/>
+          </a:ln>
+        </p:spPr>
+        <p:txBody>
+          <a:bodyPr/>
+          <a:lstStyle/>
+          <a:p>
+            <a:endParaRPr lang="en-US"/>
+          </a:p>
+        </p:txBody>
+      </p:sp>
+      <p:sp>
+        <p:nvSpPr>
+          <p:cNvPr id="13" name="LSquareLOver"/>
+          <p:cNvSpPr/>
+          <p:nvPr/>
+        </p:nvSpPr>
+        <p:spPr>
+          <a:xfrm>
+            <a:off x="457200" y="1889150"/>
+            <a:ext cx="1728216" cy="1799539"/>
+          </a:xfrm>
+          <a:prstGeom prst="rect">
+            <a:avLst/>
+          </a:prstGeom>
+          <a:ln w="15875">
+            <a:solidFill>
+              <a:srgbClr val="283241"/>
+            </a:solidFill>
+            <a:prstDash val="solid"/>
+          </a:ln>
+        </p:spPr>
+        <p:txBody>
+          <a:bodyPr/>
+          <a:lstStyle/>
+          <a:p>
+            <a:endParaRPr lang="en-US"/>
+          </a:p>
+        </p:txBody>
+      </p:sp>
+      <p:sp>
+        <p:nvSpPr>
+          <p:cNvPr id="24" name="RSquareR"/>
+          <p:cNvSpPr/>
+          <p:nvPr/>
+        </p:nvSpPr>
+        <p:spPr>
+          <a:xfrm>
+            <a:off x="6958584" y="1889150"/>
+            <a:ext cx="1728216" cy="1799539"/>
+          </a:xfrm>
+          <a:prstGeom prst="rect">
+            <a:avLst/>
+          </a:prstGeom>
+          <a:ln w="15875">
+            <a:solidFill>
+              <a:srgbClr val="283241"/>
+            </a:solidFill>
+            <a:prstDash val="solid"/>
+          </a:ln>
+        </p:spPr>
+        <p:txBody>
+          <a:bodyPr/>
+          <a:lstStyle/>
+          <a:p>
+            <a:endParaRPr lang="en-US"/>
+          </a:p>
+        </p:txBody>
+      </p:sp>
+      <p:sp>
+        <p:nvSpPr>
+          <p:cNvPr id="25" name="RCircleR"/>
+          <p:cNvSpPr/>
+          <p:nvPr/>
+        </p:nvSpPr>
+        <p:spPr>
+          <a:xfrm>
+            <a:off x="6094805" y="1925141"/>
+            <a:ext cx="1727558" cy="1727558"/>
+          </a:xfrm>
+          <a:prstGeom prst="ellipse">
+            <a:avLst/>
+          </a:prstGeom>
+          <a:ln w="15875">
+            <a:solidFill>
+              <a:srgbClr val="283241"/>
+            </a:solidFill>
+            <a:prstDash val="dash"/>
+          </a:ln>
+        </p:spPr>
+        <p:txBody>
+          <a:bodyPr/>
+          <a:lstStyle/>
+          <a:p>
+            <a:endParaRPr lang="en-US"/>
+          </a:p>
+        </p:txBody>
+      </p:sp>
+      <p:sp>
+        <p:nvSpPr>
+          <p:cNvPr id="26" name="RMaskR"/>
+          <p:cNvSpPr/>
+          <p:nvPr/>
+        </p:nvSpPr>
+        <p:spPr>
+          <a:xfrm>
+            <a:off x="6958584" y="1879421"/>
+            <a:ext cx="882067" cy="1818998"/>
+          </a:xfrm>
+          <a:prstGeom prst="rect">
+            <a:avLst/>
+          </a:prstGeom>
+          <a:solidFill>
+            <a:srgbClr val="FFFFFF"/>
+          </a:solidFill>
+          <a:ln w="12700">
+            <a:solidFill>
+              <a:srgbClr val="FFFFFF"/>
+            </a:solidFill>
+            <a:prstDash val="solid"/>
+          </a:ln>
+        </p:spPr>
+        <p:txBody>
+          <a:bodyPr/>
+          <a:lstStyle/>
+          <a:p>
+            <a:endParaRPr lang="en-US"/>
+          </a:p>
+        </p:txBody>
+      </p:sp>
+      <p:sp>
+        <p:nvSpPr>
+          <p:cNvPr id="27" name="RSquareROver"/>
+          <p:cNvSpPr/>
+          <p:nvPr/>
+        </p:nvSpPr>
+        <p:spPr>
+          <a:xfrm>
+            <a:off x="6958584" y="1889150"/>
+            <a:ext cx="1728216" cy="1799539"/>
+          </a:xfrm>
+          <a:prstGeom prst="rect">
+            <a:avLst/>
+          </a:prstGeom>
+          <a:ln w="15875">
+            <a:solidFill>
+              <a:srgbClr val="283241"/>
+            </a:solidFill>
+            <a:prstDash val="solid"/>
+          </a:ln>
+        </p:spPr>
+        <p:txBody>
+          <a:bodyPr/>
+          <a:lstStyle/>
+          <a:p>
+            <a:endParaRPr lang="en-US"/>
+          </a:p>
+        </p:txBody>
+      </p:sp>
+      <p:sp>
+        <p:nvSpPr>
+          <p:cNvPr id="101" name="CardBG"/>
+          <p:cNvSpPr/>
+          <p:nvPr/>
+        </p:nvSpPr>
+        <p:spPr>
+          <a:xfrm>
+            <a:off x="1325880" y="1563920"/>
+            <a:ext cx="2550000" cy="2450000"/>
+          </a:xfrm>
+          <a:prstGeom prst="rect">
+            <a:avLst/>
+          </a:prstGeom>
+          <a:solidFill>
+            <a:srgbClr val="FFFFFF"/>
+          </a:solidFill>
+          <a:ln w="9525">
+            <a:solidFill>
+              <a:srgbClr val="E5DFCE"/>
+            </a:solidFill>
+            <a:prstDash val="solid"/>
+          </a:ln>
+          <a:effectLst>
+            <a:outerShdw blurRad="127000" dist="25400" dir="5400000" algn="bl" rotWithShape="0">
+              <a:srgbClr val="000000">
+                <a:alpha val="12000"/>
+              </a:srgbClr>
+            </a:outerShdw>
+          </a:effectLst>
+        </p:spPr>
+        <p:txBody>
+          <a:bodyPr/>
+          <a:lstStyle/>
+          <a:p>
+            <a:endParaRPr lang="en-US" dirty="0"/>
+          </a:p>
+        </p:txBody>
+      </p:sp>
+      <p:sp>
+        <p:nvSpPr>
+          <p:cNvPr id="102" name="CardStripe"/>
+          <p:cNvSpPr/>
+          <p:nvPr/>
+        </p:nvSpPr>
+        <p:spPr>
+          <a:xfrm>
+            <a:off x="1325880" y="1563920"/>
+            <a:ext cx="2550000" cy="73152"/>
+          </a:xfrm>
+          <a:prstGeom prst="rect">
+            <a:avLst/>
+          </a:prstGeom>
+          <a:solidFill>
+            <a:srgbClr val="1D4ED8"/>
+          </a:solidFill>
+          <a:ln w="12700">
+            <a:solidFill>
+              <a:srgbClr val="1D4ED8"/>
+            </a:solidFill>
+            <a:prstDash val="solid"/>
+          </a:ln>
+        </p:spPr>
+        <p:txBody>
+          <a:bodyPr/>
+          <a:lstStyle/>
+          <a:p>
+            <a:endParaRPr lang="en-US" dirty="0"/>
+          </a:p>
+        </p:txBody>
+      </p:sp>
+      <p:sp>
+        <p:nvSpPr>
+          <p:cNvPr id="103" name="Label"/>
+          <p:cNvSpPr/>
+          <p:nvPr/>
+        </p:nvSpPr>
+        <p:spPr>
+          <a:xfrm>
+            <a:off x="1508760" y="1728512"/>
+            <a:ext cx="2184240" cy="228600"/>
+          </a:xfrm>
+          <a:prstGeom prst="rect">
+            <a:avLst/>
+          </a:prstGeom>
+          <a:noFill/>
+          <a:ln/>
+        </p:spPr>
+        <p:txBody>
+          <a:bodyPr wrap="square" lIns="0" tIns="0" rIns="0" bIns="0" rtlCol="0" anchor="ctr"/>
+          <a:lstStyle/>
+          <a:p>
+            <a:pPr marL="0" indent="0" algn="l">
+              <a:buNone/>
+            </a:pPr>
+            <a:r>
+              <a:rPr lang="en-US" sz="1000" b="1" kern="0" spc="600" dirty="0">
+                <a:solidFill>
+                  <a:srgbClr val="5B6573"/>
+                </a:solidFill>
+                <a:latin typeface="Arial" pitchFamily="34" charset="0"/>
+              </a:rPr>
+              <a:t>COURT 1</a:t>
+            </a:r>
+            <a:endParaRPr lang="en-US" sz="1000" dirty="0"/>
+          </a:p>
+        </p:txBody>
+      </p:sp>
+      <p:sp>
+        <p:nvSpPr>
+          <p:cNvPr id="104" name="Label"/>
+          <p:cNvSpPr/>
+          <p:nvPr/>
+        </p:nvSpPr>
+        <p:spPr>
+          <a:xfrm>
+            <a:off x="1508760" y="1728512"/>
+            <a:ext cx="2184240" cy="228600"/>
+          </a:xfrm>
+          <a:prstGeom prst="rect">
+            <a:avLst/>
+          </a:prstGeom>
+          <a:noFill/>
+          <a:ln/>
+        </p:spPr>
+        <p:txBody>
+          <a:bodyPr wrap="square" lIns="0" tIns="0" rIns="0" bIns="0" rtlCol="0" anchor="ctr"/>
+          <a:lstStyle/>
+          <a:p>
+            <a:pPr marL="0" indent="0" algn="r">
+              <a:buNone/>
+            </a:pPr>
+            <a:r>
+              <a:rPr lang="en-US" sz="1000" b="1" kern="0" spc="600" dirty="0">
+                <a:solidFill>
+                  <a:srgbClr val="1D4ED8"/>
+                </a:solidFill>
+                <a:latin typeface="Arial" pitchFamily="34" charset="0"/>
+              </a:rPr>
+              <a:t>PW</a:t>
+            </a:r>
+            <a:endParaRPr lang="en-US" sz="1000" dirty="0"/>
+          </a:p>
+        </p:txBody>
+      </p:sp>
+      <p:pic>
+        <p:nvPicPr>
+          <p:cNvPr id="105" name="Jersey"/>
+          <p:cNvPicPr>
+            <a:picLocks noChangeAspect="1"/>
+          </p:cNvPicPr>
+          <p:nvPr/>
+        </p:nvPicPr>
+        <p:blipFill>
+          <a:blip r:embed="rId2"/>
+          <a:srcRect l="16071" t="10057" r="14881" b="8908"/>
+          <a:stretch>
+            <a:fillRect/>
+          </a:stretch>
+        </p:blipFill>
+        <p:spPr>
+          <a:xfrm>
+            <a:off x="1385880" y="1997112"/>
+            <a:ext cx="1105000" cy="1393405"/>
+          </a:xfrm>
+          <a:prstGeom prst="rect">
+            <a:avLst/>
+          </a:prstGeom>
+        </p:spPr>
+      </p:pic>
+      <p:pic>
+        <p:nvPicPr>
+          <p:cNvPr id="106" name="Jersey"/>
+          <p:cNvPicPr>
+            <a:picLocks noChangeAspect="1"/>
+          </p:cNvPicPr>
+          <p:nvPr/>
+        </p:nvPicPr>
+        <p:blipFill>
+          <a:blip r:embed="rId3"/>
+          <a:srcRect l="15476" t="8908" r="15476" b="10057"/>
+          <a:stretch>
+            <a:fillRect/>
+          </a:stretch>
+        </p:blipFill>
+        <p:spPr>
+          <a:xfrm>
+            <a:off x="2710880" y="1997112"/>
+            <a:ext cx="1105000" cy="1393405"/>
+          </a:xfrm>
+          <a:prstGeom prst="rect">
+            <a:avLst/>
+          </a:prstGeom>
+        </p:spPr>
+      </p:pic>
+      <p:sp>
+        <p:nvSpPr>
+          <p:cNvPr id="107" name="AtLabel"/>
+          <p:cNvSpPr/>
+          <p:nvPr/>
+        </p:nvSpPr>
+        <p:spPr>
+          <a:xfrm>
+            <a:off x="2490880" y="2583814"/>
+            <a:ext cx="220000" cy="220000"/>
+          </a:xfrm>
+          <a:prstGeom prst="rect">
+            <a:avLst/>
+          </a:prstGeom>
+          <a:noFill/>
+          <a:ln/>
+        </p:spPr>
+        <p:txBody>
+          <a:bodyPr wrap="none" lIns="0" tIns="0" rIns="0" bIns="0" rtlCol="0" anchor="ctr"/>
+          <a:lstStyle/>
+          <a:p>
+            <a:pPr marL="0" indent="0" algn="ctr">
+              <a:buNone/>
+            </a:pPr>
+            <a:r>
+              <a:rPr lang="en-US" sz="1200" i="1" kern="0" spc="0" dirty="0">
+                <a:solidFill>
+                  <a:srgbClr val="5B6573"/>
+                </a:solidFill>
+                <a:latin typeface="Arial" pitchFamily="34" charset="0"/>
+              </a:rPr>
+              <a:t>vs</a:t>
+            </a:r>
+            <a:endParaRPr lang="en-US" sz="1200" dirty="0"/>
+          </a:p>
+        </p:txBody>
+      </p:sp>
+      <p:sp>
+        <p:nvSpPr>
+          <p:cNvPr id="108" name="TeamName"/>
+          <p:cNvSpPr/>
+          <p:nvPr/>
+        </p:nvSpPr>
+        <p:spPr>
+          <a:xfrm>
+            <a:off x="1385880" y="3420517"/>
+            <a:ext cx="1105000" cy="300000"/>
+          </a:xfrm>
+          <a:prstGeom prst="rect">
+            <a:avLst/>
+          </a:prstGeom>
+          <a:noFill/>
+          <a:ln/>
+        </p:spPr>
+        <p:txBody>
+          <a:bodyPr wrap="square" lIns="0" tIns="0" rIns="0" bIns="0" rtlCol="0" anchor="t"/>
+          <a:lstStyle/>
+          <a:p>
+            <a:pPr marL="0" indent="0" algn="ctr">
+              <a:buNone/>
+            </a:pPr>
+            <a:r>
+              <a:rPr lang="en-US" sz="1300" b="1" kern="0" dirty="0">
+                <a:solidFill>
+                  <a:srgbClr val="0F1B2E"/>
+                </a:solidFill>
+                <a:latin typeface="Arial Black" pitchFamily="34" charset="0"/>
+              </a:rPr>
+              <a:t>Orange Tigers</a:t>
+            </a:r>
+            <a:endParaRPr lang="en-US" sz="1300" dirty="0"/>
+          </a:p>
+        </p:txBody>
+      </p:sp>
+      <p:sp>
+        <p:nvSpPr>
+          <p:cNvPr id="109" name="TeamName"/>
+          <p:cNvSpPr/>
+          <p:nvPr/>
+        </p:nvSpPr>
+        <p:spPr>
+          <a:xfrm>
+            <a:off x="2710880" y="3420517"/>
+            <a:ext cx="1105000" cy="300000"/>
+          </a:xfrm>
+          <a:prstGeom prst="rect">
+            <a:avLst/>
+          </a:prstGeom>
+          <a:noFill/>
+          <a:ln/>
+        </p:spPr>
+        <p:txBody>
+          <a:bodyPr wrap="square" lIns="0" tIns="0" rIns="0" bIns="0" rtlCol="0" anchor="t"/>
+          <a:lstStyle/>
+          <a:p>
+            <a:pPr marL="0" indent="0" algn="ctr">
+              <a:buNone/>
+            </a:pPr>
+            <a:r>
+              <a:rPr lang="en-US" sz="1300" b="1" kern="0" dirty="0">
+                <a:solidFill>
+                  <a:srgbClr val="0F1B2E"/>
+                </a:solidFill>
+                <a:latin typeface="Arial Black" pitchFamily="34" charset="0"/>
+              </a:rPr>
+              <a:t>Pikachu Power</a:t>
+            </a:r>
+            <a:endParaRPr lang="en-US" sz="1300" dirty="0"/>
+          </a:p>
+        </p:txBody>
+      </p:sp>
+      <p:sp>
+        <p:nvSpPr>
+          <p:cNvPr id="110" name="CardBG"/>
+          <p:cNvSpPr/>
+          <p:nvPr/>
+        </p:nvSpPr>
+        <p:spPr>
+          <a:xfrm>
+            <a:off x="5440680" y="1563920"/>
+            <a:ext cx="2550000" cy="2450000"/>
+          </a:xfrm>
+          <a:prstGeom prst="rect">
+            <a:avLst/>
+          </a:prstGeom>
+          <a:solidFill>
+            <a:srgbClr val="FFFFFF"/>
+          </a:solidFill>
+          <a:ln w="9525">
+            <a:solidFill>
+              <a:srgbClr val="E5DFCE"/>
+            </a:solidFill>
+            <a:prstDash val="solid"/>
+          </a:ln>
+          <a:effectLst>
+            <a:outerShdw blurRad="127000" dist="25400" dir="5400000" algn="bl" rotWithShape="0">
+              <a:srgbClr val="000000">
+                <a:alpha val="12000"/>
+              </a:srgbClr>
+            </a:outerShdw>
+          </a:effectLst>
+        </p:spPr>
+        <p:txBody>
+          <a:bodyPr/>
+          <a:lstStyle/>
+          <a:p>
+            <a:endParaRPr lang="en-US" dirty="0"/>
+          </a:p>
+        </p:txBody>
+      </p:sp>
+      <p:sp>
+        <p:nvSpPr>
+          <p:cNvPr id="111" name="CardStripe"/>
+          <p:cNvSpPr/>
+          <p:nvPr/>
+        </p:nvSpPr>
+        <p:spPr>
+          <a:xfrm>
+            <a:off x="5440680" y="1563920"/>
+            <a:ext cx="2550000" cy="73152"/>
+          </a:xfrm>
+          <a:prstGeom prst="rect">
+            <a:avLst/>
+          </a:prstGeom>
+          <a:solidFill>
+            <a:srgbClr val="1D4ED8"/>
+          </a:solidFill>
+          <a:ln w="12700">
+            <a:solidFill>
+              <a:srgbClr val="1D4ED8"/>
+            </a:solidFill>
+            <a:prstDash val="solid"/>
+          </a:ln>
+        </p:spPr>
+        <p:txBody>
+          <a:bodyPr/>
+          <a:lstStyle/>
+          <a:p>
+            <a:endParaRPr lang="en-US" dirty="0"/>
+          </a:p>
+        </p:txBody>
+      </p:sp>
+      <p:sp>
+        <p:nvSpPr>
+          <p:cNvPr id="112" name="Label"/>
+          <p:cNvSpPr/>
+          <p:nvPr/>
+        </p:nvSpPr>
+        <p:spPr>
+          <a:xfrm>
+            <a:off x="5623560" y="1728512"/>
+            <a:ext cx="2184240" cy="228600"/>
+          </a:xfrm>
+          <a:prstGeom prst="rect">
+            <a:avLst/>
+          </a:prstGeom>
+          <a:noFill/>
+          <a:ln/>
+        </p:spPr>
+        <p:txBody>
+          <a:bodyPr wrap="square" lIns="0" tIns="0" rIns="0" bIns="0" rtlCol="0" anchor="ctr"/>
+          <a:lstStyle/>
+          <a:p>
+            <a:pPr marL="0" indent="0" algn="l">
+              <a:buNone/>
+            </a:pPr>
+            <a:r>
+              <a:rPr lang="en-US" sz="1000" b="1" kern="0" spc="600" dirty="0">
+                <a:solidFill>
+                  <a:srgbClr val="5B6573"/>
+                </a:solidFill>
+                <a:latin typeface="Arial" pitchFamily="34" charset="0"/>
+              </a:rPr>
+              <a:t>COURT 2</a:t>
+            </a:r>
+            <a:endParaRPr lang="en-US" sz="1000" dirty="0"/>
+          </a:p>
+        </p:txBody>
+      </p:sp>
+      <p:sp>
+        <p:nvSpPr>
+          <p:cNvPr id="113" name="Label"/>
+          <p:cNvSpPr/>
+          <p:nvPr/>
+        </p:nvSpPr>
+        <p:spPr>
+          <a:xfrm>
+            <a:off x="5623560" y="1728512"/>
+            <a:ext cx="2184240" cy="228600"/>
+          </a:xfrm>
+          <a:prstGeom prst="rect">
+            <a:avLst/>
+          </a:prstGeom>
+          <a:noFill/>
+          <a:ln/>
+        </p:spPr>
+        <p:txBody>
+          <a:bodyPr wrap="square" lIns="0" tIns="0" rIns="0" bIns="0" rtlCol="0" anchor="ctr"/>
+          <a:lstStyle/>
+          <a:p>
+            <a:pPr marL="0" indent="0" algn="r">
+              <a:buNone/>
+            </a:pPr>
+            <a:r>
+              <a:rPr lang="en-US" sz="1000" b="1" kern="0" spc="600" dirty="0">
+                <a:solidFill>
+                  <a:srgbClr val="1D4ED8"/>
+                </a:solidFill>
+                <a:latin typeface="Arial" pitchFamily="34" charset="0"/>
+              </a:rPr>
+              <a:t>PW</a:t>
+            </a:r>
+            <a:endParaRPr lang="en-US" sz="1000" dirty="0"/>
+          </a:p>
+        </p:txBody>
+      </p:sp>
+      <p:pic>
+        <p:nvPicPr>
+          <p:cNvPr id="114" name="Jersey"/>
+          <p:cNvPicPr>
+            <a:picLocks noChangeAspect="1"/>
+          </p:cNvPicPr>
+          <p:nvPr/>
+        </p:nvPicPr>
+        <p:blipFill>
+          <a:blip r:embed="rId7"/>
+          <a:srcRect l="16071" t="10057" r="15179" b="8908"/>
+          <a:stretch>
+            <a:fillRect/>
+          </a:stretch>
+        </p:blipFill>
+        <p:spPr>
+          <a:xfrm>
+            <a:off x="5500680" y="1997112"/>
+            <a:ext cx="1105000" cy="1393405"/>
+          </a:xfrm>
+          <a:prstGeom prst="rect">
+            <a:avLst/>
+          </a:prstGeom>
+        </p:spPr>
+      </p:pic>
+      <p:pic>
+        <p:nvPicPr>
+          <p:cNvPr id="115" name="Jersey"/>
+          <p:cNvPicPr>
+            <a:picLocks noChangeAspect="1"/>
+          </p:cNvPicPr>
+          <p:nvPr/>
+        </p:nvPicPr>
+        <p:blipFill>
+          <a:blip r:embed="rId9"/>
+          <a:srcRect l="15774" t="8621" r="15476" b="10057"/>
+          <a:stretch>
+            <a:fillRect/>
+          </a:stretch>
+        </p:blipFill>
+        <p:spPr>
+          <a:xfrm>
+            <a:off x="6825680" y="1997112"/>
+            <a:ext cx="1105000" cy="1393405"/>
+          </a:xfrm>
+          <a:prstGeom prst="rect">
+            <a:avLst/>
+          </a:prstGeom>
+        </p:spPr>
+      </p:pic>
+      <p:sp>
+        <p:nvSpPr>
+          <p:cNvPr id="116" name="AtLabel"/>
+          <p:cNvSpPr/>
+          <p:nvPr/>
+        </p:nvSpPr>
+        <p:spPr>
+          <a:xfrm>
+            <a:off x="6605680" y="2583814"/>
+            <a:ext cx="220000" cy="220000"/>
+          </a:xfrm>
+          <a:prstGeom prst="rect">
+            <a:avLst/>
+          </a:prstGeom>
+          <a:noFill/>
+          <a:ln/>
+        </p:spPr>
+        <p:txBody>
+          <a:bodyPr wrap="none" lIns="0" tIns="0" rIns="0" bIns="0" rtlCol="0" anchor="ctr"/>
+          <a:lstStyle/>
+          <a:p>
+            <a:pPr marL="0" indent="0" algn="ctr">
+              <a:buNone/>
+            </a:pPr>
+            <a:r>
+              <a:rPr lang="en-US" sz="1200" i="1" kern="0" spc="0" dirty="0">
+                <a:solidFill>
+                  <a:srgbClr val="5B6573"/>
+                </a:solidFill>
+                <a:latin typeface="Arial" pitchFamily="34" charset="0"/>
+              </a:rPr>
+              <a:t>vs</a:t>
+            </a:r>
+            <a:endParaRPr lang="en-US" sz="1200" dirty="0"/>
+          </a:p>
+        </p:txBody>
+      </p:sp>
+      <p:sp>
+        <p:nvSpPr>
+          <p:cNvPr id="117" name="TeamName"/>
+          <p:cNvSpPr/>
+          <p:nvPr/>
+        </p:nvSpPr>
+        <p:spPr>
+          <a:xfrm>
+            <a:off x="5500680" y="3420517"/>
+            <a:ext cx="1105000" cy="300000"/>
+          </a:xfrm>
+          <a:prstGeom prst="rect">
+            <a:avLst/>
+          </a:prstGeom>
+          <a:noFill/>
+          <a:ln/>
+        </p:spPr>
+        <p:txBody>
+          <a:bodyPr wrap="square" lIns="0" tIns="0" rIns="0" bIns="0" rtlCol="0" anchor="t"/>
+          <a:lstStyle/>
+          <a:p>
+            <a:pPr marL="0" indent="0" algn="ctr">
+              <a:buNone/>
+            </a:pPr>
+            <a:r>
+              <a:rPr lang="en-US" sz="1300" b="1" kern="0" dirty="0">
+                <a:solidFill>
+                  <a:srgbClr val="0F1B2E"/>
+                </a:solidFill>
+                <a:latin typeface="Arial Black" pitchFamily="34" charset="0"/>
+              </a:rPr>
+              <a:t>Green Dragons</a:t>
+            </a:r>
+            <a:endParaRPr lang="en-US" sz="1300" dirty="0"/>
+          </a:p>
+        </p:txBody>
+      </p:sp>
+      <p:sp>
+        <p:nvSpPr>
+          <p:cNvPr id="118" name="TeamName"/>
+          <p:cNvSpPr/>
+          <p:nvPr/>
+        </p:nvSpPr>
+        <p:spPr>
+          <a:xfrm>
+            <a:off x="6825680" y="3420517"/>
+            <a:ext cx="1105000" cy="300000"/>
+          </a:xfrm>
+          <a:prstGeom prst="rect">
+            <a:avLst/>
+          </a:prstGeom>
+          <a:noFill/>
+          <a:ln/>
+        </p:spPr>
+        <p:txBody>
+          <a:bodyPr wrap="square" lIns="0" tIns="0" rIns="0" bIns="0" rtlCol="0" anchor="t"/>
+          <a:lstStyle/>
+          <a:p>
+            <a:pPr marL="0" indent="0" algn="ctr">
+              <a:buNone/>
+            </a:pPr>
+            <a:r>
+              <a:rPr lang="en-US" sz="1300" b="1" kern="0" dirty="0">
+                <a:solidFill>
+                  <a:srgbClr val="0F1B2E"/>
+                </a:solidFill>
+                <a:latin typeface="Arial Black" pitchFamily="34" charset="0"/>
+              </a:rPr>
+              <a:t>Blue Pokemon</a:t>
+            </a:r>
+            <a:endParaRPr lang="en-US" sz="1300" dirty="0"/>
+          </a:p>
+        </p:txBody>
+      </p:sp>
+      <p:sp>
+        <p:nvSpPr>
+          <p:cNvPr id="57" name="HRBottom"/>
+          <p:cNvSpPr/>
+          <p:nvPr/>
+        </p:nvSpPr>
+        <p:spPr>
+          <a:xfrm>
+            <a:off x="365760" y="4828032"/>
+            <a:ext cx="8412480" cy="0"/>
+          </a:xfrm>
+          <a:prstGeom prst="line">
+            <a:avLst/>
+          </a:prstGeom>
+          <a:noFill/>
+          <a:ln w="9525">
+            <a:solidFill>
+              <a:srgbClr val="C9BFAE"/>
+            </a:solidFill>
+            <a:prstDash val="solid"/>
+          </a:ln>
+        </p:spPr>
+        <p:txBody>
+          <a:bodyPr/>
+          <a:lstStyle/>
+          <a:p>
+            <a:endParaRPr lang="en-US"/>
+          </a:p>
+        </p:txBody>
+      </p:sp>
+      <p:sp>
+        <p:nvSpPr>
+          <p:cNvPr id="58" name="FooterL"/>
+          <p:cNvSpPr/>
+          <p:nvPr/>
+        </p:nvSpPr>
+        <p:spPr>
+          <a:xfrm>
+            <a:off x="365760" y="4892040"/>
+            <a:ext cx="3657600" cy="228600"/>
+          </a:xfrm>
+          <a:prstGeom prst="rect">
+            <a:avLst/>
+          </a:prstGeom>
+          <a:noFill/>
+          <a:ln/>
+        </p:spPr>
+        <p:txBody>
+          <a:bodyPr wrap="square" lIns="0" tIns="0" rIns="0" bIns="0" rtlCol="0" anchor="ctr"/>
+          <a:lstStyle/>
+          <a:p>
+            <a:pPr marL="0" indent="0" algn="l">
+              <a:buNone/>
+            </a:pPr>
+            <a:r>
+              <a:rPr lang="en-US" sz="900" b="1" kern="0" spc="800" dirty="0">
+                <a:solidFill>
+                  <a:srgbClr val="0F1B2E"/>
+                </a:solidFill>
+                <a:latin typeface="Arial Black" pitchFamily="34" charset="0"/>
+              </a:rPr>
+              <a:t>WACC SPORTS</a:t>
+            </a:r>
+            <a:endParaRPr lang="en-US" sz="900" dirty="0"/>
+          </a:p>
+        </p:txBody>
+      </p:sp>
+      <p:sp>
+        <p:nvSpPr>
+          <p:cNvPr id="59" name="FooterR"/>
+          <p:cNvSpPr/>
+          <p:nvPr/>
+        </p:nvSpPr>
+        <p:spPr>
+          <a:xfrm>
+            <a:off x="5120640" y="4892040"/>
+            <a:ext cx="3657600" cy="228600"/>
+          </a:xfrm>
+          <a:prstGeom prst="rect">
+            <a:avLst/>
+          </a:prstGeom>
+          <a:noFill/>
+          <a:ln/>
+        </p:spPr>
+        <p:txBody>
+          <a:bodyPr wrap="square" lIns="0" tIns="0" rIns="0" bIns="0" rtlCol="0" anchor="ctr"/>
+          <a:lstStyle/>
+          <a:p>
+            <a:pPr marL="0" indent="0" algn="r">
+              <a:buNone/>
+            </a:pPr>
+            <a:r>
+              <a:rPr lang="en-US" sz="900" b="1" kern="0" spc="800" dirty="0">
+                <a:solidFill>
+                  <a:srgbClr val="5B6573"/>
+                </a:solidFill>
+                <a:latin typeface="Arial" pitchFamily="34" charset="0"/>
+              </a:rPr>
+              <a:t>OCTOBER 17, 2026</a:t>
+            </a:r>
+            <a:endParaRPr lang="en-US" sz="900" dirty="0"/>
+          </a:p>
+        </p:txBody>
+      </p:sp>
+      <p:pic>
+        <p:nvPicPr>
+          <p:cNvPr id="998" name="Image 0" descr="preencoded.png"/>
+          <p:cNvPicPr>
+            <a:picLocks noChangeAspect="1"/>
+          </p:cNvPicPr>
+          <p:nvPr/>
+        </p:nvPicPr>
+        <p:blipFill>
+          <a:blip r:embed="rId6"/>
+          <a:stretch>
+            <a:fillRect/>
+          </a:stretch>
+        </p:blipFill>
+        <p:spPr>
+          <a:xfrm>
+            <a:off x="4046316" y="2254444"/>
+            <a:ext cx="1032376" cy="1032376"/>
+          </a:xfrm>
+          <a:prstGeom prst="rect">
+            <a:avLst/>
+          </a:prstGeom>
+        </p:spPr>
+      </p:pic>
+    </p:spTree>
+  </p:cSld>
+  <p:clrMapOvr>
+    <a:masterClrMapping/>
+  </p:clrMapOvr>
+</p:sld>
+</file>
+
+<file path=ppt/slides/slide5.xml><?xml version="1.0" encoding="utf-8"?>
+<p:sld xmlns:a="http://schemas.openxmlformats.org/drawingml/2006/main" xmlns:r="http://schemas.openxmlformats.org/officeDocument/2006/relationships" xmlns:p="http://schemas.openxmlformats.org/presentationml/2006/main">
+  <p:cSld>
+    <p:spTree>
+      <p:nvGrpSpPr>
+        <p:cNvPr id="1" name=""/>
+        <p:cNvGrpSpPr/>
+        <p:nvPr/>
+      </p:nvGrpSpPr>
+      <p:grpSpPr>
+        <a:xfrm>
+          <a:off x="0" y="0"/>
+          <a:ext cx="0" cy="0"/>
+          <a:chOff x="0" y="0"/>
+          <a:chExt cx="0" cy="0"/>
+        </a:xfrm>
+      </p:grpSpPr>
+      <p:sp>
+        <p:nvSpPr>
+          <p:cNvPr id="2" name="Time"/>
+          <p:cNvSpPr/>
+          <p:nvPr/>
+        </p:nvSpPr>
+        <p:spPr>
+          <a:xfrm>
+            <a:off x="365760" y="137160"/>
+            <a:ext cx="2743200" cy="502920"/>
+          </a:xfrm>
+          <a:prstGeom prst="rect">
+            <a:avLst/>
+          </a:prstGeom>
+          <a:noFill/>
+          <a:ln/>
+        </p:spPr>
+        <p:txBody>
+          <a:bodyPr wrap="square" lIns="0" tIns="0" rIns="0" bIns="0" rtlCol="0" anchor="ctr"/>
+          <a:lstStyle/>
+          <a:p>
+            <a:pPr marL="0" indent="0" algn="l">
+              <a:buNone/>
+            </a:pPr>
+            <a:r>
+              <a:rPr lang="en-US" sz="3000" b="1" kern="0" spc="100" dirty="0">
+                <a:solidFill>
+                  <a:srgbClr val="0F1B2E"/>
+                </a:solidFill>
+                <a:latin typeface="Arial Black" pitchFamily="34" charset="0"/>
+              </a:rPr>
+              <a:t>10 AM</a:t>
+            </a:r>
+            <a:endParaRPr lang="en-US" sz="3000" dirty="0"/>
+          </a:p>
+        </p:txBody>
+      </p:sp>
+      <p:grpSp>
+        <p:nvGrpSpPr>
+          <p:cNvPr id="60" name="PillGroup"/>
+          <p:cNvGrpSpPr/>
+          <p:nvPr/>
+        </p:nvGrpSpPr>
+        <p:grpSpPr>
+          <a:xfrm>
+            <a:off x="2838288" y="192416"/>
+            <a:ext cx="3467425" cy="429768"/>
+            <a:chOff x="2838288" y="114301"/>
+            <a:chExt cx="3467425" cy="429768"/>
+          </a:xfrm>
+        </p:grpSpPr>
+        <p:sp>
+          <p:nvSpPr>
+            <p:cNvPr id="3" name="Pill"/>
+            <p:cNvSpPr/>
+            <p:nvPr/>
+          </p:nvSpPr>
+          <p:spPr>
+            <a:xfrm>
+              <a:off x="2838288" y="114301"/>
+              <a:ext cx="3467425" cy="429768"/>
+            </a:xfrm>
+            <a:prstGeom prst="roundRect">
+              <a:avLst>
+                <a:gd name="adj" fmla="val 50000"/>
+              </a:avLst>
+            </a:prstGeom>
+            <a:solidFill>
+              <a:srgbClr val="1D4ED8"/>
+            </a:solidFill>
+            <a:ln w="12700">
+              <a:solidFill>
+                <a:srgbClr val="1D4ED8"/>
+              </a:solidFill>
+              <a:prstDash val="solid"/>
+            </a:ln>
+          </p:spPr>
+          <p:txBody>
+            <a:bodyPr/>
+            <a:lstStyle/>
+            <a:p>
+              <a:endParaRPr lang="en-US"/>
+            </a:p>
+          </p:txBody>
+        </p:sp>
+        <p:sp>
+          <p:nvSpPr>
+            <p:cNvPr id="4" name="PillText"/>
+            <p:cNvSpPr/>
+            <p:nvPr/>
+          </p:nvSpPr>
+          <p:spPr>
+            <a:xfrm>
+              <a:off x="3050073" y="164616"/>
+              <a:ext cx="3150000" cy="310896"/>
+            </a:xfrm>
+            <a:prstGeom prst="rect">
+              <a:avLst/>
+            </a:prstGeom>
+            <a:noFill/>
+            <a:ln/>
+          </p:spPr>
+          <p:txBody>
+            <a:bodyPr wrap="none" lIns="0" tIns="0" rIns="0" bIns="0" rtlCol="0" anchor="ctr"/>
+            <a:lstStyle/>
+            <a:p>
+              <a:pPr algn="ctr"/>
+              <a:r>
+                <a:rPr lang="en-US" sz="1100" b="1" kern="0" spc="600" dirty="0">
+                  <a:solidFill>
+                    <a:srgbClr val="FFFFFF"/>
+                  </a:solidFill>
+                  <a:latin typeface="Arial Black" pitchFamily="34" charset="0"/>
+                </a:rPr>
+                <a:t>MINOR BOYS</a:t>
+              </a:r>
+              <a:endParaRPr lang="en-US" sz="1100" dirty="0"/>
+            </a:p>
+          </p:txBody>
+        </p:sp>
+      </p:grpSp>
+      <p:sp>
+        <p:nvSpPr>
+          <p:cNvPr id="6" name="HRTop"/>
+          <p:cNvSpPr/>
+          <p:nvPr/>
+        </p:nvSpPr>
+        <p:spPr>
+          <a:xfrm>
+            <a:off x="365760" y="713232"/>
+            <a:ext cx="8412480" cy="0"/>
+          </a:xfrm>
+          <a:prstGeom prst="line">
+            <a:avLst/>
+          </a:prstGeom>
+          <a:noFill/>
+          <a:ln w="9525">
+            <a:solidFill>
+              <a:srgbClr val="C9BFAE"/>
+            </a:solidFill>
+            <a:prstDash val="solid"/>
+          </a:ln>
+        </p:spPr>
+        <p:txBody>
+          <a:bodyPr/>
+          <a:lstStyle/>
+          <a:p>
+            <a:endParaRPr lang="en-US"/>
+          </a:p>
+        </p:txBody>
+      </p:sp>
+      <p:sp>
+        <p:nvSpPr>
+          <p:cNvPr id="7" name="CourtRect"/>
+          <p:cNvSpPr/>
+          <p:nvPr/>
+        </p:nvSpPr>
+        <p:spPr>
+          <a:xfrm>
+            <a:off x="457200" y="914400"/>
+            <a:ext cx="8229600" cy="3749040"/>
+          </a:xfrm>
+          <a:prstGeom prst="rect">
+            <a:avLst/>
+          </a:prstGeom>
+          <a:ln w="19050">
+            <a:solidFill>
+              <a:srgbClr val="283241"/>
+            </a:solidFill>
+            <a:prstDash val="solid"/>
+          </a:ln>
+        </p:spPr>
+        <p:txBody>
+          <a:bodyPr/>
+          <a:lstStyle/>
+          <a:p>
+            <a:endParaRPr lang="en-US"/>
+          </a:p>
+        </p:txBody>
+      </p:sp>
+      <p:sp>
+        <p:nvSpPr>
+          <p:cNvPr id="1001" name="HalfCourtTop"/>
+          <p:cNvSpPr/>
+          <p:nvPr/>
+        </p:nvSpPr>
+        <p:spPr>
+          <a:xfrm>
+            <a:off x="4572000" y="914400"/>
+            <a:ext cx="0" cy="1340131"/>
+          </a:xfrm>
+          <a:prstGeom prst="line">
+            <a:avLst/>
+          </a:prstGeom>
+          <a:noFill/>
+          <a:ln w="15875">
+            <a:solidFill>
+              <a:srgbClr val="283241"/>
+            </a:solidFill>
+            <a:prstDash val="solid"/>
+          </a:ln>
+        </p:spPr>
+        <p:txBody>
+          <a:bodyPr/>
+          <a:lstStyle/>
+          <a:p>
+            <a:endParaRPr lang="en-US"/>
+          </a:p>
+        </p:txBody>
+      </p:sp>
+      <p:sp>
+        <p:nvSpPr>
+          <p:cNvPr id="1002" name="HalfCourtBottom"/>
+          <p:cNvSpPr/>
+          <p:nvPr/>
+        </p:nvSpPr>
+        <p:spPr>
+          <a:xfrm>
+            <a:off x="4572000" y="3286733"/>
+            <a:ext cx="0" cy="1376707"/>
+          </a:xfrm>
+          <a:prstGeom prst="line">
+            <a:avLst/>
+          </a:prstGeom>
+          <a:noFill/>
+          <a:ln w="15875">
+            <a:solidFill>
+              <a:srgbClr val="283241"/>
+            </a:solidFill>
+            <a:prstDash val="solid"/>
+          </a:ln>
+        </p:spPr>
+        <p:txBody>
+          <a:bodyPr/>
+          <a:lstStyle/>
+          <a:p>
+            <a:endParaRPr lang="en-US"/>
+          </a:p>
+        </p:txBody>
+      </p:sp>
+      <p:sp>
+        <p:nvSpPr>
+          <p:cNvPr id="10" name="LSquareL"/>
+          <p:cNvSpPr/>
+          <p:nvPr/>
+        </p:nvSpPr>
+        <p:spPr>
+          <a:xfrm>
+            <a:off x="457200" y="1889150"/>
+            <a:ext cx="1728216" cy="1799539"/>
+          </a:xfrm>
+          <a:prstGeom prst="rect">
+            <a:avLst/>
+          </a:prstGeom>
+          <a:ln w="15875">
+            <a:solidFill>
+              <a:srgbClr val="283241"/>
+            </a:solidFill>
+            <a:prstDash val="solid"/>
+          </a:ln>
+        </p:spPr>
+        <p:txBody>
+          <a:bodyPr/>
+          <a:lstStyle/>
+          <a:p>
+            <a:endParaRPr lang="en-US"/>
+          </a:p>
+        </p:txBody>
+      </p:sp>
+      <p:sp>
+        <p:nvSpPr>
+          <p:cNvPr id="11" name="LCircleL"/>
+          <p:cNvSpPr/>
+          <p:nvPr/>
+        </p:nvSpPr>
+        <p:spPr>
+          <a:xfrm>
+            <a:off x="1321637" y="1925141"/>
+            <a:ext cx="1727558" cy="1727558"/>
+          </a:xfrm>
+          <a:prstGeom prst="ellipse">
+            <a:avLst/>
+          </a:prstGeom>
+          <a:ln w="15875">
+            <a:solidFill>
+              <a:srgbClr val="283241"/>
+            </a:solidFill>
+            <a:prstDash val="dash"/>
+          </a:ln>
+        </p:spPr>
+        <p:txBody>
+          <a:bodyPr/>
+          <a:lstStyle/>
+          <a:p>
+            <a:endParaRPr lang="en-US"/>
+          </a:p>
+        </p:txBody>
+      </p:sp>
+      <p:sp>
+        <p:nvSpPr>
+          <p:cNvPr id="12" name="LMaskL"/>
+          <p:cNvSpPr/>
+          <p:nvPr/>
+        </p:nvSpPr>
+        <p:spPr>
+          <a:xfrm>
+            <a:off x="1312493" y="1879421"/>
+            <a:ext cx="882067" cy="1818998"/>
+          </a:xfrm>
+          <a:prstGeom prst="rect">
+            <a:avLst/>
+          </a:prstGeom>
+          <a:solidFill>
+            <a:srgbClr val="FFFFFF"/>
+          </a:solidFill>
+          <a:ln w="12700">
+            <a:solidFill>
+              <a:srgbClr val="FFFFFF"/>
+            </a:solidFill>
+            <a:prstDash val="solid"/>
+          </a:ln>
+        </p:spPr>
+        <p:txBody>
+          <a:bodyPr/>
+          <a:lstStyle/>
+          <a:p>
+            <a:endParaRPr lang="en-US"/>
+          </a:p>
+        </p:txBody>
+      </p:sp>
+      <p:sp>
+        <p:nvSpPr>
+          <p:cNvPr id="13" name="LSquareLOver"/>
+          <p:cNvSpPr/>
+          <p:nvPr/>
+        </p:nvSpPr>
+        <p:spPr>
+          <a:xfrm>
+            <a:off x="457200" y="1889150"/>
+            <a:ext cx="1728216" cy="1799539"/>
+          </a:xfrm>
+          <a:prstGeom prst="rect">
+            <a:avLst/>
+          </a:prstGeom>
+          <a:ln w="15875">
+            <a:solidFill>
+              <a:srgbClr val="283241"/>
+            </a:solidFill>
+            <a:prstDash val="solid"/>
+          </a:ln>
+        </p:spPr>
+        <p:txBody>
+          <a:bodyPr/>
+          <a:lstStyle/>
+          <a:p>
+            <a:endParaRPr lang="en-US"/>
+          </a:p>
+        </p:txBody>
+      </p:sp>
+      <p:sp>
+        <p:nvSpPr>
+          <p:cNvPr id="24" name="RSquareR"/>
+          <p:cNvSpPr/>
+          <p:nvPr/>
+        </p:nvSpPr>
+        <p:spPr>
+          <a:xfrm>
+            <a:off x="6958584" y="1889150"/>
+            <a:ext cx="1728216" cy="1799539"/>
+          </a:xfrm>
+          <a:prstGeom prst="rect">
+            <a:avLst/>
+          </a:prstGeom>
+          <a:ln w="15875">
+            <a:solidFill>
+              <a:srgbClr val="283241"/>
+            </a:solidFill>
+            <a:prstDash val="solid"/>
+          </a:ln>
+        </p:spPr>
+        <p:txBody>
+          <a:bodyPr/>
+          <a:lstStyle/>
+          <a:p>
+            <a:endParaRPr lang="en-US"/>
+          </a:p>
+        </p:txBody>
+      </p:sp>
+      <p:sp>
+        <p:nvSpPr>
+          <p:cNvPr id="25" name="RCircleR"/>
+          <p:cNvSpPr/>
+          <p:nvPr/>
+        </p:nvSpPr>
+        <p:spPr>
+          <a:xfrm>
+            <a:off x="6094805" y="1925141"/>
+            <a:ext cx="1727558" cy="1727558"/>
+          </a:xfrm>
+          <a:prstGeom prst="ellipse">
+            <a:avLst/>
+          </a:prstGeom>
+          <a:ln w="15875">
+            <a:solidFill>
+              <a:srgbClr val="283241"/>
+            </a:solidFill>
+            <a:prstDash val="dash"/>
+          </a:ln>
+        </p:spPr>
+        <p:txBody>
+          <a:bodyPr/>
+          <a:lstStyle/>
+          <a:p>
+            <a:endParaRPr lang="en-US"/>
+          </a:p>
+        </p:txBody>
+      </p:sp>
+      <p:sp>
+        <p:nvSpPr>
+          <p:cNvPr id="26" name="RMaskR"/>
+          <p:cNvSpPr/>
+          <p:nvPr/>
+        </p:nvSpPr>
+        <p:spPr>
+          <a:xfrm>
+            <a:off x="6958584" y="1879421"/>
+            <a:ext cx="882067" cy="1818998"/>
+          </a:xfrm>
+          <a:prstGeom prst="rect">
+            <a:avLst/>
+          </a:prstGeom>
+          <a:solidFill>
+            <a:srgbClr val="FFFFFF"/>
+          </a:solidFill>
+          <a:ln w="12700">
+            <a:solidFill>
+              <a:srgbClr val="FFFFFF"/>
+            </a:solidFill>
+            <a:prstDash val="solid"/>
+          </a:ln>
+        </p:spPr>
+        <p:txBody>
+          <a:bodyPr/>
+          <a:lstStyle/>
+          <a:p>
+            <a:endParaRPr lang="en-US"/>
+          </a:p>
+        </p:txBody>
+      </p:sp>
+      <p:sp>
+        <p:nvSpPr>
+          <p:cNvPr id="27" name="RSquareROver"/>
+          <p:cNvSpPr/>
+          <p:nvPr/>
+        </p:nvSpPr>
+        <p:spPr>
+          <a:xfrm>
+            <a:off x="6958584" y="1889150"/>
+            <a:ext cx="1728216" cy="1799539"/>
+          </a:xfrm>
+          <a:prstGeom prst="rect">
+            <a:avLst/>
+          </a:prstGeom>
+          <a:ln w="15875">
+            <a:solidFill>
+              <a:srgbClr val="283241"/>
+            </a:solidFill>
+            <a:prstDash val="solid"/>
+          </a:ln>
+        </p:spPr>
+        <p:txBody>
+          <a:bodyPr/>
+          <a:lstStyle/>
+          <a:p>
+            <a:endParaRPr lang="en-US"/>
+          </a:p>
+        </p:txBody>
+      </p:sp>
+      <p:sp>
+        <p:nvSpPr>
+          <p:cNvPr id="101" name="CardBG"/>
+          <p:cNvSpPr/>
+          <p:nvPr/>
+        </p:nvSpPr>
+        <p:spPr>
+          <a:xfrm>
+            <a:off x="1325880" y="1563920"/>
+            <a:ext cx="2550000" cy="2450000"/>
+          </a:xfrm>
+          <a:prstGeom prst="rect">
+            <a:avLst/>
+          </a:prstGeom>
+          <a:solidFill>
+            <a:srgbClr val="FFFFFF"/>
+          </a:solidFill>
+          <a:ln w="9525">
+            <a:solidFill>
+              <a:srgbClr val="E5DFCE"/>
+            </a:solidFill>
+            <a:prstDash val="solid"/>
+          </a:ln>
+          <a:effectLst>
+            <a:outerShdw blurRad="127000" dist="25400" dir="5400000" algn="bl" rotWithShape="0">
+              <a:srgbClr val="000000">
+                <a:alpha val="12000"/>
+              </a:srgbClr>
+            </a:outerShdw>
+          </a:effectLst>
+        </p:spPr>
+        <p:txBody>
+          <a:bodyPr/>
+          <a:lstStyle/>
+          <a:p>
+            <a:endParaRPr lang="en-US" dirty="0"/>
+          </a:p>
+        </p:txBody>
+      </p:sp>
+      <p:sp>
+        <p:nvSpPr>
+          <p:cNvPr id="102" name="CardStripe"/>
+          <p:cNvSpPr/>
+          <p:nvPr/>
+        </p:nvSpPr>
+        <p:spPr>
+          <a:xfrm>
+            <a:off x="1325880" y="1563920"/>
+            <a:ext cx="2550000" cy="73152"/>
+          </a:xfrm>
+          <a:prstGeom prst="rect">
+            <a:avLst/>
+          </a:prstGeom>
+          <a:solidFill>
+            <a:srgbClr val="1D4ED8"/>
+          </a:solidFill>
+          <a:ln w="12700">
+            <a:solidFill>
+              <a:srgbClr val="1D4ED8"/>
+            </a:solidFill>
+            <a:prstDash val="solid"/>
+          </a:ln>
+        </p:spPr>
+        <p:txBody>
+          <a:bodyPr/>
+          <a:lstStyle/>
+          <a:p>
+            <a:endParaRPr lang="en-US" dirty="0"/>
+          </a:p>
+        </p:txBody>
+      </p:sp>
+      <p:sp>
+        <p:nvSpPr>
+          <p:cNvPr id="103" name="Label"/>
+          <p:cNvSpPr/>
+          <p:nvPr/>
+        </p:nvSpPr>
+        <p:spPr>
+          <a:xfrm>
+            <a:off x="1508760" y="1728512"/>
+            <a:ext cx="2184240" cy="228600"/>
+          </a:xfrm>
+          <a:prstGeom prst="rect">
+            <a:avLst/>
+          </a:prstGeom>
+          <a:noFill/>
+          <a:ln/>
+        </p:spPr>
+        <p:txBody>
+          <a:bodyPr wrap="square" lIns="0" tIns="0" rIns="0" bIns="0" rtlCol="0" anchor="ctr"/>
+          <a:lstStyle/>
+          <a:p>
+            <a:pPr marL="0" indent="0" algn="l">
+              <a:buNone/>
+            </a:pPr>
+            <a:r>
+              <a:rPr lang="en-US" sz="1000" b="1" kern="0" spc="600" dirty="0">
+                <a:solidFill>
+                  <a:srgbClr val="5B6573"/>
+                </a:solidFill>
+                <a:latin typeface="Arial" pitchFamily="34" charset="0"/>
+              </a:rPr>
+              <a:t>COURT 1</a:t>
+            </a:r>
+            <a:endParaRPr lang="en-US" sz="1000" dirty="0"/>
+          </a:p>
+        </p:txBody>
+      </p:sp>
+      <p:sp>
+        <p:nvSpPr>
+          <p:cNvPr id="104" name="Label"/>
+          <p:cNvSpPr/>
+          <p:nvPr/>
+        </p:nvSpPr>
+        <p:spPr>
+          <a:xfrm>
+            <a:off x="1508760" y="1728512"/>
+            <a:ext cx="2184240" cy="228600"/>
+          </a:xfrm>
+          <a:prstGeom prst="rect">
+            <a:avLst/>
+          </a:prstGeom>
+          <a:noFill/>
+          <a:ln/>
+        </p:spPr>
+        <p:txBody>
+          <a:bodyPr wrap="square" lIns="0" tIns="0" rIns="0" bIns="0" rtlCol="0" anchor="ctr"/>
+          <a:lstStyle/>
+          <a:p>
+            <a:pPr marL="0" indent="0" algn="r">
+              <a:buNone/>
+            </a:pPr>
+            <a:r>
+              <a:rPr lang="en-US" sz="1000" b="1" kern="0" spc="600" dirty="0">
+                <a:solidFill>
+                  <a:srgbClr val="1D4ED8"/>
+                </a:solidFill>
+                <a:latin typeface="Arial" pitchFamily="34" charset="0"/>
+              </a:rPr>
+              <a:t>MB</a:t>
+            </a:r>
+            <a:endParaRPr lang="en-US" sz="1000" dirty="0"/>
+          </a:p>
+        </p:txBody>
+      </p:sp>
+      <p:pic>
+        <p:nvPicPr>
+          <p:cNvPr id="105" name="Jersey"/>
+          <p:cNvPicPr>
+            <a:picLocks noChangeAspect="1"/>
+          </p:cNvPicPr>
+          <p:nvPr/>
+        </p:nvPicPr>
+        <p:blipFill>
+          <a:blip r:embed="rId4"/>
+          <a:srcRect l="16071" t="8621" r="15774" b="10057"/>
+          <a:stretch>
+            <a:fillRect/>
+          </a:stretch>
+        </p:blipFill>
+        <p:spPr>
+          <a:xfrm>
+            <a:off x="1385880" y="1997112"/>
+            <a:ext cx="1105000" cy="1393405"/>
+          </a:xfrm>
+          <a:prstGeom prst="rect">
+            <a:avLst/>
+          </a:prstGeom>
+        </p:spPr>
+      </p:pic>
+      <p:pic>
+        <p:nvPicPr>
+          <p:cNvPr id="106" name="Jersey"/>
+          <p:cNvPicPr>
+            <a:picLocks noChangeAspect="1"/>
+          </p:cNvPicPr>
+          <p:nvPr/>
+        </p:nvPicPr>
+        <p:blipFill>
+          <a:blip r:embed="rId3"/>
+          <a:srcRect l="15774" t="8621" r="15476" b="10057"/>
+          <a:stretch>
+            <a:fillRect/>
+          </a:stretch>
+        </p:blipFill>
+        <p:spPr>
+          <a:xfrm>
+            <a:off x="2710880" y="1997112"/>
+            <a:ext cx="1105000" cy="1393405"/>
+          </a:xfrm>
+          <a:prstGeom prst="rect">
+            <a:avLst/>
+          </a:prstGeom>
+        </p:spPr>
+      </p:pic>
+      <p:sp>
+        <p:nvSpPr>
+          <p:cNvPr id="107" name="AtLabel"/>
+          <p:cNvSpPr/>
+          <p:nvPr/>
+        </p:nvSpPr>
+        <p:spPr>
+          <a:xfrm>
+            <a:off x="2490880" y="2583814"/>
+            <a:ext cx="220000" cy="220000"/>
+          </a:xfrm>
+          <a:prstGeom prst="rect">
+            <a:avLst/>
+          </a:prstGeom>
+          <a:noFill/>
+          <a:ln/>
+        </p:spPr>
+        <p:txBody>
+          <a:bodyPr wrap="none" lIns="0" tIns="0" rIns="0" bIns="0" rtlCol="0" anchor="ctr"/>
+          <a:lstStyle/>
+          <a:p>
+            <a:pPr marL="0" indent="0" algn="ctr">
+              <a:buNone/>
+            </a:pPr>
+            <a:r>
+              <a:rPr lang="en-US" sz="1200" i="1" kern="0" spc="0" dirty="0">
+                <a:solidFill>
+                  <a:srgbClr val="5B6573"/>
+                </a:solidFill>
+                <a:latin typeface="Arial" pitchFamily="34" charset="0"/>
+              </a:rPr>
+              <a:t>vs</a:t>
+            </a:r>
+            <a:endParaRPr lang="en-US" sz="1200" dirty="0"/>
+          </a:p>
+        </p:txBody>
+      </p:sp>
+      <p:sp>
+        <p:nvSpPr>
+          <p:cNvPr id="108" name="TeamName"/>
+          <p:cNvSpPr/>
+          <p:nvPr/>
+        </p:nvSpPr>
+        <p:spPr>
+          <a:xfrm>
+            <a:off x="1385880" y="3420517"/>
+            <a:ext cx="1105000" cy="300000"/>
+          </a:xfrm>
+          <a:prstGeom prst="rect">
+            <a:avLst/>
+          </a:prstGeom>
+          <a:noFill/>
+          <a:ln/>
+        </p:spPr>
+        <p:txBody>
+          <a:bodyPr wrap="square" lIns="0" tIns="0" rIns="0" bIns="0" rtlCol="0" anchor="t"/>
+          <a:lstStyle/>
+          <a:p>
+            <a:pPr marL="0" indent="0" algn="ctr">
+              <a:buNone/>
+            </a:pPr>
+            <a:r>
+              <a:rPr lang="en-US" sz="1600" b="1" kern="0" dirty="0">
+                <a:solidFill>
+                  <a:srgbClr val="0F1B2E"/>
+                </a:solidFill>
+                <a:latin typeface="Arial Black" pitchFamily="34" charset="0"/>
+              </a:rPr>
+              <a:t>Team 4</a:t>
+            </a:r>
+            <a:endParaRPr lang="en-US" sz="1600" dirty="0"/>
+          </a:p>
+        </p:txBody>
+      </p:sp>
+      <p:sp>
+        <p:nvSpPr>
+          <p:cNvPr id="109" name="TeamName"/>
+          <p:cNvSpPr/>
+          <p:nvPr/>
+        </p:nvSpPr>
+        <p:spPr>
+          <a:xfrm>
+            <a:off x="2710880" y="3420517"/>
+            <a:ext cx="1105000" cy="300000"/>
+          </a:xfrm>
+          <a:prstGeom prst="rect">
+            <a:avLst/>
+          </a:prstGeom>
+          <a:noFill/>
+          <a:ln/>
+        </p:spPr>
+        <p:txBody>
+          <a:bodyPr wrap="square" lIns="0" tIns="0" rIns="0" bIns="0" rtlCol="0" anchor="t"/>
+          <a:lstStyle/>
+          <a:p>
+            <a:pPr marL="0" indent="0" algn="ctr">
+              <a:buNone/>
+            </a:pPr>
+            <a:r>
+              <a:rPr lang="en-US" sz="1300" b="1" kern="0" dirty="0">
+                <a:solidFill>
+                  <a:srgbClr val="0F1B2E"/>
+                </a:solidFill>
+                <a:latin typeface="Arial Black" pitchFamily="34" charset="0"/>
+              </a:rPr>
+              <a:t>Pink Doughnuts</a:t>
+            </a:r>
+            <a:endParaRPr lang="en-US" sz="1300" dirty="0"/>
+          </a:p>
+        </p:txBody>
+      </p:sp>
+      <p:sp>
+        <p:nvSpPr>
+          <p:cNvPr id="110" name="CardBG"/>
+          <p:cNvSpPr/>
+          <p:nvPr/>
+        </p:nvSpPr>
+        <p:spPr>
+          <a:xfrm>
+            <a:off x="5440680" y="1563920"/>
+            <a:ext cx="2550000" cy="2450000"/>
+          </a:xfrm>
+          <a:prstGeom prst="rect">
+            <a:avLst/>
+          </a:prstGeom>
+          <a:solidFill>
+            <a:srgbClr val="FFFFFF"/>
+          </a:solidFill>
+          <a:ln w="9525">
+            <a:solidFill>
+              <a:srgbClr val="E5DFCE"/>
+            </a:solidFill>
+            <a:prstDash val="solid"/>
+          </a:ln>
+          <a:effectLst>
+            <a:outerShdw blurRad="127000" dist="25400" dir="5400000" algn="bl" rotWithShape="0">
+              <a:srgbClr val="000000">
+                <a:alpha val="12000"/>
+              </a:srgbClr>
+            </a:outerShdw>
+          </a:effectLst>
+        </p:spPr>
+        <p:txBody>
+          <a:bodyPr/>
+          <a:lstStyle/>
+          <a:p>
+            <a:endParaRPr lang="en-US" dirty="0"/>
+          </a:p>
+        </p:txBody>
+      </p:sp>
+      <p:sp>
+        <p:nvSpPr>
+          <p:cNvPr id="111" name="CardStripe"/>
+          <p:cNvSpPr/>
+          <p:nvPr/>
+        </p:nvSpPr>
+        <p:spPr>
+          <a:xfrm>
+            <a:off x="5440680" y="1563920"/>
+            <a:ext cx="2550000" cy="73152"/>
+          </a:xfrm>
+          <a:prstGeom prst="rect">
+            <a:avLst/>
+          </a:prstGeom>
+          <a:solidFill>
+            <a:srgbClr val="1D4ED8"/>
+          </a:solidFill>
+          <a:ln w="12700">
+            <a:solidFill>
+              <a:srgbClr val="1D4ED8"/>
+            </a:solidFill>
+            <a:prstDash val="solid"/>
+          </a:ln>
+        </p:spPr>
+        <p:txBody>
+          <a:bodyPr/>
+          <a:lstStyle/>
+          <a:p>
+            <a:endParaRPr lang="en-US" dirty="0"/>
+          </a:p>
+        </p:txBody>
+      </p:sp>
+      <p:sp>
+        <p:nvSpPr>
+          <p:cNvPr id="112" name="Label"/>
+          <p:cNvSpPr/>
+          <p:nvPr/>
+        </p:nvSpPr>
+        <p:spPr>
+          <a:xfrm>
+            <a:off x="5623560" y="1728512"/>
+            <a:ext cx="2184240" cy="228600"/>
+          </a:xfrm>
+          <a:prstGeom prst="rect">
+            <a:avLst/>
+          </a:prstGeom>
+          <a:noFill/>
+          <a:ln/>
+        </p:spPr>
+        <p:txBody>
+          <a:bodyPr wrap="square" lIns="0" tIns="0" rIns="0" bIns="0" rtlCol="0" anchor="ctr"/>
+          <a:lstStyle/>
+          <a:p>
+            <a:pPr marL="0" indent="0" algn="l">
+              <a:buNone/>
+            </a:pPr>
+            <a:r>
+              <a:rPr lang="en-US" sz="1000" b="1" kern="0" spc="600" dirty="0">
+                <a:solidFill>
+                  <a:srgbClr val="5B6573"/>
+                </a:solidFill>
+                <a:latin typeface="Arial" pitchFamily="34" charset="0"/>
+              </a:rPr>
+              <a:t>COURT 2</a:t>
+            </a:r>
+            <a:endParaRPr lang="en-US" sz="1000" dirty="0"/>
+          </a:p>
+        </p:txBody>
+      </p:sp>
+      <p:sp>
+        <p:nvSpPr>
+          <p:cNvPr id="113" name="Label"/>
+          <p:cNvSpPr/>
+          <p:nvPr/>
+        </p:nvSpPr>
+        <p:spPr>
+          <a:xfrm>
+            <a:off x="5623560" y="1728512"/>
+            <a:ext cx="2184240" cy="228600"/>
+          </a:xfrm>
+          <a:prstGeom prst="rect">
+            <a:avLst/>
+          </a:prstGeom>
+          <a:noFill/>
+          <a:ln/>
+        </p:spPr>
+        <p:txBody>
+          <a:bodyPr wrap="square" lIns="0" tIns="0" rIns="0" bIns="0" rtlCol="0" anchor="ctr"/>
+          <a:lstStyle/>
+          <a:p>
+            <a:pPr marL="0" indent="0" algn="r">
+              <a:buNone/>
+            </a:pPr>
+            <a:r>
+              <a:rPr lang="en-US" sz="1000" b="1" kern="0" spc="600" dirty="0">
+                <a:solidFill>
+                  <a:srgbClr val="1D4ED8"/>
+                </a:solidFill>
+                <a:latin typeface="Arial" pitchFamily="34" charset="0"/>
+              </a:rPr>
+              <a:t>MB</a:t>
+            </a:r>
+            <a:endParaRPr lang="en-US" sz="1000" dirty="0"/>
+          </a:p>
+        </p:txBody>
+      </p:sp>
+      <p:pic>
+        <p:nvPicPr>
+          <p:cNvPr id="114" name="Jersey"/>
+          <p:cNvPicPr>
+            <a:picLocks noChangeAspect="1"/>
+          </p:cNvPicPr>
+          <p:nvPr/>
+        </p:nvPicPr>
+        <p:blipFill>
+          <a:blip r:embed="rId2"/>
+          <a:srcRect l="15476" t="8908" r="15476" b="10057"/>
+          <a:stretch>
+            <a:fillRect/>
+          </a:stretch>
+        </p:blipFill>
+        <p:spPr>
+          <a:xfrm>
+            <a:off x="5500680" y="1997112"/>
+            <a:ext cx="1105000" cy="1393405"/>
+          </a:xfrm>
+          <a:prstGeom prst="rect">
+            <a:avLst/>
+          </a:prstGeom>
+        </p:spPr>
+      </p:pic>
+      <p:pic>
+        <p:nvPicPr>
+          <p:cNvPr id="115" name="Jersey"/>
+          <p:cNvPicPr>
+            <a:picLocks noChangeAspect="1"/>
+          </p:cNvPicPr>
+          <p:nvPr/>
+        </p:nvPicPr>
+        <p:blipFill>
+          <a:blip r:embed="rId5"/>
+          <a:srcRect l="15179" t="8908" r="15179" b="9770"/>
+          <a:stretch>
+            <a:fillRect/>
+          </a:stretch>
+        </p:blipFill>
+        <p:spPr>
+          <a:xfrm>
+            <a:off x="6825680" y="1997112"/>
+            <a:ext cx="1105000" cy="1393405"/>
+          </a:xfrm>
+          <a:prstGeom prst="rect">
+            <a:avLst/>
+          </a:prstGeom>
+        </p:spPr>
+      </p:pic>
+      <p:sp>
+        <p:nvSpPr>
+          <p:cNvPr id="116" name="AtLabel"/>
+          <p:cNvSpPr/>
+          <p:nvPr/>
+        </p:nvSpPr>
+        <p:spPr>
+          <a:xfrm>
+            <a:off x="6605680" y="2583814"/>
+            <a:ext cx="220000" cy="220000"/>
+          </a:xfrm>
+          <a:prstGeom prst="rect">
+            <a:avLst/>
+          </a:prstGeom>
+          <a:noFill/>
+          <a:ln/>
+        </p:spPr>
+        <p:txBody>
+          <a:bodyPr wrap="none" lIns="0" tIns="0" rIns="0" bIns="0" rtlCol="0" anchor="ctr"/>
+          <a:lstStyle/>
+          <a:p>
+            <a:pPr marL="0" indent="0" algn="ctr">
+              <a:buNone/>
+            </a:pPr>
+            <a:r>
+              <a:rPr lang="en-US" sz="1200" i="1" kern="0" spc="0" dirty="0">
+                <a:solidFill>
+                  <a:srgbClr val="5B6573"/>
+                </a:solidFill>
+                <a:latin typeface="Arial" pitchFamily="34" charset="0"/>
+              </a:rPr>
+              <a:t>vs</a:t>
+            </a:r>
+            <a:endParaRPr lang="en-US" sz="1200" dirty="0"/>
+          </a:p>
+        </p:txBody>
+      </p:sp>
+      <p:sp>
+        <p:nvSpPr>
+          <p:cNvPr id="117" name="TeamName"/>
+          <p:cNvSpPr/>
+          <p:nvPr/>
+        </p:nvSpPr>
+        <p:spPr>
+          <a:xfrm>
+            <a:off x="5500680" y="3420517"/>
+            <a:ext cx="1105000" cy="300000"/>
+          </a:xfrm>
+          <a:prstGeom prst="rect">
+            <a:avLst/>
+          </a:prstGeom>
+          <a:noFill/>
+          <a:ln/>
+        </p:spPr>
+        <p:txBody>
+          <a:bodyPr wrap="square" lIns="0" tIns="0" rIns="0" bIns="0" rtlCol="0" anchor="t"/>
+          <a:lstStyle/>
+          <a:p>
+            <a:pPr marL="0" indent="0" algn="ctr">
+              <a:buNone/>
+            </a:pPr>
+            <a:r>
+              <a:rPr lang="en-US" sz="1600" b="1" kern="0" dirty="0">
+                <a:solidFill>
+                  <a:srgbClr val="0F1B2E"/>
+                </a:solidFill>
+                <a:latin typeface="Arial Black" pitchFamily="34" charset="0"/>
+              </a:rPr>
+              <a:t>Team 3</a:t>
+            </a:r>
+            <a:endParaRPr lang="en-US" sz="1600" dirty="0"/>
+          </a:p>
+        </p:txBody>
+      </p:sp>
+      <p:sp>
+        <p:nvSpPr>
+          <p:cNvPr id="118" name="TeamName"/>
+          <p:cNvSpPr/>
+          <p:nvPr/>
+        </p:nvSpPr>
+        <p:spPr>
+          <a:xfrm>
+            <a:off x="6825680" y="3420517"/>
+            <a:ext cx="1105000" cy="300000"/>
+          </a:xfrm>
+          <a:prstGeom prst="rect">
+            <a:avLst/>
+          </a:prstGeom>
+          <a:noFill/>
+          <a:ln/>
+        </p:spPr>
+        <p:txBody>
+          <a:bodyPr wrap="square" lIns="0" tIns="0" rIns="0" bIns="0" rtlCol="0" anchor="t"/>
+          <a:lstStyle/>
+          <a:p>
+            <a:pPr marL="0" indent="0" algn="ctr">
+              <a:buNone/>
+            </a:pPr>
+            <a:r>
+              <a:rPr lang="en-US" sz="1600" b="1" kern="0" dirty="0">
+                <a:solidFill>
+                  <a:srgbClr val="0F1B2E"/>
+                </a:solidFill>
+                <a:latin typeface="Arial Black" pitchFamily="34" charset="0"/>
+              </a:rPr>
+              <a:t>Minions</a:t>
+            </a:r>
+            <a:endParaRPr lang="en-US" sz="1600" dirty="0"/>
+          </a:p>
+        </p:txBody>
+      </p:sp>
+      <p:sp>
+        <p:nvSpPr>
+          <p:cNvPr id="57" name="HRBottom"/>
+          <p:cNvSpPr/>
+          <p:nvPr/>
+        </p:nvSpPr>
+        <p:spPr>
+          <a:xfrm>
+            <a:off x="365760" y="4828032"/>
+            <a:ext cx="8412480" cy="0"/>
+          </a:xfrm>
+          <a:prstGeom prst="line">
+            <a:avLst/>
+          </a:prstGeom>
+          <a:noFill/>
+          <a:ln w="9525">
+            <a:solidFill>
+              <a:srgbClr val="C9BFAE"/>
+            </a:solidFill>
+            <a:prstDash val="solid"/>
+          </a:ln>
+        </p:spPr>
+        <p:txBody>
+          <a:bodyPr/>
+          <a:lstStyle/>
+          <a:p>
+            <a:endParaRPr lang="en-US"/>
+          </a:p>
+        </p:txBody>
+      </p:sp>
+      <p:sp>
+        <p:nvSpPr>
+          <p:cNvPr id="58" name="FooterL"/>
+          <p:cNvSpPr/>
+          <p:nvPr/>
+        </p:nvSpPr>
+        <p:spPr>
+          <a:xfrm>
+            <a:off x="365760" y="4892040"/>
+            <a:ext cx="3657600" cy="228600"/>
+          </a:xfrm>
+          <a:prstGeom prst="rect">
+            <a:avLst/>
+          </a:prstGeom>
+          <a:noFill/>
+          <a:ln/>
+        </p:spPr>
+        <p:txBody>
+          <a:bodyPr wrap="square" lIns="0" tIns="0" rIns="0" bIns="0" rtlCol="0" anchor="ctr"/>
+          <a:lstStyle/>
+          <a:p>
+            <a:pPr marL="0" indent="0" algn="l">
+              <a:buNone/>
+            </a:pPr>
+            <a:r>
+              <a:rPr lang="en-US" sz="900" b="1" kern="0" spc="800" dirty="0">
+                <a:solidFill>
+                  <a:srgbClr val="0F1B2E"/>
+                </a:solidFill>
+                <a:latin typeface="Arial Black" pitchFamily="34" charset="0"/>
+              </a:rPr>
+              <a:t>WACC SPORTS</a:t>
+            </a:r>
+            <a:endParaRPr lang="en-US" sz="900" dirty="0"/>
+          </a:p>
+        </p:txBody>
+      </p:sp>
+      <p:sp>
+        <p:nvSpPr>
+          <p:cNvPr id="59" name="FooterR"/>
+          <p:cNvSpPr/>
+          <p:nvPr/>
+        </p:nvSpPr>
+        <p:spPr>
+          <a:xfrm>
+            <a:off x="5120640" y="4892040"/>
+            <a:ext cx="3657600" cy="228600"/>
+          </a:xfrm>
+          <a:prstGeom prst="rect">
+            <a:avLst/>
+          </a:prstGeom>
+          <a:noFill/>
+          <a:ln/>
+        </p:spPr>
+        <p:txBody>
+          <a:bodyPr wrap="square" lIns="0" tIns="0" rIns="0" bIns="0" rtlCol="0" anchor="ctr"/>
+          <a:lstStyle/>
+          <a:p>
+            <a:pPr marL="0" indent="0" algn="r">
+              <a:buNone/>
+            </a:pPr>
+            <a:r>
+              <a:rPr lang="en-US" sz="900" b="1" kern="0" spc="800" dirty="0">
+                <a:solidFill>
+                  <a:srgbClr val="5B6573"/>
+                </a:solidFill>
+                <a:latin typeface="Arial" pitchFamily="34" charset="0"/>
+              </a:rPr>
+              <a:t>OCTOBER 17, 2026</a:t>
+            </a:r>
+            <a:endParaRPr lang="en-US" sz="900" dirty="0"/>
+          </a:p>
+        </p:txBody>
+      </p:sp>
+      <p:pic>
+        <p:nvPicPr>
+          <p:cNvPr id="998" name="Image 0" descr="preencoded.png"/>
+          <p:cNvPicPr>
+            <a:picLocks noChangeAspect="1"/>
+          </p:cNvPicPr>
+          <p:nvPr/>
+        </p:nvPicPr>
+        <p:blipFill>
+          <a:blip r:embed="rId6"/>
+          <a:stretch>
+            <a:fillRect/>
+          </a:stretch>
+        </p:blipFill>
+        <p:spPr>
+          <a:xfrm>
+            <a:off x="4046316" y="2254444"/>
+            <a:ext cx="1032376" cy="1032376"/>
+          </a:xfrm>
+          <a:prstGeom prst="rect">
+            <a:avLst/>
+          </a:prstGeom>
+        </p:spPr>
+      </p:pic>
+    </p:spTree>
+  </p:cSld>
+  <p:clrMapOvr>
+    <a:masterClrMapping/>
+  </p:clrMapOvr>
+</p:sld>
+</file>
+
+<file path=ppt/slides/slide6.xml><?xml version="1.0" encoding="utf-8"?>
+<p:sld xmlns:a="http://schemas.openxmlformats.org/drawingml/2006/main" xmlns:r="http://schemas.openxmlformats.org/officeDocument/2006/relationships" xmlns:p="http://schemas.openxmlformats.org/presentationml/2006/main">
+  <p:cSld>
+    <p:spTree>
+      <p:nvGrpSpPr>
+        <p:cNvPr id="1" name=""/>
+        <p:cNvGrpSpPr/>
+        <p:nvPr/>
+      </p:nvGrpSpPr>
+      <p:grpSpPr>
+        <a:xfrm>
+          <a:off x="0" y="0"/>
+          <a:ext cx="0" cy="0"/>
+          <a:chOff x="0" y="0"/>
+          <a:chExt cx="0" cy="0"/>
+        </a:xfrm>
+      </p:grpSpPr>
       <p:sp>
         <p:nvSpPr>
           <p:cNvPr id="2" name="Time"/>
@@ -3689,7 +8097,7 @@
         </p:nvSpPr>
         <p:spPr>
           <a:xfrm>
-            <a:off x="1325880" y="1563920"/>
+            <a:off x="5440680" y="1563920"/>
             <a:ext cx="2550000" cy="2450000"/>
           </a:xfrm>
           <a:prstGeom prst="rect">
@@ -3728,7 +8136,7 @@
         </p:nvSpPr>
         <p:spPr>
           <a:xfrm>
-            <a:off x="1325880" y="1563920"/>
+            <a:off x="5440680" y="1563920"/>
             <a:ext cx="2550000" cy="73152"/>
           </a:xfrm>
           <a:prstGeom prst="rect">
@@ -3752,6 +8160,477 @@
           </a:p>
         </p:txBody>
       </p:sp>
+      <p:pic>
+        <p:nvPicPr>
+          <p:cNvPr id="105" name="Jersey"/>
+          <p:cNvPicPr>
+            <a:picLocks noChangeAspect="1"/>
+          </p:cNvPicPr>
+          <p:nvPr/>
+        </p:nvPicPr>
+        <p:blipFill>
+          <a:blip r:embed="rId2"/>
+          <a:srcRect l="15179" t="8908" r="15179" b="9770"/>
+          <a:stretch>
+            <a:fillRect/>
+          </a:stretch>
+        </p:blipFill>
+        <p:spPr>
+          <a:xfrm>
+            <a:off x="5500680" y="1997112"/>
+            <a:ext cx="1105000" cy="1393405"/>
+          </a:xfrm>
+          <a:prstGeom prst="rect">
+            <a:avLst/>
+          </a:prstGeom>
+        </p:spPr>
+      </p:pic>
+      <p:pic>
+        <p:nvPicPr>
+          <p:cNvPr id="106" name="Jersey"/>
+          <p:cNvPicPr>
+            <a:picLocks noChangeAspect="1"/>
+          </p:cNvPicPr>
+          <p:nvPr/>
+        </p:nvPicPr>
+        <p:blipFill>
+          <a:blip r:embed="rId3"/>
+          <a:srcRect l="15774" t="8621" r="15476" b="10057"/>
+          <a:stretch>
+            <a:fillRect/>
+          </a:stretch>
+        </p:blipFill>
+        <p:spPr>
+          <a:xfrm>
+            <a:off x="6825680" y="1997112"/>
+            <a:ext cx="1105000" cy="1393405"/>
+          </a:xfrm>
+          <a:prstGeom prst="rect">
+            <a:avLst/>
+          </a:prstGeom>
+        </p:spPr>
+      </p:pic>
+      <p:sp>
+        <p:nvSpPr>
+          <p:cNvPr id="107" name="AtLabel"/>
+          <p:cNvSpPr/>
+          <p:nvPr/>
+        </p:nvSpPr>
+        <p:spPr>
+          <a:xfrm>
+            <a:off x="6605680" y="2583814"/>
+            <a:ext cx="220000" cy="220000"/>
+          </a:xfrm>
+          <a:prstGeom prst="rect">
+            <a:avLst/>
+          </a:prstGeom>
+          <a:noFill/>
+          <a:ln/>
+        </p:spPr>
+        <p:txBody>
+          <a:bodyPr wrap="none" lIns="0" tIns="0" rIns="0" bIns="0" rtlCol="0" anchor="ctr"/>
+          <a:lstStyle/>
+          <a:p>
+            <a:pPr marL="0" indent="0" algn="ctr">
+              <a:buNone/>
+            </a:pPr>
+            <a:r>
+              <a:rPr lang="en-US" sz="1200" i="1" kern="0" spc="0" dirty="0">
+                <a:solidFill>
+                  <a:srgbClr val="5B6573"/>
+                </a:solidFill>
+                <a:latin typeface="Arial" pitchFamily="34" charset="0"/>
+              </a:rPr>
+              <a:t>vs</a:t>
+            </a:r>
+            <a:endParaRPr lang="en-US" sz="1200" dirty="0"/>
+          </a:p>
+        </p:txBody>
+      </p:sp>
+      <p:sp>
+        <p:nvSpPr>
+          <p:cNvPr id="108" name="TeamName"/>
+          <p:cNvSpPr/>
+          <p:nvPr/>
+        </p:nvSpPr>
+        <p:spPr>
+          <a:xfrm>
+            <a:off x="5500680" y="3420517"/>
+            <a:ext cx="1105000" cy="300000"/>
+          </a:xfrm>
+          <a:prstGeom prst="rect">
+            <a:avLst/>
+          </a:prstGeom>
+          <a:noFill/>
+          <a:ln/>
+        </p:spPr>
+        <p:txBody>
+          <a:bodyPr wrap="square" lIns="0" tIns="0" rIns="0" bIns="0" rtlCol="0" anchor="t"/>
+          <a:lstStyle/>
+          <a:p>
+            <a:pPr marL="0" indent="0" algn="ctr">
+              <a:buNone/>
+            </a:pPr>
+            <a:r>
+              <a:rPr lang="en-US" sz="1300" b="1" kern="0" dirty="0">
+                <a:solidFill>
+                  <a:srgbClr val="0F1B2E"/>
+                </a:solidFill>
+                <a:latin typeface="Arial Black" pitchFamily="34" charset="0"/>
+              </a:rPr>
+              <a:t>Team Cat Girls</a:t>
+            </a:r>
+            <a:endParaRPr lang="en-US" sz="1300" dirty="0"/>
+          </a:p>
+        </p:txBody>
+      </p:sp>
+      <p:sp>
+        <p:nvSpPr>
+          <p:cNvPr id="109" name="TeamName"/>
+          <p:cNvSpPr/>
+          <p:nvPr/>
+        </p:nvSpPr>
+        <p:spPr>
+          <a:xfrm>
+            <a:off x="6825680" y="3420517"/>
+            <a:ext cx="1105000" cy="300000"/>
+          </a:xfrm>
+          <a:prstGeom prst="rect">
+            <a:avLst/>
+          </a:prstGeom>
+          <a:noFill/>
+          <a:ln/>
+        </p:spPr>
+        <p:txBody>
+          <a:bodyPr wrap="square" lIns="0" tIns="0" rIns="0" bIns="0" rtlCol="0" anchor="t"/>
+          <a:lstStyle/>
+          <a:p>
+            <a:pPr marL="0" indent="0" algn="ctr">
+              <a:buNone/>
+            </a:pPr>
+            <a:r>
+              <a:rPr lang="en-US" sz="1300" b="1" kern="0" dirty="0">
+                <a:solidFill>
+                  <a:srgbClr val="0F1B2E"/>
+                </a:solidFill>
+                <a:latin typeface="Arial Black" pitchFamily="34" charset="0"/>
+              </a:rPr>
+              <a:t>Pink Panthers</a:t>
+            </a:r>
+            <a:endParaRPr lang="en-US" sz="1300" dirty="0"/>
+          </a:p>
+        </p:txBody>
+      </p:sp>
+      <p:sp>
+        <p:nvSpPr>
+          <p:cNvPr id="110" name="CardBG"/>
+          <p:cNvSpPr/>
+          <p:nvPr/>
+        </p:nvSpPr>
+        <p:spPr>
+          <a:xfrm>
+            <a:off x="1325880" y="1563920"/>
+            <a:ext cx="2550000" cy="2450000"/>
+          </a:xfrm>
+          <a:prstGeom prst="rect">
+            <a:avLst/>
+          </a:prstGeom>
+          <a:solidFill>
+            <a:srgbClr val="FFFFFF"/>
+          </a:solidFill>
+          <a:ln w="9525">
+            <a:solidFill>
+              <a:srgbClr val="E5DFCE"/>
+            </a:solidFill>
+            <a:prstDash val="solid"/>
+          </a:ln>
+          <a:effectLst>
+            <a:outerShdw blurRad="127000" dist="25400" dir="5400000" algn="bl" rotWithShape="0">
+              <a:srgbClr val="000000">
+                <a:alpha val="12000"/>
+              </a:srgbClr>
+            </a:outerShdw>
+          </a:effectLst>
+        </p:spPr>
+        <p:txBody>
+          <a:bodyPr/>
+          <a:lstStyle/>
+          <a:p>
+            <a:endParaRPr lang="en-US" dirty="0"/>
+          </a:p>
+        </p:txBody>
+      </p:sp>
+      <p:sp>
+        <p:nvSpPr>
+          <p:cNvPr id="111" name="CardStripe"/>
+          <p:cNvSpPr/>
+          <p:nvPr/>
+        </p:nvSpPr>
+        <p:spPr>
+          <a:xfrm>
+            <a:off x="1325880" y="1563920"/>
+            <a:ext cx="2550000" cy="73152"/>
+          </a:xfrm>
+          <a:prstGeom prst="rect">
+            <a:avLst/>
+          </a:prstGeom>
+          <a:solidFill>
+            <a:srgbClr val="A0A7B4"/>
+          </a:solidFill>
+          <a:ln w="12700">
+            <a:solidFill>
+              <a:srgbClr val="A0A7B4"/>
+            </a:solidFill>
+            <a:prstDash val="solid"/>
+          </a:ln>
+        </p:spPr>
+        <p:txBody>
+          <a:bodyPr/>
+          <a:lstStyle/>
+          <a:p>
+            <a:endParaRPr lang="en-US" dirty="0"/>
+          </a:p>
+        </p:txBody>
+      </p:sp>
+      <p:sp>
+        <p:nvSpPr>
+          <p:cNvPr id="114" name="NoGameTitle"/>
+          <p:cNvSpPr/>
+          <p:nvPr/>
+        </p:nvSpPr>
+        <p:spPr>
+          <a:xfrm>
+            <a:off x="1576752" y="2456479"/>
+            <a:ext cx="2048256" cy="347472"/>
+          </a:xfrm>
+          <a:prstGeom prst="rect">
+            <a:avLst/>
+          </a:prstGeom>
+          <a:noFill/>
+          <a:ln/>
+        </p:spPr>
+        <p:txBody>
+          <a:bodyPr wrap="square" lIns="0" tIns="0" rIns="0" bIns="0" rtlCol="0" anchor="ctr"/>
+          <a:lstStyle/>
+          <a:p>
+            <a:pPr marL="0" indent="0" algn="ctr">
+              <a:buNone/>
+            </a:pPr>
+            <a:r>
+              <a:rPr lang="en-US" sz="1600" b="1" dirty="0">
+                <a:solidFill>
+                  <a:srgbClr val="9AA1AC"/>
+                </a:solidFill>
+                <a:latin typeface="Arial Black" pitchFamily="34" charset="0"/>
+              </a:rPr>
+              <a:t>NO GAME</a:t>
+            </a:r>
+            <a:endParaRPr lang="en-US" sz="1600" dirty="0"/>
+          </a:p>
+        </p:txBody>
+      </p:sp>
+      <p:sp>
+        <p:nvSpPr>
+          <p:cNvPr id="115" name="NoGameAt"/>
+          <p:cNvSpPr/>
+          <p:nvPr/>
+        </p:nvSpPr>
+        <p:spPr>
+          <a:xfrm>
+            <a:off x="1576752" y="2712511"/>
+            <a:ext cx="2048256" cy="219456"/>
+          </a:xfrm>
+          <a:prstGeom prst="rect">
+            <a:avLst/>
+          </a:prstGeom>
+          <a:noFill/>
+          <a:ln/>
+        </p:spPr>
+        <p:txBody>
+          <a:bodyPr wrap="square" lIns="0" tIns="0" rIns="0" bIns="0" rtlCol="0" anchor="ctr"/>
+          <a:lstStyle/>
+          <a:p>
+            <a:pPr marL="0" indent="0" algn="ctr">
+              <a:buNone/>
+            </a:pPr>
+            <a:r>
+              <a:rPr lang="en-US" sz="1000" i="1" kern="0" spc="300" dirty="0">
+                <a:solidFill>
+                  <a:srgbClr val="9AA1AC"/>
+                </a:solidFill>
+                <a:latin typeface="Arial" pitchFamily="34" charset="0"/>
+              </a:rPr>
+              <a:t>at</a:t>
+            </a:r>
+            <a:endParaRPr lang="en-US" sz="1000" dirty="0"/>
+          </a:p>
+        </p:txBody>
+      </p:sp>
+      <p:sp>
+        <p:nvSpPr>
+          <p:cNvPr id="116" name="NoGameSubtitle"/>
+          <p:cNvSpPr/>
+          <p:nvPr/>
+        </p:nvSpPr>
+        <p:spPr>
+          <a:xfrm>
+            <a:off x="1576752" y="2913679"/>
+            <a:ext cx="2048256" cy="347472"/>
+          </a:xfrm>
+          <a:prstGeom prst="rect">
+            <a:avLst/>
+          </a:prstGeom>
+          <a:noFill/>
+          <a:ln/>
+        </p:spPr>
+        <p:txBody>
+          <a:bodyPr wrap="square" lIns="0" tIns="0" rIns="0" bIns="0" rtlCol="0" anchor="ctr"/>
+          <a:lstStyle/>
+          <a:p>
+            <a:pPr marL="0" indent="0" algn="ctr">
+              <a:buNone/>
+            </a:pPr>
+            <a:r>
+              <a:rPr lang="en-US" sz="1600" b="1" dirty="0">
+                <a:solidFill>
+                  <a:srgbClr val="9AA1AC"/>
+                </a:solidFill>
+                <a:latin typeface="Arial Black" pitchFamily="34" charset="0"/>
+              </a:rPr>
+              <a:t>THIS HOUR</a:t>
+            </a:r>
+            <a:endParaRPr lang="en-US" sz="1600" dirty="0"/>
+          </a:p>
+        </p:txBody>
+      </p:sp>
+      <p:sp>
+        <p:nvSpPr>
+          <p:cNvPr id="57" name="HRBottom"/>
+          <p:cNvSpPr/>
+          <p:nvPr/>
+        </p:nvSpPr>
+        <p:spPr>
+          <a:xfrm>
+            <a:off x="365760" y="4828032"/>
+            <a:ext cx="8412480" cy="0"/>
+          </a:xfrm>
+          <a:prstGeom prst="line">
+            <a:avLst/>
+          </a:prstGeom>
+          <a:noFill/>
+          <a:ln w="9525">
+            <a:solidFill>
+              <a:srgbClr val="C9BFAE"/>
+            </a:solidFill>
+            <a:prstDash val="solid"/>
+          </a:ln>
+        </p:spPr>
+        <p:txBody>
+          <a:bodyPr/>
+          <a:lstStyle/>
+          <a:p>
+            <a:endParaRPr lang="en-US"/>
+          </a:p>
+        </p:txBody>
+      </p:sp>
+      <p:sp>
+        <p:nvSpPr>
+          <p:cNvPr id="58" name="FooterL"/>
+          <p:cNvSpPr/>
+          <p:nvPr/>
+        </p:nvSpPr>
+        <p:spPr>
+          <a:xfrm>
+            <a:off x="365760" y="4892040"/>
+            <a:ext cx="3657600" cy="228600"/>
+          </a:xfrm>
+          <a:prstGeom prst="rect">
+            <a:avLst/>
+          </a:prstGeom>
+          <a:noFill/>
+          <a:ln/>
+        </p:spPr>
+        <p:txBody>
+          <a:bodyPr wrap="square" lIns="0" tIns="0" rIns="0" bIns="0" rtlCol="0" anchor="ctr"/>
+          <a:lstStyle/>
+          <a:p>
+            <a:pPr marL="0" indent="0" algn="l">
+              <a:buNone/>
+            </a:pPr>
+            <a:r>
+              <a:rPr lang="en-US" sz="900" b="1" kern="0" spc="800" dirty="0">
+                <a:solidFill>
+                  <a:srgbClr val="0F1B2E"/>
+                </a:solidFill>
+                <a:latin typeface="Arial Black" pitchFamily="34" charset="0"/>
+              </a:rPr>
+              <a:t>WACC SPORTS</a:t>
+            </a:r>
+            <a:endParaRPr lang="en-US" sz="900" dirty="0"/>
+          </a:p>
+        </p:txBody>
+      </p:sp>
+      <p:sp>
+        <p:nvSpPr>
+          <p:cNvPr id="59" name="FooterR"/>
+          <p:cNvSpPr/>
+          <p:nvPr/>
+        </p:nvSpPr>
+        <p:spPr>
+          <a:xfrm>
+            <a:off x="5120640" y="4892040"/>
+            <a:ext cx="3657600" cy="228600"/>
+          </a:xfrm>
+          <a:prstGeom prst="rect">
+            <a:avLst/>
+          </a:prstGeom>
+          <a:noFill/>
+          <a:ln/>
+        </p:spPr>
+        <p:txBody>
+          <a:bodyPr wrap="square" lIns="0" tIns="0" rIns="0" bIns="0" rtlCol="0" anchor="ctr"/>
+          <a:lstStyle/>
+          <a:p>
+            <a:pPr marL="0" indent="0" algn="r">
+              <a:buNone/>
+            </a:pPr>
+            <a:r>
+              <a:rPr lang="en-US" sz="900" b="1" kern="0" spc="800" dirty="0">
+                <a:solidFill>
+                  <a:srgbClr val="5B6573"/>
+                </a:solidFill>
+                <a:latin typeface="Arial" pitchFamily="34" charset="0"/>
+              </a:rPr>
+              <a:t>OCTOBER 17, 2026</a:t>
+            </a:r>
+            <a:endParaRPr lang="en-US" sz="900" dirty="0"/>
+          </a:p>
+        </p:txBody>
+      </p:sp>
+      <p:pic>
+        <p:nvPicPr>
+          <p:cNvPr id="998" name="Image 0" descr="preencoded.png"/>
+          <p:cNvPicPr>
+            <a:picLocks noChangeAspect="1"/>
+          </p:cNvPicPr>
+          <p:nvPr/>
+        </p:nvPicPr>
+        <p:blipFill>
+          <a:blip r:embed="rId4"/>
+          <a:stretch>
+            <a:fillRect/>
+          </a:stretch>
+        </p:blipFill>
+        <p:spPr>
+          <a:xfrm>
+            <a:off x="4046316" y="2254444"/>
+            <a:ext cx="1032376" cy="1032376"/>
+          </a:xfrm>
+          <a:prstGeom prst="rect">
+            <a:avLst/>
+          </a:prstGeom>
+        </p:spPr>
+      </p:pic>
       <p:sp>
         <p:nvSpPr>
           <p:cNvPr id="103" name="Label"/>
@@ -3797,7 +8676,7 @@
         </p:nvSpPr>
         <p:spPr>
           <a:xfrm>
-            <a:off x="1508760" y="1728512"/>
+            <a:off x="5623560" y="1728512"/>
             <a:ext cx="2184240" cy="228600"/>
           </a:xfrm>
           <a:prstGeom prst="rect">
@@ -3826,236 +8705,6 @@
           </a:p>
         </p:txBody>
       </p:sp>
-      <p:pic>
-        <p:nvPicPr>
-          <p:cNvPr id="105" name="Jersey"/>
-          <p:cNvPicPr>
-            <a:picLocks noChangeAspect="1"/>
-          </p:cNvPicPr>
-          <p:nvPr/>
-        </p:nvPicPr>
-        <p:blipFill>
-          <a:blip r:embed="rId6"/>
-          <a:stretch>
-            <a:fillRect/>
-          </a:stretch>
-        </p:blipFill>
-        <p:spPr>
-          <a:xfrm>
-            <a:off x="1385880" y="1997112"/>
-            <a:ext cx="1105000" cy="1393405"/>
-          </a:xfrm>
-          <a:prstGeom prst="rect">
-            <a:avLst/>
-          </a:prstGeom>
-        </p:spPr>
-      </p:pic>
-      <p:pic>
-        <p:nvPicPr>
-          <p:cNvPr id="106" name="Jersey"/>
-          <p:cNvPicPr>
-            <a:picLocks noChangeAspect="1"/>
-          </p:cNvPicPr>
-          <p:nvPr/>
-        </p:nvPicPr>
-        <p:blipFill>
-          <a:blip r:embed="rId7"/>
-          <a:stretch>
-            <a:fillRect/>
-          </a:stretch>
-        </p:blipFill>
-        <p:spPr>
-          <a:xfrm>
-            <a:off x="2710880" y="1997112"/>
-            <a:ext cx="1105000" cy="1393405"/>
-          </a:xfrm>
-          <a:prstGeom prst="rect">
-            <a:avLst/>
-          </a:prstGeom>
-        </p:spPr>
-      </p:pic>
-      <p:sp>
-        <p:nvSpPr>
-          <p:cNvPr id="107" name="AtLabel"/>
-          <p:cNvSpPr/>
-          <p:nvPr/>
-        </p:nvSpPr>
-        <p:spPr>
-          <a:xfrm>
-            <a:off x="2490880" y="2583814"/>
-            <a:ext cx="220000" cy="220000"/>
-          </a:xfrm>
-          <a:prstGeom prst="rect">
-            <a:avLst/>
-          </a:prstGeom>
-          <a:noFill/>
-          <a:ln/>
-        </p:spPr>
-        <p:txBody>
-          <a:bodyPr wrap="none" lIns="0" tIns="0" rIns="0" bIns="0" rtlCol="0" anchor="ctr"/>
-          <a:lstStyle/>
-          <a:p>
-            <a:pPr marL="0" indent="0" algn="ctr">
-              <a:buNone/>
-            </a:pPr>
-            <a:r>
-              <a:rPr lang="en-US" sz="1200" i="1" kern="0" spc="0" dirty="0">
-                <a:solidFill>
-                  <a:srgbClr val="5B6573"/>
-                </a:solidFill>
-                <a:latin typeface="Arial" pitchFamily="34" charset="0"/>
-              </a:rPr>
-              <a:t>vs</a:t>
-            </a:r>
-            <a:endParaRPr lang="en-US" sz="1200" dirty="0"/>
-          </a:p>
-        </p:txBody>
-      </p:sp>
-      <p:sp>
-        <p:nvSpPr>
-          <p:cNvPr id="108" name="TeamName"/>
-          <p:cNvSpPr/>
-          <p:nvPr/>
-        </p:nvSpPr>
-        <p:spPr>
-          <a:xfrm>
-            <a:off x="1385880" y="3420517"/>
-            <a:ext cx="1105000" cy="300000"/>
-          </a:xfrm>
-          <a:prstGeom prst="rect">
-            <a:avLst/>
-          </a:prstGeom>
-          <a:noFill/>
-          <a:ln/>
-        </p:spPr>
-        <p:txBody>
-          <a:bodyPr wrap="square" lIns="0" tIns="0" rIns="0" bIns="0" rtlCol="0" anchor="t"/>
-          <a:lstStyle/>
-          <a:p>
-            <a:pPr marL="0" indent="0" algn="ctr">
-              <a:buNone/>
-            </a:pPr>
-            <a:r>
-              <a:rPr lang="en-US" sz="1300" b="1" kern="0" dirty="0">
-                <a:solidFill>
-                  <a:srgbClr val="0F1B2E"/>
-                </a:solidFill>
-                <a:latin typeface="Arial Black" pitchFamily="34" charset="0"/>
-              </a:rPr>
-              <a:t>Team Cat Girls</a:t>
-            </a:r>
-            <a:endParaRPr lang="en-US" sz="1600" dirty="0"/>
-          </a:p>
-        </p:txBody>
-      </p:sp>
-      <p:sp>
-        <p:nvSpPr>
-          <p:cNvPr id="109" name="TeamName"/>
-          <p:cNvSpPr/>
-          <p:nvPr/>
-        </p:nvSpPr>
-        <p:spPr>
-          <a:xfrm>
-            <a:off x="2710880" y="3420517"/>
-            <a:ext cx="1105000" cy="300000"/>
-          </a:xfrm>
-          <a:prstGeom prst="rect">
-            <a:avLst/>
-          </a:prstGeom>
-          <a:noFill/>
-          <a:ln/>
-        </p:spPr>
-        <p:txBody>
-          <a:bodyPr wrap="square" lIns="0" tIns="0" rIns="0" bIns="0" rtlCol="0" anchor="t"/>
-          <a:lstStyle/>
-          <a:p>
-            <a:pPr marL="0" indent="0" algn="ctr">
-              <a:buNone/>
-            </a:pPr>
-            <a:r>
-              <a:rPr lang="en-US" sz="1300" b="1" kern="0" dirty="0">
-                <a:solidFill>
-                  <a:srgbClr val="0F1B2E"/>
-                </a:solidFill>
-                <a:latin typeface="Arial Black" pitchFamily="34" charset="0"/>
-              </a:rPr>
-              <a:t>Pink Panthers</a:t>
-            </a:r>
-            <a:endParaRPr lang="en-US" sz="1600" dirty="0"/>
-          </a:p>
-        </p:txBody>
-      </p:sp>
-      <p:sp>
-        <p:nvSpPr>
-          <p:cNvPr id="110" name="CardBG"/>
-          <p:cNvSpPr/>
-          <p:nvPr/>
-        </p:nvSpPr>
-        <p:spPr>
-          <a:xfrm>
-            <a:off x="5440680" y="1563920"/>
-            <a:ext cx="2550000" cy="2450000"/>
-          </a:xfrm>
-          <a:prstGeom prst="rect">
-            <a:avLst/>
-          </a:prstGeom>
-          <a:solidFill>
-            <a:srgbClr val="FFFFFF"/>
-          </a:solidFill>
-          <a:ln w="9525">
-            <a:solidFill>
-              <a:srgbClr val="E5DFCE"/>
-            </a:solidFill>
-            <a:prstDash val="solid"/>
-          </a:ln>
-          <a:effectLst>
-            <a:outerShdw blurRad="127000" dist="25400" dir="5400000" algn="bl" rotWithShape="0">
-              <a:srgbClr val="000000">
-                <a:alpha val="12000"/>
-              </a:srgbClr>
-            </a:outerShdw>
-          </a:effectLst>
-        </p:spPr>
-        <p:txBody>
-          <a:bodyPr/>
-          <a:lstStyle/>
-          <a:p>
-            <a:endParaRPr lang="en-US" dirty="0"/>
-          </a:p>
-        </p:txBody>
-      </p:sp>
-      <p:sp>
-        <p:nvSpPr>
-          <p:cNvPr id="111" name="CardStripe"/>
-          <p:cNvSpPr/>
-          <p:nvPr/>
-        </p:nvSpPr>
-        <p:spPr>
-          <a:xfrm>
-            <a:off x="5440680" y="1563920"/>
-            <a:ext cx="2550000" cy="73152"/>
-          </a:xfrm>
-          <a:prstGeom prst="rect">
-            <a:avLst/>
-          </a:prstGeom>
-          <a:solidFill>
-            <a:srgbClr val="A0A7B4"/>
-          </a:solidFill>
-          <a:ln w="12700">
-            <a:solidFill>
-              <a:srgbClr val="A0A7B4"/>
-            </a:solidFill>
-            <a:prstDash val="solid"/>
-          </a:ln>
-        </p:spPr>
-        <p:txBody>
-          <a:bodyPr/>
-          <a:lstStyle/>
-          <a:p>
-            <a:endParaRPr lang="en-US" dirty="0"/>
-          </a:p>
-        </p:txBody>
-      </p:sp>
       <p:sp>
         <p:nvSpPr>
           <p:cNvPr id="112" name="Label"/>
@@ -4121,4646 +8770,6 @@
           </a:p>
         </p:txBody>
       </p:sp>
-      <p:sp>
-        <p:nvSpPr>
-          <p:cNvPr id="114" name="NoGameTitle"/>
-          <p:cNvSpPr/>
-          <p:nvPr/>
-        </p:nvSpPr>
-        <p:spPr>
-          <a:xfrm>
-            <a:off x="5691552" y="2456479"/>
-            <a:ext cx="2048256" cy="347472"/>
-          </a:xfrm>
-          <a:prstGeom prst="rect">
-            <a:avLst/>
-          </a:prstGeom>
-          <a:noFill/>
-          <a:ln/>
-        </p:spPr>
-        <p:txBody>
-          <a:bodyPr wrap="square" lIns="0" tIns="0" rIns="0" bIns="0" rtlCol="0" anchor="ctr"/>
-          <a:lstStyle/>
-          <a:p>
-            <a:pPr marL="0" indent="0" algn="ctr">
-              <a:buNone/>
-            </a:pPr>
-            <a:r>
-              <a:rPr lang="en-US" sz="1600" b="1" dirty="0">
-                <a:solidFill>
-                  <a:srgbClr val="9AA1AC"/>
-                </a:solidFill>
-                <a:latin typeface="Arial Black" pitchFamily="34" charset="0"/>
-              </a:rPr>
-              <a:t>NO GAME</a:t>
-            </a:r>
-            <a:endParaRPr lang="en-US" sz="1600" dirty="0"/>
-          </a:p>
-        </p:txBody>
-      </p:sp>
-      <p:sp>
-        <p:nvSpPr>
-          <p:cNvPr id="115" name="NoGameAt"/>
-          <p:cNvSpPr/>
-          <p:nvPr/>
-        </p:nvSpPr>
-        <p:spPr>
-          <a:xfrm>
-            <a:off x="5691552" y="2712511"/>
-            <a:ext cx="2048256" cy="219456"/>
-          </a:xfrm>
-          <a:prstGeom prst="rect">
-            <a:avLst/>
-          </a:prstGeom>
-          <a:noFill/>
-          <a:ln/>
-        </p:spPr>
-        <p:txBody>
-          <a:bodyPr wrap="square" lIns="0" tIns="0" rIns="0" bIns="0" rtlCol="0" anchor="ctr"/>
-          <a:lstStyle/>
-          <a:p>
-            <a:pPr marL="0" indent="0" algn="ctr">
-              <a:buNone/>
-            </a:pPr>
-            <a:r>
-              <a:rPr lang="en-US" sz="1000" i="1" kern="0" spc="300" dirty="0">
-                <a:solidFill>
-                  <a:srgbClr val="9AA1AC"/>
-                </a:solidFill>
-                <a:latin typeface="Arial" pitchFamily="34" charset="0"/>
-              </a:rPr>
-              <a:t>at</a:t>
-            </a:r>
-            <a:endParaRPr lang="en-US" sz="1000" dirty="0"/>
-          </a:p>
-        </p:txBody>
-      </p:sp>
-      <p:sp>
-        <p:nvSpPr>
-          <p:cNvPr id="116" name="NoGameSubtitle"/>
-          <p:cNvSpPr/>
-          <p:nvPr/>
-        </p:nvSpPr>
-        <p:spPr>
-          <a:xfrm>
-            <a:off x="5691552" y="2913679"/>
-            <a:ext cx="2048256" cy="347472"/>
-          </a:xfrm>
-          <a:prstGeom prst="rect">
-            <a:avLst/>
-          </a:prstGeom>
-          <a:noFill/>
-          <a:ln/>
-        </p:spPr>
-        <p:txBody>
-          <a:bodyPr wrap="square" lIns="0" tIns="0" rIns="0" bIns="0" rtlCol="0" anchor="ctr"/>
-          <a:lstStyle/>
-          <a:p>
-            <a:pPr marL="0" indent="0" algn="ctr">
-              <a:buNone/>
-            </a:pPr>
-            <a:r>
-              <a:rPr lang="en-US" sz="1600" b="1" dirty="0">
-                <a:solidFill>
-                  <a:srgbClr val="9AA1AC"/>
-                </a:solidFill>
-                <a:latin typeface="Arial Black" pitchFamily="34" charset="0"/>
-              </a:rPr>
-              <a:t>THIS HOUR</a:t>
-            </a:r>
-            <a:endParaRPr lang="en-US" sz="1600" dirty="0"/>
-          </a:p>
-        </p:txBody>
-      </p:sp>
-      <p:sp>
-        <p:nvSpPr>
-          <p:cNvPr id="57" name="HRBottom"/>
-          <p:cNvSpPr/>
-          <p:nvPr/>
-        </p:nvSpPr>
-        <p:spPr>
-          <a:xfrm>
-            <a:off x="365760" y="4828032"/>
-            <a:ext cx="8412480" cy="0"/>
-          </a:xfrm>
-          <a:prstGeom prst="line">
-            <a:avLst/>
-          </a:prstGeom>
-          <a:noFill/>
-          <a:ln w="9525">
-            <a:solidFill>
-              <a:srgbClr val="C9BFAE"/>
-            </a:solidFill>
-            <a:prstDash val="solid"/>
-          </a:ln>
-        </p:spPr>
-        <p:txBody>
-          <a:bodyPr/>
-          <a:lstStyle/>
-          <a:p>
-            <a:endParaRPr lang="en-US"/>
-          </a:p>
-        </p:txBody>
-      </p:sp>
-      <p:sp>
-        <p:nvSpPr>
-          <p:cNvPr id="58" name="FooterL"/>
-          <p:cNvSpPr/>
-          <p:nvPr/>
-        </p:nvSpPr>
-        <p:spPr>
-          <a:xfrm>
-            <a:off x="365760" y="4892040"/>
-            <a:ext cx="3657600" cy="228600"/>
-          </a:xfrm>
-          <a:prstGeom prst="rect">
-            <a:avLst/>
-          </a:prstGeom>
-          <a:noFill/>
-          <a:ln/>
-        </p:spPr>
-        <p:txBody>
-          <a:bodyPr wrap="square" lIns="0" tIns="0" rIns="0" bIns="0" rtlCol="0" anchor="ctr"/>
-          <a:lstStyle/>
-          <a:p>
-            <a:pPr marL="0" indent="0" algn="l">
-              <a:buNone/>
-            </a:pPr>
-            <a:r>
-              <a:rPr lang="en-US" sz="900" b="1" kern="0" spc="800" dirty="0">
-                <a:solidFill>
-                  <a:srgbClr val="0F1B2E"/>
-                </a:solidFill>
-                <a:latin typeface="Arial Black" pitchFamily="34" charset="0"/>
-              </a:rPr>
-              <a:t>WACC SPORTS</a:t>
-            </a:r>
-            <a:endParaRPr lang="en-US" sz="900" dirty="0"/>
-          </a:p>
-        </p:txBody>
-      </p:sp>
-      <p:sp>
-        <p:nvSpPr>
-          <p:cNvPr id="59" name="FooterR"/>
-          <p:cNvSpPr/>
-          <p:nvPr/>
-        </p:nvSpPr>
-        <p:spPr>
-          <a:xfrm>
-            <a:off x="5120640" y="4892040"/>
-            <a:ext cx="3657600" cy="228600"/>
-          </a:xfrm>
-          <a:prstGeom prst="rect">
-            <a:avLst/>
-          </a:prstGeom>
-          <a:noFill/>
-          <a:ln/>
-        </p:spPr>
-        <p:txBody>
-          <a:bodyPr wrap="square" lIns="0" tIns="0" rIns="0" bIns="0" rtlCol="0" anchor="ctr"/>
-          <a:lstStyle/>
-          <a:p>
-            <a:pPr marL="0" indent="0" algn="r">
-              <a:buNone/>
-            </a:pPr>
-            <a:r>
-              <a:rPr lang="en-US" sz="900" b="1" kern="0" spc="800" dirty="0">
-                <a:solidFill>
-                  <a:srgbClr val="5B6573"/>
-                </a:solidFill>
-                <a:latin typeface="Arial" pitchFamily="34" charset="0"/>
-              </a:rPr>
-              <a:t>OCTOBER 17, 2026</a:t>
-            </a:r>
-            <a:endParaRPr lang="en-US" sz="900" dirty="0"/>
-          </a:p>
-        </p:txBody>
-      </p:sp>
-      <p:pic>
-        <p:nvPicPr>
-          <p:cNvPr id="998" name="Image 0" descr="preencoded.png"/>
-          <p:cNvPicPr>
-            <a:picLocks noChangeAspect="1"/>
-          </p:cNvPicPr>
-          <p:nvPr/>
-        </p:nvPicPr>
-        <p:blipFill>
-          <a:blip r:embed="rId4"/>
-          <a:stretch>
-            <a:fillRect/>
-          </a:stretch>
-        </p:blipFill>
-        <p:spPr>
-          <a:xfrm>
-            <a:off x="4046316" y="2254444"/>
-            <a:ext cx="1032376" cy="1032376"/>
-          </a:xfrm>
-          <a:prstGeom prst="rect">
-            <a:avLst/>
-          </a:prstGeom>
-        </p:spPr>
-      </p:pic>
-    </p:spTree>
-  </p:cSld>
-  <p:clrMapOvr>
-    <a:masterClrMapping/>
-  </p:clrMapOvr>
-</p:sld>
-</file>
-
-<file path=ppt/slides/slide2.xml><?xml version="1.0" encoding="utf-8"?>
-<p:sld xmlns:a="http://schemas.openxmlformats.org/drawingml/2006/main" xmlns:r="http://schemas.openxmlformats.org/officeDocument/2006/relationships" xmlns:p="http://schemas.openxmlformats.org/presentationml/2006/main">
-  <p:cSld>
-    <p:spTree>
-      <p:nvGrpSpPr>
-        <p:cNvPr id="1" name=""/>
-        <p:cNvGrpSpPr/>
-        <p:nvPr/>
-      </p:nvGrpSpPr>
-      <p:grpSpPr>
-        <a:xfrm>
-          <a:off x="0" y="0"/>
-          <a:ext cx="0" cy="0"/>
-          <a:chOff x="0" y="0"/>
-          <a:chExt cx="0" cy="0"/>
-        </a:xfrm>
-      </p:grpSpPr>
-      <p:sp>
-        <p:nvSpPr>
-          <p:cNvPr id="2" name="Time"/>
-          <p:cNvSpPr/>
-          <p:nvPr/>
-        </p:nvSpPr>
-        <p:spPr>
-          <a:xfrm>
-            <a:off x="365760" y="137160"/>
-            <a:ext cx="2743200" cy="502920"/>
-          </a:xfrm>
-          <a:prstGeom prst="rect">
-            <a:avLst/>
-          </a:prstGeom>
-          <a:noFill/>
-          <a:ln/>
-        </p:spPr>
-        <p:txBody>
-          <a:bodyPr wrap="square" lIns="0" tIns="0" rIns="0" bIns="0" rtlCol="0" anchor="ctr"/>
-          <a:lstStyle/>
-          <a:p>
-            <a:pPr marL="0" indent="0" algn="l">
-              <a:buNone/>
-            </a:pPr>
-            <a:r>
-              <a:rPr lang="en-US" sz="3000" b="1" kern="0" spc="100" dirty="0">
-                <a:solidFill>
-                  <a:srgbClr val="0F1B2E"/>
-                </a:solidFill>
-                <a:latin typeface="Arial Black" pitchFamily="34" charset="0"/>
-              </a:rPr>
-              <a:t>8 AM</a:t>
-            </a:r>
-            <a:endParaRPr lang="en-US" sz="3000" dirty="0"/>
-          </a:p>
-        </p:txBody>
-      </p:sp>
-      <p:grpSp>
-        <p:nvGrpSpPr>
-          <p:cNvPr id="60" name="PillGroup"/>
-          <p:cNvGrpSpPr/>
-          <p:nvPr/>
-        </p:nvGrpSpPr>
-        <p:grpSpPr>
-          <a:xfrm>
-            <a:off x="2838288" y="192416"/>
-            <a:ext cx="3467425" cy="429768"/>
-            <a:chOff x="2838288" y="114301"/>
-            <a:chExt cx="3467425" cy="429768"/>
-          </a:xfrm>
-        </p:grpSpPr>
-        <p:sp>
-          <p:nvSpPr>
-            <p:cNvPr id="3" name="Pill"/>
-            <p:cNvSpPr/>
-            <p:nvPr/>
-          </p:nvSpPr>
-          <p:spPr>
-            <a:xfrm>
-              <a:off x="2838288" y="114301"/>
-              <a:ext cx="3467425" cy="429768"/>
-            </a:xfrm>
-            <a:prstGeom prst="roundRect">
-              <a:avLst>
-                <a:gd name="adj" fmla="val 50000"/>
-              </a:avLst>
-            </a:prstGeom>
-            <a:solidFill>
-              <a:srgbClr val="1D4ED8"/>
-            </a:solidFill>
-            <a:ln w="12700">
-              <a:solidFill>
-                <a:srgbClr val="1D4ED8"/>
-              </a:solidFill>
-              <a:prstDash val="solid"/>
-            </a:ln>
-          </p:spPr>
-          <p:txBody>
-            <a:bodyPr/>
-            <a:lstStyle/>
-            <a:p>
-              <a:endParaRPr lang="en-US"/>
-            </a:p>
-          </p:txBody>
-        </p:sp>
-        <p:sp>
-          <p:nvSpPr>
-            <p:cNvPr id="4" name="PillText"/>
-            <p:cNvSpPr/>
-            <p:nvPr/>
-          </p:nvSpPr>
-          <p:spPr>
-            <a:xfrm>
-              <a:off x="3050073" y="164616"/>
-              <a:ext cx="3150000" cy="310896"/>
-            </a:xfrm>
-            <a:prstGeom prst="rect">
-              <a:avLst/>
-            </a:prstGeom>
-            <a:noFill/>
-            <a:ln/>
-          </p:spPr>
-          <p:txBody>
-            <a:bodyPr wrap="none" lIns="0" tIns="0" rIns="0" bIns="0" rtlCol="0" anchor="ctr"/>
-            <a:lstStyle/>
-            <a:p>
-              <a:pPr algn="ctr"/>
-              <a:r>
-                <a:rPr lang="en-US" sz="1100" b="1" kern="0" spc="600" dirty="0">
-                  <a:solidFill>
-                    <a:srgbClr val="FFFFFF"/>
-                  </a:solidFill>
-                  <a:latin typeface="Arial Black" pitchFamily="34" charset="0"/>
-                </a:rPr>
-                <a:t>CLINIC K</a:t>
-              </a:r>
-              <a:endParaRPr lang="en-US" sz="1100" dirty="0"/>
-            </a:p>
-          </p:txBody>
-        </p:sp>
-      </p:grpSp>
-      <p:sp>
-        <p:nvSpPr>
-          <p:cNvPr id="6" name="HRTop"/>
-          <p:cNvSpPr/>
-          <p:nvPr/>
-        </p:nvSpPr>
-        <p:spPr>
-          <a:xfrm>
-            <a:off x="365760" y="713232"/>
-            <a:ext cx="8412480" cy="0"/>
-          </a:xfrm>
-          <a:prstGeom prst="line">
-            <a:avLst/>
-          </a:prstGeom>
-          <a:noFill/>
-          <a:ln w="9525">
-            <a:solidFill>
-              <a:srgbClr val="C9BFAE"/>
-            </a:solidFill>
-            <a:prstDash val="solid"/>
-          </a:ln>
-        </p:spPr>
-        <p:txBody>
-          <a:bodyPr/>
-          <a:lstStyle/>
-          <a:p>
-            <a:endParaRPr lang="en-US"/>
-          </a:p>
-        </p:txBody>
-      </p:sp>
-      <p:sp>
-        <p:nvSpPr>
-          <p:cNvPr id="7" name="CourtRect"/>
-          <p:cNvSpPr/>
-          <p:nvPr/>
-        </p:nvSpPr>
-        <p:spPr>
-          <a:xfrm>
-            <a:off x="457200" y="914400"/>
-            <a:ext cx="8229600" cy="3749040"/>
-          </a:xfrm>
-          <a:prstGeom prst="rect">
-            <a:avLst/>
-          </a:prstGeom>
-          <a:ln w="19050">
-            <a:solidFill>
-              <a:srgbClr val="283241"/>
-            </a:solidFill>
-            <a:prstDash val="solid"/>
-          </a:ln>
-        </p:spPr>
-        <p:txBody>
-          <a:bodyPr/>
-          <a:lstStyle/>
-          <a:p>
-            <a:endParaRPr lang="en-US"/>
-          </a:p>
-        </p:txBody>
-      </p:sp>
-      <p:sp>
-        <p:nvSpPr>
-          <p:cNvPr id="1001" name="HalfCourtTop"/>
-          <p:cNvSpPr/>
-          <p:nvPr/>
-        </p:nvSpPr>
-        <p:spPr>
-          <a:xfrm>
-            <a:off x="4572000" y="914400"/>
-            <a:ext cx="0" cy="1340131"/>
-          </a:xfrm>
-          <a:prstGeom prst="line">
-            <a:avLst/>
-          </a:prstGeom>
-          <a:noFill/>
-          <a:ln w="15875">
-            <a:solidFill>
-              <a:srgbClr val="283241"/>
-            </a:solidFill>
-            <a:prstDash val="solid"/>
-          </a:ln>
-        </p:spPr>
-        <p:txBody>
-          <a:bodyPr/>
-          <a:lstStyle/>
-          <a:p>
-            <a:endParaRPr lang="en-US"/>
-          </a:p>
-        </p:txBody>
-      </p:sp>
-      <p:sp>
-        <p:nvSpPr>
-          <p:cNvPr id="1002" name="HalfCourtBottom"/>
-          <p:cNvSpPr/>
-          <p:nvPr/>
-        </p:nvSpPr>
-        <p:spPr>
-          <a:xfrm>
-            <a:off x="4572000" y="3286733"/>
-            <a:ext cx="0" cy="1376707"/>
-          </a:xfrm>
-          <a:prstGeom prst="line">
-            <a:avLst/>
-          </a:prstGeom>
-          <a:noFill/>
-          <a:ln w="15875">
-            <a:solidFill>
-              <a:srgbClr val="283241"/>
-            </a:solidFill>
-            <a:prstDash val="solid"/>
-          </a:ln>
-        </p:spPr>
-        <p:txBody>
-          <a:bodyPr/>
-          <a:lstStyle/>
-          <a:p>
-            <a:endParaRPr lang="en-US"/>
-          </a:p>
-        </p:txBody>
-      </p:sp>
-      <p:sp>
-        <p:nvSpPr>
-          <p:cNvPr id="10" name="LSquareL"/>
-          <p:cNvSpPr/>
-          <p:nvPr/>
-        </p:nvSpPr>
-        <p:spPr>
-          <a:xfrm>
-            <a:off x="457200" y="1889150"/>
-            <a:ext cx="1728216" cy="1799539"/>
-          </a:xfrm>
-          <a:prstGeom prst="rect">
-            <a:avLst/>
-          </a:prstGeom>
-          <a:ln w="15875">
-            <a:solidFill>
-              <a:srgbClr val="283241"/>
-            </a:solidFill>
-            <a:prstDash val="solid"/>
-          </a:ln>
-        </p:spPr>
-        <p:txBody>
-          <a:bodyPr/>
-          <a:lstStyle/>
-          <a:p>
-            <a:endParaRPr lang="en-US"/>
-          </a:p>
-        </p:txBody>
-      </p:sp>
-      <p:sp>
-        <p:nvSpPr>
-          <p:cNvPr id="11" name="LCircleL"/>
-          <p:cNvSpPr/>
-          <p:nvPr/>
-        </p:nvSpPr>
-        <p:spPr>
-          <a:xfrm>
-            <a:off x="1321637" y="1925141"/>
-            <a:ext cx="1727558" cy="1727558"/>
-          </a:xfrm>
-          <a:prstGeom prst="ellipse">
-            <a:avLst/>
-          </a:prstGeom>
-          <a:ln w="15875">
-            <a:solidFill>
-              <a:srgbClr val="283241"/>
-            </a:solidFill>
-            <a:prstDash val="dash"/>
-          </a:ln>
-        </p:spPr>
-        <p:txBody>
-          <a:bodyPr/>
-          <a:lstStyle/>
-          <a:p>
-            <a:endParaRPr lang="en-US"/>
-          </a:p>
-        </p:txBody>
-      </p:sp>
-      <p:sp>
-        <p:nvSpPr>
-          <p:cNvPr id="12" name="LMaskL"/>
-          <p:cNvSpPr/>
-          <p:nvPr/>
-        </p:nvSpPr>
-        <p:spPr>
-          <a:xfrm>
-            <a:off x="1312493" y="1879421"/>
-            <a:ext cx="882067" cy="1818998"/>
-          </a:xfrm>
-          <a:prstGeom prst="rect">
-            <a:avLst/>
-          </a:prstGeom>
-          <a:solidFill>
-            <a:srgbClr val="FFFFFF"/>
-          </a:solidFill>
-          <a:ln w="12700">
-            <a:solidFill>
-              <a:srgbClr val="FFFFFF"/>
-            </a:solidFill>
-            <a:prstDash val="solid"/>
-          </a:ln>
-        </p:spPr>
-        <p:txBody>
-          <a:bodyPr/>
-          <a:lstStyle/>
-          <a:p>
-            <a:endParaRPr lang="en-US"/>
-          </a:p>
-        </p:txBody>
-      </p:sp>
-      <p:sp>
-        <p:nvSpPr>
-          <p:cNvPr id="13" name="LSquareLOver"/>
-          <p:cNvSpPr/>
-          <p:nvPr/>
-        </p:nvSpPr>
-        <p:spPr>
-          <a:xfrm>
-            <a:off x="457200" y="1889150"/>
-            <a:ext cx="1728216" cy="1799539"/>
-          </a:xfrm>
-          <a:prstGeom prst="rect">
-            <a:avLst/>
-          </a:prstGeom>
-          <a:ln w="15875">
-            <a:solidFill>
-              <a:srgbClr val="283241"/>
-            </a:solidFill>
-            <a:prstDash val="solid"/>
-          </a:ln>
-        </p:spPr>
-        <p:txBody>
-          <a:bodyPr/>
-          <a:lstStyle/>
-          <a:p>
-            <a:endParaRPr lang="en-US"/>
-          </a:p>
-        </p:txBody>
-      </p:sp>
-      <p:sp>
-        <p:nvSpPr>
-          <p:cNvPr id="24" name="RSquareR"/>
-          <p:cNvSpPr/>
-          <p:nvPr/>
-        </p:nvSpPr>
-        <p:spPr>
-          <a:xfrm>
-            <a:off x="6958584" y="1889150"/>
-            <a:ext cx="1728216" cy="1799539"/>
-          </a:xfrm>
-          <a:prstGeom prst="rect">
-            <a:avLst/>
-          </a:prstGeom>
-          <a:ln w="15875">
-            <a:solidFill>
-              <a:srgbClr val="283241"/>
-            </a:solidFill>
-            <a:prstDash val="solid"/>
-          </a:ln>
-        </p:spPr>
-        <p:txBody>
-          <a:bodyPr/>
-          <a:lstStyle/>
-          <a:p>
-            <a:endParaRPr lang="en-US"/>
-          </a:p>
-        </p:txBody>
-      </p:sp>
-      <p:sp>
-        <p:nvSpPr>
-          <p:cNvPr id="25" name="RCircleR"/>
-          <p:cNvSpPr/>
-          <p:nvPr/>
-        </p:nvSpPr>
-        <p:spPr>
-          <a:xfrm>
-            <a:off x="6094805" y="1925141"/>
-            <a:ext cx="1727558" cy="1727558"/>
-          </a:xfrm>
-          <a:prstGeom prst="ellipse">
-            <a:avLst/>
-          </a:prstGeom>
-          <a:ln w="15875">
-            <a:solidFill>
-              <a:srgbClr val="283241"/>
-            </a:solidFill>
-            <a:prstDash val="dash"/>
-          </a:ln>
-        </p:spPr>
-        <p:txBody>
-          <a:bodyPr/>
-          <a:lstStyle/>
-          <a:p>
-            <a:endParaRPr lang="en-US"/>
-          </a:p>
-        </p:txBody>
-      </p:sp>
-      <p:sp>
-        <p:nvSpPr>
-          <p:cNvPr id="26" name="RMaskR"/>
-          <p:cNvSpPr/>
-          <p:nvPr/>
-        </p:nvSpPr>
-        <p:spPr>
-          <a:xfrm>
-            <a:off x="6958584" y="1879421"/>
-            <a:ext cx="882067" cy="1818998"/>
-          </a:xfrm>
-          <a:prstGeom prst="rect">
-            <a:avLst/>
-          </a:prstGeom>
-          <a:solidFill>
-            <a:srgbClr val="FFFFFF"/>
-          </a:solidFill>
-          <a:ln w="12700">
-            <a:solidFill>
-              <a:srgbClr val="FFFFFF"/>
-            </a:solidFill>
-            <a:prstDash val="solid"/>
-          </a:ln>
-        </p:spPr>
-        <p:txBody>
-          <a:bodyPr/>
-          <a:lstStyle/>
-          <a:p>
-            <a:endParaRPr lang="en-US"/>
-          </a:p>
-        </p:txBody>
-      </p:sp>
-      <p:sp>
-        <p:nvSpPr>
-          <p:cNvPr id="27" name="RSquareROver"/>
-          <p:cNvSpPr/>
-          <p:nvPr/>
-        </p:nvSpPr>
-        <p:spPr>
-          <a:xfrm>
-            <a:off x="6958584" y="1889150"/>
-            <a:ext cx="1728216" cy="1799539"/>
-          </a:xfrm>
-          <a:prstGeom prst="rect">
-            <a:avLst/>
-          </a:prstGeom>
-          <a:ln w="15875">
-            <a:solidFill>
-              <a:srgbClr val="283241"/>
-            </a:solidFill>
-            <a:prstDash val="solid"/>
-          </a:ln>
-        </p:spPr>
-        <p:txBody>
-          <a:bodyPr/>
-          <a:lstStyle/>
-          <a:p>
-            <a:endParaRPr lang="en-US"/>
-          </a:p>
-        </p:txBody>
-      </p:sp>
-      <p:sp>
-        <p:nvSpPr>
-          <p:cNvPr id="1003" name="HalfCourtHorizLeft"/>
-          <p:cNvSpPr/>
-          <p:nvPr/>
-        </p:nvSpPr>
-        <p:spPr>
-          <a:xfrm>
-            <a:off x="457200" y="2788920"/>
-            <a:ext cx="3589440" cy="0"/>
-          </a:xfrm>
-          <a:prstGeom prst="line">
-            <a:avLst/>
-          </a:prstGeom>
-          <a:noFill/>
-          <a:ln w="15875">
-            <a:solidFill>
-              <a:srgbClr val="283241"/>
-            </a:solidFill>
-            <a:prstDash val="solid"/>
-          </a:ln>
-        </p:spPr>
-        <p:txBody>
-          <a:bodyPr/>
-          <a:lstStyle/>
-          <a:p>
-            <a:endParaRPr lang="en-US"/>
-          </a:p>
-        </p:txBody>
-      </p:sp>
-      <p:sp>
-        <p:nvSpPr>
-          <p:cNvPr id="1004" name="HalfCourtHorizRight"/>
-          <p:cNvSpPr/>
-          <p:nvPr/>
-        </p:nvSpPr>
-        <p:spPr>
-          <a:xfrm>
-            <a:off x="5078368" y="2788920"/>
-            <a:ext cx="3608432" cy="0"/>
-          </a:xfrm>
-          <a:prstGeom prst="line">
-            <a:avLst/>
-          </a:prstGeom>
-          <a:noFill/>
-          <a:ln w="15875">
-            <a:solidFill>
-              <a:srgbClr val="283241"/>
-            </a:solidFill>
-            <a:prstDash val="solid"/>
-          </a:ln>
-        </p:spPr>
-        <p:txBody>
-          <a:bodyPr/>
-          <a:lstStyle/>
-          <a:p>
-            <a:endParaRPr lang="en-US"/>
-          </a:p>
-        </p:txBody>
-      </p:sp>
-      <p:sp>
-        <p:nvSpPr>
-          <p:cNvPr id="101" name="CardBG"/>
-          <p:cNvSpPr/>
-          <p:nvPr/>
-        </p:nvSpPr>
-        <p:spPr>
-          <a:xfrm>
-            <a:off x="1560900" y="939160"/>
-            <a:ext cx="1907400" cy="1825000"/>
-          </a:xfrm>
-          <a:prstGeom prst="rect">
-            <a:avLst/>
-          </a:prstGeom>
-          <a:solidFill>
-            <a:srgbClr val="FFFFFF"/>
-          </a:solidFill>
-          <a:ln w="9525">
-            <a:solidFill>
-              <a:srgbClr val="E5DFCE"/>
-            </a:solidFill>
-            <a:prstDash val="solid"/>
-          </a:ln>
-          <a:effectLst>
-            <a:outerShdw blurRad="127000" dist="25400" dir="5400000" algn="bl" rotWithShape="0">
-              <a:srgbClr val="000000">
-                <a:alpha val="12000"/>
-              </a:srgbClr>
-            </a:outerShdw>
-          </a:effectLst>
-        </p:spPr>
-        <p:txBody>
-          <a:bodyPr/>
-          <a:lstStyle/>
-          <a:p>
-            <a:endParaRPr lang="en-US" dirty="0"/>
-          </a:p>
-        </p:txBody>
-      </p:sp>
-      <p:sp>
-        <p:nvSpPr>
-          <p:cNvPr id="102" name="CardStripe"/>
-          <p:cNvSpPr/>
-          <p:nvPr/>
-        </p:nvSpPr>
-        <p:spPr>
-          <a:xfrm>
-            <a:off x="1560900" y="939160"/>
-            <a:ext cx="1907400" cy="73152"/>
-          </a:xfrm>
-          <a:prstGeom prst="rect">
-            <a:avLst/>
-          </a:prstGeom>
-          <a:solidFill>
-            <a:srgbClr val="1D4ED8"/>
-          </a:solidFill>
-          <a:ln w="12700">
-            <a:solidFill>
-              <a:srgbClr val="1D4ED8"/>
-            </a:solidFill>
-            <a:prstDash val="solid"/>
-          </a:ln>
-        </p:spPr>
-        <p:txBody>
-          <a:bodyPr/>
-          <a:lstStyle/>
-          <a:p>
-            <a:endParaRPr lang="en-US" dirty="0"/>
-          </a:p>
-        </p:txBody>
-      </p:sp>
-      <p:sp>
-        <p:nvSpPr>
-          <p:cNvPr id="103" name="Label"/>
-          <p:cNvSpPr/>
-          <p:nvPr/>
-        </p:nvSpPr>
-        <p:spPr>
-          <a:xfrm>
-            <a:off x="1743780" y="1029160"/>
-            <a:ext cx="1541640" cy="228600"/>
-          </a:xfrm>
-          <a:prstGeom prst="rect">
-            <a:avLst/>
-          </a:prstGeom>
-          <a:noFill/>
-          <a:ln/>
-        </p:spPr>
-        <p:txBody>
-          <a:bodyPr wrap="square" lIns="0" tIns="0" rIns="0" bIns="0" rtlCol="0" anchor="ctr"/>
-          <a:lstStyle/>
-          <a:p>
-            <a:pPr marL="0" indent="0" algn="l">
-              <a:buNone/>
-            </a:pPr>
-            <a:r>
-              <a:rPr lang="en-US" sz="1000" b="1" kern="0" spc="600" dirty="0">
-                <a:solidFill>
-                  <a:srgbClr val="5B6573"/>
-                </a:solidFill>
-                <a:latin typeface="Arial" pitchFamily="34" charset="0"/>
-              </a:rPr>
-              <a:t>COURT 1</a:t>
-            </a:r>
-            <a:endParaRPr lang="en-US" sz="1000" dirty="0"/>
-          </a:p>
-        </p:txBody>
-      </p:sp>
-      <p:sp>
-        <p:nvSpPr>
-          <p:cNvPr id="104" name="Label"/>
-          <p:cNvSpPr/>
-          <p:nvPr/>
-        </p:nvSpPr>
-        <p:spPr>
-          <a:xfrm>
-            <a:off x="1743780" y="1029160"/>
-            <a:ext cx="1541640" cy="228600"/>
-          </a:xfrm>
-          <a:prstGeom prst="rect">
-            <a:avLst/>
-          </a:prstGeom>
-          <a:noFill/>
-          <a:ln/>
-        </p:spPr>
-        <p:txBody>
-          <a:bodyPr wrap="square" lIns="0" tIns="0" rIns="0" bIns="0" rtlCol="0" anchor="ctr"/>
-          <a:lstStyle/>
-          <a:p>
-            <a:pPr marL="0" indent="0" algn="r">
-              <a:buNone/>
-            </a:pPr>
-            <a:r>
-              <a:rPr lang="en-US" sz="1000" b="1" kern="0" spc="600" dirty="0">
-                <a:solidFill>
-                  <a:srgbClr val="1D4ED8"/>
-                </a:solidFill>
-                <a:latin typeface="Arial" pitchFamily="34" charset="0"/>
-              </a:rPr>
-              <a:t>CK</a:t>
-            </a:r>
-            <a:endParaRPr lang="en-US" sz="1000" dirty="0"/>
-          </a:p>
-        </p:txBody>
-      </p:sp>
-      <p:pic>
-        <p:nvPicPr>
-          <p:cNvPr id="105" name="Jersey"/>
-          <p:cNvPicPr>
-            <a:picLocks noChangeAspect="1"/>
-          </p:cNvPicPr>
-          <p:nvPr/>
-        </p:nvPicPr>
-        <p:blipFill>
-          <a:blip r:embed="rId6"/>
-          <a:srcRect l="16071" t="10057" r="14881" b="8908"/>
-          <a:stretch>
-            <a:fillRect/>
-          </a:stretch>
-        </p:blipFill>
-        <p:spPr>
-          <a:xfrm>
-            <a:off x="1620900" y="1297760"/>
-            <a:ext cx="828700" cy="1044990"/>
-          </a:xfrm>
-          <a:prstGeom prst="rect">
-            <a:avLst/>
-          </a:prstGeom>
-        </p:spPr>
-      </p:pic>
-      <p:pic>
-        <p:nvPicPr>
-          <p:cNvPr id="106" name="Jersey"/>
-          <p:cNvPicPr>
-            <a:picLocks noChangeAspect="1"/>
-          </p:cNvPicPr>
-          <p:nvPr/>
-        </p:nvPicPr>
-        <p:blipFill>
-          <a:blip r:embed="rId3"/>
-          <a:srcRect l="15774" t="8621" r="15476" b="10057"/>
-          <a:stretch>
-            <a:fillRect/>
-          </a:stretch>
-        </p:blipFill>
-        <p:spPr>
-          <a:xfrm>
-            <a:off x="2579600" y="1297760"/>
-            <a:ext cx="828700" cy="1044990"/>
-          </a:xfrm>
-          <a:prstGeom prst="rect">
-            <a:avLst/>
-          </a:prstGeom>
-        </p:spPr>
-      </p:pic>
-      <p:sp>
-        <p:nvSpPr>
-          <p:cNvPr id="107" name="AtLabel"/>
-          <p:cNvSpPr/>
-          <p:nvPr/>
-        </p:nvSpPr>
-        <p:spPr>
-          <a:xfrm>
-            <a:off x="2449600" y="1735255"/>
-            <a:ext cx="170000" cy="170000"/>
-          </a:xfrm>
-          <a:prstGeom prst="rect">
-            <a:avLst/>
-          </a:prstGeom>
-          <a:noFill/>
-          <a:ln/>
-        </p:spPr>
-        <p:txBody>
-          <a:bodyPr wrap="none" lIns="0" tIns="0" rIns="0" bIns="0" rtlCol="0" anchor="ctr"/>
-          <a:lstStyle/>
-          <a:p>
-            <a:pPr marL="0" indent="0" algn="ctr">
-              <a:buNone/>
-            </a:pPr>
-            <a:r>
-              <a:rPr lang="en-US" sz="1200" i="1" kern="0" spc="0" dirty="0">
-                <a:solidFill>
-                  <a:srgbClr val="5B6573"/>
-                </a:solidFill>
-                <a:latin typeface="Arial" pitchFamily="34" charset="0"/>
-              </a:rPr>
-              <a:t>vs</a:t>
-            </a:r>
-            <a:endParaRPr lang="en-US" sz="1200" dirty="0"/>
-          </a:p>
-        </p:txBody>
-      </p:sp>
-      <p:sp>
-        <p:nvSpPr>
-          <p:cNvPr id="108" name="TeamName"/>
-          <p:cNvSpPr/>
-          <p:nvPr/>
-        </p:nvSpPr>
-        <p:spPr>
-          <a:xfrm>
-            <a:off x="1620900" y="2367750"/>
-            <a:ext cx="828700" cy="300000"/>
-          </a:xfrm>
-          <a:prstGeom prst="rect">
-            <a:avLst/>
-          </a:prstGeom>
-          <a:noFill/>
-          <a:ln/>
-        </p:spPr>
-        <p:txBody>
-          <a:bodyPr wrap="square" lIns="0" tIns="0" rIns="0" bIns="0" rtlCol="0" anchor="t"/>
-          <a:lstStyle/>
-          <a:p>
-            <a:pPr marL="0" indent="0" algn="ctr">
-              <a:buNone/>
-            </a:pPr>
-            <a:r>
-              <a:rPr lang="en-US" sz="1100" b="1" kern="0" dirty="0">
-                <a:solidFill>
-                  <a:srgbClr val="0F1B2E"/>
-                </a:solidFill>
-                <a:latin typeface="Arial Black" pitchFamily="34" charset="0"/>
-              </a:rPr>
-              <a:t>The Tigers</a:t>
-            </a:r>
-            <a:endParaRPr lang="en-US" sz="1100" dirty="0"/>
-          </a:p>
-        </p:txBody>
-      </p:sp>
-      <p:sp>
-        <p:nvSpPr>
-          <p:cNvPr id="109" name="TeamName"/>
-          <p:cNvSpPr/>
-          <p:nvPr/>
-        </p:nvSpPr>
-        <p:spPr>
-          <a:xfrm>
-            <a:off x="2579600" y="2367750"/>
-            <a:ext cx="828700" cy="300000"/>
-          </a:xfrm>
-          <a:prstGeom prst="rect">
-            <a:avLst/>
-          </a:prstGeom>
-          <a:noFill/>
-          <a:ln/>
-        </p:spPr>
-        <p:txBody>
-          <a:bodyPr wrap="square" lIns="0" tIns="0" rIns="0" bIns="0" rtlCol="0" anchor="t"/>
-          <a:lstStyle/>
-          <a:p>
-            <a:pPr marL="0" indent="0" algn="ctr">
-              <a:buNone/>
-            </a:pPr>
-            <a:r>
-              <a:rPr lang="en-US" sz="1100" b="1" kern="0" dirty="0">
-                <a:solidFill>
-                  <a:srgbClr val="0F1B2E"/>
-                </a:solidFill>
-                <a:latin typeface="Arial Black" pitchFamily="34" charset="0"/>
-              </a:rPr>
-              <a:t>The Pink Tigers</a:t>
-            </a:r>
-            <a:endParaRPr lang="en-US" sz="1100" dirty="0"/>
-          </a:p>
-        </p:txBody>
-      </p:sp>
-      <p:sp>
-        <p:nvSpPr>
-          <p:cNvPr id="110" name="CardBG"/>
-          <p:cNvSpPr/>
-          <p:nvPr/>
-        </p:nvSpPr>
-        <p:spPr>
-          <a:xfrm>
-            <a:off x="1560900" y="2813680"/>
-            <a:ext cx="1907400" cy="1825000"/>
-          </a:xfrm>
-          <a:prstGeom prst="rect">
-            <a:avLst/>
-          </a:prstGeom>
-          <a:solidFill>
-            <a:srgbClr val="FFFFFF"/>
-          </a:solidFill>
-          <a:ln w="9525">
-            <a:solidFill>
-              <a:srgbClr val="E5DFCE"/>
-            </a:solidFill>
-            <a:prstDash val="solid"/>
-          </a:ln>
-          <a:effectLst>
-            <a:outerShdw blurRad="127000" dist="25400" dir="5400000" algn="bl" rotWithShape="0">
-              <a:srgbClr val="000000">
-                <a:alpha val="12000"/>
-              </a:srgbClr>
-            </a:outerShdw>
-          </a:effectLst>
-        </p:spPr>
-        <p:txBody>
-          <a:bodyPr/>
-          <a:lstStyle/>
-          <a:p>
-            <a:endParaRPr lang="en-US" dirty="0"/>
-          </a:p>
-        </p:txBody>
-      </p:sp>
-      <p:sp>
-        <p:nvSpPr>
-          <p:cNvPr id="111" name="CardStripe"/>
-          <p:cNvSpPr/>
-          <p:nvPr/>
-        </p:nvSpPr>
-        <p:spPr>
-          <a:xfrm>
-            <a:off x="1560900" y="2813680"/>
-            <a:ext cx="1907400" cy="73152"/>
-          </a:xfrm>
-          <a:prstGeom prst="rect">
-            <a:avLst/>
-          </a:prstGeom>
-          <a:solidFill>
-            <a:srgbClr val="1D4ED8"/>
-          </a:solidFill>
-          <a:ln w="12700">
-            <a:solidFill>
-              <a:srgbClr val="1D4ED8"/>
-            </a:solidFill>
-            <a:prstDash val="solid"/>
-          </a:ln>
-        </p:spPr>
-        <p:txBody>
-          <a:bodyPr/>
-          <a:lstStyle/>
-          <a:p>
-            <a:endParaRPr lang="en-US" dirty="0"/>
-          </a:p>
-        </p:txBody>
-      </p:sp>
-      <p:sp>
-        <p:nvSpPr>
-          <p:cNvPr id="112" name="Label"/>
-          <p:cNvSpPr/>
-          <p:nvPr/>
-        </p:nvSpPr>
-        <p:spPr>
-          <a:xfrm>
-            <a:off x="1743780" y="2903680"/>
-            <a:ext cx="1541640" cy="228600"/>
-          </a:xfrm>
-          <a:prstGeom prst="rect">
-            <a:avLst/>
-          </a:prstGeom>
-          <a:noFill/>
-          <a:ln/>
-        </p:spPr>
-        <p:txBody>
-          <a:bodyPr wrap="square" lIns="0" tIns="0" rIns="0" bIns="0" rtlCol="0" anchor="ctr"/>
-          <a:lstStyle/>
-          <a:p>
-            <a:pPr marL="0" indent="0" algn="l">
-              <a:buNone/>
-            </a:pPr>
-            <a:r>
-              <a:rPr lang="en-US" sz="1000" b="1" kern="0" spc="600" dirty="0">
-                <a:solidFill>
-                  <a:srgbClr val="5B6573"/>
-                </a:solidFill>
-                <a:latin typeface="Arial" pitchFamily="34" charset="0"/>
-              </a:rPr>
-              <a:t>COURT 2</a:t>
-            </a:r>
-            <a:endParaRPr lang="en-US" sz="1000" dirty="0"/>
-          </a:p>
-        </p:txBody>
-      </p:sp>
-      <p:sp>
-        <p:nvSpPr>
-          <p:cNvPr id="113" name="Label"/>
-          <p:cNvSpPr/>
-          <p:nvPr/>
-        </p:nvSpPr>
-        <p:spPr>
-          <a:xfrm>
-            <a:off x="1743780" y="2903680"/>
-            <a:ext cx="1541640" cy="228600"/>
-          </a:xfrm>
-          <a:prstGeom prst="rect">
-            <a:avLst/>
-          </a:prstGeom>
-          <a:noFill/>
-          <a:ln/>
-        </p:spPr>
-        <p:txBody>
-          <a:bodyPr wrap="square" lIns="0" tIns="0" rIns="0" bIns="0" rtlCol="0" anchor="ctr"/>
-          <a:lstStyle/>
-          <a:p>
-            <a:pPr marL="0" indent="0" algn="r">
-              <a:buNone/>
-            </a:pPr>
-            <a:r>
-              <a:rPr lang="en-US" sz="1000" b="1" kern="0" spc="600" dirty="0">
-                <a:solidFill>
-                  <a:srgbClr val="1D4ED8"/>
-                </a:solidFill>
-                <a:latin typeface="Arial" pitchFamily="34" charset="0"/>
-              </a:rPr>
-              <a:t>CK</a:t>
-            </a:r>
-            <a:endParaRPr lang="en-US" sz="1000" dirty="0"/>
-          </a:p>
-        </p:txBody>
-      </p:sp>
-      <p:pic>
-        <p:nvPicPr>
-          <p:cNvPr id="114" name="Jersey"/>
-          <p:cNvPicPr>
-            <a:picLocks noChangeAspect="1"/>
-          </p:cNvPicPr>
-          <p:nvPr/>
-        </p:nvPicPr>
-        <p:blipFill>
-          <a:blip r:embed="rId9"/>
-          <a:srcRect l="15476" t="8908" r="15476" b="10057"/>
-          <a:stretch>
-            <a:fillRect/>
-          </a:stretch>
-        </p:blipFill>
-        <p:spPr>
-          <a:xfrm>
-            <a:off x="1620900" y="3172280"/>
-            <a:ext cx="828700" cy="1044990"/>
-          </a:xfrm>
-          <a:prstGeom prst="rect">
-            <a:avLst/>
-          </a:prstGeom>
-        </p:spPr>
-      </p:pic>
-      <p:pic>
-        <p:nvPicPr>
-          <p:cNvPr id="115" name="Jersey"/>
-          <p:cNvPicPr>
-            <a:picLocks noChangeAspect="1"/>
-          </p:cNvPicPr>
-          <p:nvPr/>
-        </p:nvPicPr>
-        <p:blipFill>
-          <a:blip r:embed="rId2"/>
-          <a:srcRect l="15179" t="8908" r="15179" b="9770"/>
-          <a:stretch>
-            <a:fillRect/>
-          </a:stretch>
-        </p:blipFill>
-        <p:spPr>
-          <a:xfrm>
-            <a:off x="2579600" y="3172280"/>
-            <a:ext cx="828700" cy="1044990"/>
-          </a:xfrm>
-          <a:prstGeom prst="rect">
-            <a:avLst/>
-          </a:prstGeom>
-        </p:spPr>
-      </p:pic>
-      <p:sp>
-        <p:nvSpPr>
-          <p:cNvPr id="116" name="AtLabel"/>
-          <p:cNvSpPr/>
-          <p:nvPr/>
-        </p:nvSpPr>
-        <p:spPr>
-          <a:xfrm>
-            <a:off x="2449600" y="3609775"/>
-            <a:ext cx="170000" cy="170000"/>
-          </a:xfrm>
-          <a:prstGeom prst="rect">
-            <a:avLst/>
-          </a:prstGeom>
-          <a:noFill/>
-          <a:ln/>
-        </p:spPr>
-        <p:txBody>
-          <a:bodyPr wrap="none" lIns="0" tIns="0" rIns="0" bIns="0" rtlCol="0" anchor="ctr"/>
-          <a:lstStyle/>
-          <a:p>
-            <a:pPr marL="0" indent="0" algn="ctr">
-              <a:buNone/>
-            </a:pPr>
-            <a:r>
-              <a:rPr lang="en-US" sz="1200" i="1" kern="0" spc="0" dirty="0">
-                <a:solidFill>
-                  <a:srgbClr val="5B6573"/>
-                </a:solidFill>
-                <a:latin typeface="Arial" pitchFamily="34" charset="0"/>
-              </a:rPr>
-              <a:t>vs</a:t>
-            </a:r>
-            <a:endParaRPr lang="en-US" sz="1200" dirty="0"/>
-          </a:p>
-        </p:txBody>
-      </p:sp>
-      <p:sp>
-        <p:nvSpPr>
-          <p:cNvPr id="117" name="TeamName"/>
-          <p:cNvSpPr/>
-          <p:nvPr/>
-        </p:nvSpPr>
-        <p:spPr>
-          <a:xfrm>
-            <a:off x="1620900" y="4242270"/>
-            <a:ext cx="828700" cy="300000"/>
-          </a:xfrm>
-          <a:prstGeom prst="rect">
-            <a:avLst/>
-          </a:prstGeom>
-          <a:noFill/>
-          <a:ln/>
-        </p:spPr>
-        <p:txBody>
-          <a:bodyPr wrap="square" lIns="0" tIns="0" rIns="0" bIns="0" rtlCol="0" anchor="t"/>
-          <a:lstStyle/>
-          <a:p>
-            <a:pPr marL="0" indent="0" algn="ctr">
-              <a:buNone/>
-            </a:pPr>
-            <a:r>
-              <a:rPr lang="en-US" sz="1100" b="1" kern="0" dirty="0">
-                <a:solidFill>
-                  <a:srgbClr val="0F1B2E"/>
-                </a:solidFill>
-                <a:latin typeface="Arial Black" pitchFamily="34" charset="0"/>
-              </a:rPr>
-              <a:t>Green Dragons</a:t>
-            </a:r>
-            <a:endParaRPr lang="en-US" sz="1100" dirty="0"/>
-          </a:p>
-        </p:txBody>
-      </p:sp>
-      <p:sp>
-        <p:nvSpPr>
-          <p:cNvPr id="118" name="TeamName"/>
-          <p:cNvSpPr/>
-          <p:nvPr/>
-        </p:nvSpPr>
-        <p:spPr>
-          <a:xfrm>
-            <a:off x="2579600" y="4242270"/>
-            <a:ext cx="828700" cy="300000"/>
-          </a:xfrm>
-          <a:prstGeom prst="rect">
-            <a:avLst/>
-          </a:prstGeom>
-          <a:noFill/>
-          <a:ln/>
-        </p:spPr>
-        <p:txBody>
-          <a:bodyPr wrap="square" lIns="0" tIns="0" rIns="0" bIns="0" rtlCol="0" anchor="t"/>
-          <a:lstStyle/>
-          <a:p>
-            <a:pPr marL="0" indent="0" algn="ctr">
-              <a:buNone/>
-            </a:pPr>
-            <a:r>
-              <a:rPr lang="en-US" sz="1100" b="1" kern="0" dirty="0">
-                <a:solidFill>
-                  <a:srgbClr val="0F1B2E"/>
-                </a:solidFill>
-                <a:latin typeface="Arial Black" pitchFamily="34" charset="0"/>
-              </a:rPr>
-              <a:t>Team 2</a:t>
-            </a:r>
-            <a:endParaRPr lang="en-US" sz="1100" dirty="0"/>
-          </a:p>
-        </p:txBody>
-      </p:sp>
-      <p:sp>
-        <p:nvSpPr>
-          <p:cNvPr id="119" name="CardBG"/>
-          <p:cNvSpPr/>
-          <p:nvPr/>
-        </p:nvSpPr>
-        <p:spPr>
-          <a:xfrm>
-            <a:off x="5675700" y="939160"/>
-            <a:ext cx="1907400" cy="1825000"/>
-          </a:xfrm>
-          <a:prstGeom prst="rect">
-            <a:avLst/>
-          </a:prstGeom>
-          <a:solidFill>
-            <a:srgbClr val="FFFFFF"/>
-          </a:solidFill>
-          <a:ln w="9525">
-            <a:solidFill>
-              <a:srgbClr val="E5DFCE"/>
-            </a:solidFill>
-            <a:prstDash val="solid"/>
-          </a:ln>
-          <a:effectLst>
-            <a:outerShdw blurRad="127000" dist="25400" dir="5400000" algn="bl" rotWithShape="0">
-              <a:srgbClr val="000000">
-                <a:alpha val="12000"/>
-              </a:srgbClr>
-            </a:outerShdw>
-          </a:effectLst>
-        </p:spPr>
-        <p:txBody>
-          <a:bodyPr/>
-          <a:lstStyle/>
-          <a:p>
-            <a:endParaRPr lang="en-US" dirty="0"/>
-          </a:p>
-        </p:txBody>
-      </p:sp>
-      <p:sp>
-        <p:nvSpPr>
-          <p:cNvPr id="120" name="CardStripe"/>
-          <p:cNvSpPr/>
-          <p:nvPr/>
-        </p:nvSpPr>
-        <p:spPr>
-          <a:xfrm>
-            <a:off x="5675700" y="939160"/>
-            <a:ext cx="1907400" cy="73152"/>
-          </a:xfrm>
-          <a:prstGeom prst="rect">
-            <a:avLst/>
-          </a:prstGeom>
-          <a:solidFill>
-            <a:srgbClr val="1D4ED8"/>
-          </a:solidFill>
-          <a:ln w="12700">
-            <a:solidFill>
-              <a:srgbClr val="1D4ED8"/>
-            </a:solidFill>
-            <a:prstDash val="solid"/>
-          </a:ln>
-        </p:spPr>
-        <p:txBody>
-          <a:bodyPr/>
-          <a:lstStyle/>
-          <a:p>
-            <a:endParaRPr lang="en-US" dirty="0"/>
-          </a:p>
-        </p:txBody>
-      </p:sp>
-      <p:sp>
-        <p:nvSpPr>
-          <p:cNvPr id="121" name="Label"/>
-          <p:cNvSpPr/>
-          <p:nvPr/>
-        </p:nvSpPr>
-        <p:spPr>
-          <a:xfrm>
-            <a:off x="5858580" y="1029160"/>
-            <a:ext cx="1541640" cy="228600"/>
-          </a:xfrm>
-          <a:prstGeom prst="rect">
-            <a:avLst/>
-          </a:prstGeom>
-          <a:noFill/>
-          <a:ln/>
-        </p:spPr>
-        <p:txBody>
-          <a:bodyPr wrap="square" lIns="0" tIns="0" rIns="0" bIns="0" rtlCol="0" anchor="ctr"/>
-          <a:lstStyle/>
-          <a:p>
-            <a:pPr marL="0" indent="0" algn="l">
-              <a:buNone/>
-            </a:pPr>
-            <a:r>
-              <a:rPr lang="en-US" sz="1000" b="1" kern="0" spc="600" dirty="0">
-                <a:solidFill>
-                  <a:srgbClr val="5B6573"/>
-                </a:solidFill>
-                <a:latin typeface="Arial" pitchFamily="34" charset="0"/>
-              </a:rPr>
-              <a:t>COURT 3</a:t>
-            </a:r>
-            <a:endParaRPr lang="en-US" sz="1000" dirty="0"/>
-          </a:p>
-        </p:txBody>
-      </p:sp>
-      <p:sp>
-        <p:nvSpPr>
-          <p:cNvPr id="122" name="Label"/>
-          <p:cNvSpPr/>
-          <p:nvPr/>
-        </p:nvSpPr>
-        <p:spPr>
-          <a:xfrm>
-            <a:off x="5858580" y="1029160"/>
-            <a:ext cx="1541640" cy="228600"/>
-          </a:xfrm>
-          <a:prstGeom prst="rect">
-            <a:avLst/>
-          </a:prstGeom>
-          <a:noFill/>
-          <a:ln/>
-        </p:spPr>
-        <p:txBody>
-          <a:bodyPr wrap="square" lIns="0" tIns="0" rIns="0" bIns="0" rtlCol="0" anchor="ctr"/>
-          <a:lstStyle/>
-          <a:p>
-            <a:pPr marL="0" indent="0" algn="r">
-              <a:buNone/>
-            </a:pPr>
-            <a:r>
-              <a:rPr lang="en-US" sz="1000" b="1" kern="0" spc="600" dirty="0">
-                <a:solidFill>
-                  <a:srgbClr val="1D4ED8"/>
-                </a:solidFill>
-                <a:latin typeface="Arial" pitchFamily="34" charset="0"/>
-              </a:rPr>
-              <a:t>CK</a:t>
-            </a:r>
-            <a:endParaRPr lang="en-US" sz="1000" dirty="0"/>
-          </a:p>
-        </p:txBody>
-      </p:sp>
-      <p:pic>
-        <p:nvPicPr>
-          <p:cNvPr id="123" name="Jersey"/>
-          <p:cNvPicPr>
-            <a:picLocks noChangeAspect="1"/>
-          </p:cNvPicPr>
-          <p:nvPr/>
-        </p:nvPicPr>
-        <p:blipFill>
-          <a:blip r:embed="rId8"/>
-          <a:srcRect l="16667" t="10057" r="15179" b="9195"/>
-          <a:stretch>
-            <a:fillRect/>
-          </a:stretch>
-        </p:blipFill>
-        <p:spPr>
-          <a:xfrm>
-            <a:off x="5735700" y="1297760"/>
-            <a:ext cx="828700" cy="1044990"/>
-          </a:xfrm>
-          <a:prstGeom prst="rect">
-            <a:avLst/>
-          </a:prstGeom>
-        </p:spPr>
-      </p:pic>
-      <p:pic>
-        <p:nvPicPr>
-          <p:cNvPr id="124" name="Jersey"/>
-          <p:cNvPicPr>
-            <a:picLocks noChangeAspect="1"/>
-          </p:cNvPicPr>
-          <p:nvPr/>
-        </p:nvPicPr>
-        <p:blipFill>
-          <a:blip r:embed="rId5"/>
-          <a:srcRect l="16071" t="8621" r="15774" b="10057"/>
-          <a:stretch>
-            <a:fillRect/>
-          </a:stretch>
-        </p:blipFill>
-        <p:spPr>
-          <a:xfrm>
-            <a:off x="6694400" y="1297760"/>
-            <a:ext cx="828700" cy="1044990"/>
-          </a:xfrm>
-          <a:prstGeom prst="rect">
-            <a:avLst/>
-          </a:prstGeom>
-        </p:spPr>
-      </p:pic>
-      <p:sp>
-        <p:nvSpPr>
-          <p:cNvPr id="125" name="AtLabel"/>
-          <p:cNvSpPr/>
-          <p:nvPr/>
-        </p:nvSpPr>
-        <p:spPr>
-          <a:xfrm>
-            <a:off x="6564400" y="1735255"/>
-            <a:ext cx="170000" cy="170000"/>
-          </a:xfrm>
-          <a:prstGeom prst="rect">
-            <a:avLst/>
-          </a:prstGeom>
-          <a:noFill/>
-          <a:ln/>
-        </p:spPr>
-        <p:txBody>
-          <a:bodyPr wrap="none" lIns="0" tIns="0" rIns="0" bIns="0" rtlCol="0" anchor="ctr"/>
-          <a:lstStyle/>
-          <a:p>
-            <a:pPr marL="0" indent="0" algn="ctr">
-              <a:buNone/>
-            </a:pPr>
-            <a:r>
-              <a:rPr lang="en-US" sz="1200" i="1" kern="0" spc="0" dirty="0">
-                <a:solidFill>
-                  <a:srgbClr val="5B6573"/>
-                </a:solidFill>
-                <a:latin typeface="Arial" pitchFamily="34" charset="0"/>
-              </a:rPr>
-              <a:t>vs</a:t>
-            </a:r>
-            <a:endParaRPr lang="en-US" sz="1200" dirty="0"/>
-          </a:p>
-        </p:txBody>
-      </p:sp>
-      <p:sp>
-        <p:nvSpPr>
-          <p:cNvPr id="126" name="TeamName"/>
-          <p:cNvSpPr/>
-          <p:nvPr/>
-        </p:nvSpPr>
-        <p:spPr>
-          <a:xfrm>
-            <a:off x="5735700" y="2367750"/>
-            <a:ext cx="828700" cy="300000"/>
-          </a:xfrm>
-          <a:prstGeom prst="rect">
-            <a:avLst/>
-          </a:prstGeom>
-          <a:noFill/>
-          <a:ln/>
-        </p:spPr>
-        <p:txBody>
-          <a:bodyPr wrap="square" lIns="0" tIns="0" rIns="0" bIns="0" rtlCol="0" anchor="t"/>
-          <a:lstStyle/>
-          <a:p>
-            <a:pPr marL="0" indent="0" algn="ctr">
-              <a:buNone/>
-            </a:pPr>
-            <a:r>
-              <a:rPr lang="en-US" sz="1100" b="1" kern="0" dirty="0">
-                <a:solidFill>
-                  <a:srgbClr val="0F1B2E"/>
-                </a:solidFill>
-                <a:latin typeface="Arial Black" pitchFamily="34" charset="0"/>
-              </a:rPr>
-              <a:t>Purple Hippos</a:t>
-            </a:r>
-            <a:endParaRPr lang="en-US" sz="1100" dirty="0"/>
-          </a:p>
-        </p:txBody>
-      </p:sp>
-      <p:sp>
-        <p:nvSpPr>
-          <p:cNvPr id="127" name="TeamName"/>
-          <p:cNvSpPr/>
-          <p:nvPr/>
-        </p:nvSpPr>
-        <p:spPr>
-          <a:xfrm>
-            <a:off x="6694400" y="2367750"/>
-            <a:ext cx="828700" cy="300000"/>
-          </a:xfrm>
-          <a:prstGeom prst="rect">
-            <a:avLst/>
-          </a:prstGeom>
-          <a:noFill/>
-          <a:ln/>
-        </p:spPr>
-        <p:txBody>
-          <a:bodyPr wrap="square" lIns="0" tIns="0" rIns="0" bIns="0" rtlCol="0" anchor="t"/>
-          <a:lstStyle/>
-          <a:p>
-            <a:pPr marL="0" indent="0" algn="ctr">
-              <a:buNone/>
-            </a:pPr>
-            <a:r>
-              <a:rPr lang="en-US" sz="1100" b="1" kern="0" dirty="0">
-                <a:solidFill>
-                  <a:srgbClr val="0F1B2E"/>
-                </a:solidFill>
-                <a:latin typeface="Arial Black" pitchFamily="34" charset="0"/>
-              </a:rPr>
-              <a:t>Team 3</a:t>
-            </a:r>
-            <a:endParaRPr lang="en-US" sz="1100" dirty="0"/>
-          </a:p>
-        </p:txBody>
-      </p:sp>
-      <p:sp>
-        <p:nvSpPr>
-          <p:cNvPr id="128" name="CardBG"/>
-          <p:cNvSpPr/>
-          <p:nvPr/>
-        </p:nvSpPr>
-        <p:spPr>
-          <a:xfrm>
-            <a:off x="5675700" y="2813680"/>
-            <a:ext cx="1907400" cy="1825000"/>
-          </a:xfrm>
-          <a:prstGeom prst="rect">
-            <a:avLst/>
-          </a:prstGeom>
-          <a:solidFill>
-            <a:srgbClr val="FFFFFF"/>
-          </a:solidFill>
-          <a:ln w="9525">
-            <a:solidFill>
-              <a:srgbClr val="E5DFCE"/>
-            </a:solidFill>
-            <a:prstDash val="solid"/>
-          </a:ln>
-          <a:effectLst>
-            <a:outerShdw blurRad="127000" dist="25400" dir="5400000" algn="bl" rotWithShape="0">
-              <a:srgbClr val="000000">
-                <a:alpha val="12000"/>
-              </a:srgbClr>
-            </a:outerShdw>
-          </a:effectLst>
-        </p:spPr>
-        <p:txBody>
-          <a:bodyPr/>
-          <a:lstStyle/>
-          <a:p>
-            <a:endParaRPr lang="en-US" dirty="0"/>
-          </a:p>
-        </p:txBody>
-      </p:sp>
-      <p:sp>
-        <p:nvSpPr>
-          <p:cNvPr id="129" name="CardStripe"/>
-          <p:cNvSpPr/>
-          <p:nvPr/>
-        </p:nvSpPr>
-        <p:spPr>
-          <a:xfrm>
-            <a:off x="5675700" y="2813680"/>
-            <a:ext cx="1907400" cy="73152"/>
-          </a:xfrm>
-          <a:prstGeom prst="rect">
-            <a:avLst/>
-          </a:prstGeom>
-          <a:solidFill>
-            <a:srgbClr val="1D4ED8"/>
-          </a:solidFill>
-          <a:ln w="12700">
-            <a:solidFill>
-              <a:srgbClr val="1D4ED8"/>
-            </a:solidFill>
-            <a:prstDash val="solid"/>
-          </a:ln>
-        </p:spPr>
-        <p:txBody>
-          <a:bodyPr/>
-          <a:lstStyle/>
-          <a:p>
-            <a:endParaRPr lang="en-US" dirty="0"/>
-          </a:p>
-        </p:txBody>
-      </p:sp>
-      <p:sp>
-        <p:nvSpPr>
-          <p:cNvPr id="130" name="Label"/>
-          <p:cNvSpPr/>
-          <p:nvPr/>
-        </p:nvSpPr>
-        <p:spPr>
-          <a:xfrm>
-            <a:off x="5858580" y="2903680"/>
-            <a:ext cx="1541640" cy="228600"/>
-          </a:xfrm>
-          <a:prstGeom prst="rect">
-            <a:avLst/>
-          </a:prstGeom>
-          <a:noFill/>
-          <a:ln/>
-        </p:spPr>
-        <p:txBody>
-          <a:bodyPr wrap="square" lIns="0" tIns="0" rIns="0" bIns="0" rtlCol="0" anchor="ctr"/>
-          <a:lstStyle/>
-          <a:p>
-            <a:pPr marL="0" indent="0" algn="l">
-              <a:buNone/>
-            </a:pPr>
-            <a:r>
-              <a:rPr lang="en-US" sz="1000" b="1" kern="0" spc="600" dirty="0">
-                <a:solidFill>
-                  <a:srgbClr val="5B6573"/>
-                </a:solidFill>
-                <a:latin typeface="Arial" pitchFamily="34" charset="0"/>
-              </a:rPr>
-              <a:t>COURT 4</a:t>
-            </a:r>
-            <a:endParaRPr lang="en-US" sz="1000" dirty="0"/>
-          </a:p>
-        </p:txBody>
-      </p:sp>
-      <p:sp>
-        <p:nvSpPr>
-          <p:cNvPr id="131" name="Label"/>
-          <p:cNvSpPr/>
-          <p:nvPr/>
-        </p:nvSpPr>
-        <p:spPr>
-          <a:xfrm>
-            <a:off x="5858580" y="2903680"/>
-            <a:ext cx="1541640" cy="228600"/>
-          </a:xfrm>
-          <a:prstGeom prst="rect">
-            <a:avLst/>
-          </a:prstGeom>
-          <a:noFill/>
-          <a:ln/>
-        </p:spPr>
-        <p:txBody>
-          <a:bodyPr wrap="square" lIns="0" tIns="0" rIns="0" bIns="0" rtlCol="0" anchor="ctr"/>
-          <a:lstStyle/>
-          <a:p>
-            <a:pPr marL="0" indent="0" algn="r">
-              <a:buNone/>
-            </a:pPr>
-            <a:r>
-              <a:rPr lang="en-US" sz="1000" b="1" kern="0" spc="600" dirty="0">
-                <a:solidFill>
-                  <a:srgbClr val="1D4ED8"/>
-                </a:solidFill>
-                <a:latin typeface="Arial" pitchFamily="34" charset="0"/>
-              </a:rPr>
-              <a:t>CK</a:t>
-            </a:r>
-            <a:endParaRPr lang="en-US" sz="1000" dirty="0"/>
-          </a:p>
-        </p:txBody>
-      </p:sp>
-      <p:pic>
-        <p:nvPicPr>
-          <p:cNvPr id="132" name="Jersey"/>
-          <p:cNvPicPr>
-            <a:picLocks noChangeAspect="1"/>
-          </p:cNvPicPr>
-          <p:nvPr/>
-        </p:nvPicPr>
-        <p:blipFill>
-          <a:blip r:embed="rId4"/>
-          <a:srcRect l="16369" t="10057" r="14881" b="9195"/>
-          <a:stretch>
-            <a:fillRect/>
-          </a:stretch>
-        </p:blipFill>
-        <p:spPr>
-          <a:xfrm>
-            <a:off x="5735700" y="3172280"/>
-            <a:ext cx="828700" cy="1044990"/>
-          </a:xfrm>
-          <a:prstGeom prst="rect">
-            <a:avLst/>
-          </a:prstGeom>
-        </p:spPr>
-      </p:pic>
-      <p:pic>
-        <p:nvPicPr>
-          <p:cNvPr id="133" name="Jersey"/>
-          <p:cNvPicPr>
-            <a:picLocks noChangeAspect="1"/>
-          </p:cNvPicPr>
-          <p:nvPr/>
-        </p:nvPicPr>
-        <p:blipFill>
-          <a:blip r:embed="rId7"/>
-          <a:srcRect l="16071" t="10057" r="15179" b="8908"/>
-          <a:stretch>
-            <a:fillRect/>
-          </a:stretch>
-        </p:blipFill>
-        <p:spPr>
-          <a:xfrm>
-            <a:off x="6694400" y="3172280"/>
-            <a:ext cx="828700" cy="1044990"/>
-          </a:xfrm>
-          <a:prstGeom prst="rect">
-            <a:avLst/>
-          </a:prstGeom>
-        </p:spPr>
-      </p:pic>
-      <p:sp>
-        <p:nvSpPr>
-          <p:cNvPr id="134" name="AtLabel"/>
-          <p:cNvSpPr/>
-          <p:nvPr/>
-        </p:nvSpPr>
-        <p:spPr>
-          <a:xfrm>
-            <a:off x="6564400" y="3609775"/>
-            <a:ext cx="170000" cy="170000"/>
-          </a:xfrm>
-          <a:prstGeom prst="rect">
-            <a:avLst/>
-          </a:prstGeom>
-          <a:noFill/>
-          <a:ln/>
-        </p:spPr>
-        <p:txBody>
-          <a:bodyPr wrap="none" lIns="0" tIns="0" rIns="0" bIns="0" rtlCol="0" anchor="ctr"/>
-          <a:lstStyle/>
-          <a:p>
-            <a:pPr marL="0" indent="0" algn="ctr">
-              <a:buNone/>
-            </a:pPr>
-            <a:r>
-              <a:rPr lang="en-US" sz="1200" i="1" kern="0" spc="0" dirty="0">
-                <a:solidFill>
-                  <a:srgbClr val="5B6573"/>
-                </a:solidFill>
-                <a:latin typeface="Arial" pitchFamily="34" charset="0"/>
-              </a:rPr>
-              <a:t>vs</a:t>
-            </a:r>
-            <a:endParaRPr lang="en-US" sz="1200" dirty="0"/>
-          </a:p>
-        </p:txBody>
-      </p:sp>
-      <p:sp>
-        <p:nvSpPr>
-          <p:cNvPr id="135" name="TeamName"/>
-          <p:cNvSpPr/>
-          <p:nvPr/>
-        </p:nvSpPr>
-        <p:spPr>
-          <a:xfrm>
-            <a:off x="5735700" y="4242270"/>
-            <a:ext cx="828700" cy="300000"/>
-          </a:xfrm>
-          <a:prstGeom prst="rect">
-            <a:avLst/>
-          </a:prstGeom>
-          <a:noFill/>
-          <a:ln/>
-        </p:spPr>
-        <p:txBody>
-          <a:bodyPr wrap="square" lIns="0" tIns="0" rIns="0" bIns="0" rtlCol="0" anchor="t"/>
-          <a:lstStyle/>
-          <a:p>
-            <a:pPr marL="0" indent="0" algn="ctr">
-              <a:buNone/>
-            </a:pPr>
-            <a:r>
-              <a:rPr lang="en-US" sz="1100" b="1" kern="0" dirty="0">
-                <a:solidFill>
-                  <a:srgbClr val="0F1B2E"/>
-                </a:solidFill>
-                <a:latin typeface="Arial Black" pitchFamily="34" charset="0"/>
-              </a:rPr>
-              <a:t>Team 5</a:t>
-            </a:r>
-            <a:endParaRPr lang="en-US" sz="1100" dirty="0"/>
-          </a:p>
-        </p:txBody>
-      </p:sp>
-      <p:sp>
-        <p:nvSpPr>
-          <p:cNvPr id="136" name="TeamName"/>
-          <p:cNvSpPr/>
-          <p:nvPr/>
-        </p:nvSpPr>
-        <p:spPr>
-          <a:xfrm>
-            <a:off x="6694400" y="4242270"/>
-            <a:ext cx="828700" cy="300000"/>
-          </a:xfrm>
-          <a:prstGeom prst="rect">
-            <a:avLst/>
-          </a:prstGeom>
-          <a:noFill/>
-          <a:ln/>
-        </p:spPr>
-        <p:txBody>
-          <a:bodyPr wrap="square" lIns="0" tIns="0" rIns="0" bIns="0" rtlCol="0" anchor="t"/>
-          <a:lstStyle/>
-          <a:p>
-            <a:pPr marL="0" indent="0" algn="ctr">
-              <a:buNone/>
-            </a:pPr>
-            <a:r>
-              <a:rPr lang="en-US" sz="1100" b="1" kern="0" dirty="0">
-                <a:solidFill>
-                  <a:srgbClr val="0F1B2E"/>
-                </a:solidFill>
-                <a:latin typeface="Arial Black" pitchFamily="34" charset="0"/>
-              </a:rPr>
-              <a:t>Black Panthers</a:t>
-            </a:r>
-            <a:endParaRPr lang="en-US" sz="1100" dirty="0"/>
-          </a:p>
-        </p:txBody>
-      </p:sp>
-      <p:sp>
-        <p:nvSpPr>
-          <p:cNvPr id="57" name="HRBottom"/>
-          <p:cNvSpPr/>
-          <p:nvPr/>
-        </p:nvSpPr>
-        <p:spPr>
-          <a:xfrm>
-            <a:off x="365760" y="4828032"/>
-            <a:ext cx="8412480" cy="0"/>
-          </a:xfrm>
-          <a:prstGeom prst="line">
-            <a:avLst/>
-          </a:prstGeom>
-          <a:noFill/>
-          <a:ln w="9525">
-            <a:solidFill>
-              <a:srgbClr val="C9BFAE"/>
-            </a:solidFill>
-            <a:prstDash val="solid"/>
-          </a:ln>
-        </p:spPr>
-        <p:txBody>
-          <a:bodyPr/>
-          <a:lstStyle/>
-          <a:p>
-            <a:endParaRPr lang="en-US"/>
-          </a:p>
-        </p:txBody>
-      </p:sp>
-      <p:sp>
-        <p:nvSpPr>
-          <p:cNvPr id="58" name="FooterL"/>
-          <p:cNvSpPr/>
-          <p:nvPr/>
-        </p:nvSpPr>
-        <p:spPr>
-          <a:xfrm>
-            <a:off x="365760" y="4892040"/>
-            <a:ext cx="3657600" cy="228600"/>
-          </a:xfrm>
-          <a:prstGeom prst="rect">
-            <a:avLst/>
-          </a:prstGeom>
-          <a:noFill/>
-          <a:ln/>
-        </p:spPr>
-        <p:txBody>
-          <a:bodyPr wrap="square" lIns="0" tIns="0" rIns="0" bIns="0" rtlCol="0" anchor="ctr"/>
-          <a:lstStyle/>
-          <a:p>
-            <a:pPr marL="0" indent="0" algn="l">
-              <a:buNone/>
-            </a:pPr>
-            <a:r>
-              <a:rPr lang="en-US" sz="900" b="1" kern="0" spc="800" dirty="0">
-                <a:solidFill>
-                  <a:srgbClr val="0F1B2E"/>
-                </a:solidFill>
-                <a:latin typeface="Arial Black" pitchFamily="34" charset="0"/>
-              </a:rPr>
-              <a:t>WACC SPORTS</a:t>
-            </a:r>
-            <a:endParaRPr lang="en-US" sz="900" dirty="0"/>
-          </a:p>
-        </p:txBody>
-      </p:sp>
-      <p:sp>
-        <p:nvSpPr>
-          <p:cNvPr id="59" name="FooterR"/>
-          <p:cNvSpPr/>
-          <p:nvPr/>
-        </p:nvSpPr>
-        <p:spPr>
-          <a:xfrm>
-            <a:off x="5120640" y="4892040"/>
-            <a:ext cx="3657600" cy="228600"/>
-          </a:xfrm>
-          <a:prstGeom prst="rect">
-            <a:avLst/>
-          </a:prstGeom>
-          <a:noFill/>
-          <a:ln/>
-        </p:spPr>
-        <p:txBody>
-          <a:bodyPr wrap="square" lIns="0" tIns="0" rIns="0" bIns="0" rtlCol="0" anchor="ctr"/>
-          <a:lstStyle/>
-          <a:p>
-            <a:pPr marL="0" indent="0" algn="r">
-              <a:buNone/>
-            </a:pPr>
-            <a:r>
-              <a:rPr lang="en-US" sz="900" b="1" kern="0" spc="800" dirty="0">
-                <a:solidFill>
-                  <a:srgbClr val="5B6573"/>
-                </a:solidFill>
-                <a:latin typeface="Arial" pitchFamily="34" charset="0"/>
-              </a:rPr>
-              <a:t>OCTOBER 17, 2026</a:t>
-            </a:r>
-            <a:endParaRPr lang="en-US" sz="900" dirty="0"/>
-          </a:p>
-        </p:txBody>
-      </p:sp>
-      <p:pic>
-        <p:nvPicPr>
-          <p:cNvPr id="998" name="Image 0" descr="preencoded.png"/>
-          <p:cNvPicPr>
-            <a:picLocks noChangeAspect="1"/>
-          </p:cNvPicPr>
-          <p:nvPr/>
-        </p:nvPicPr>
-        <p:blipFill>
-          <a:blip r:embed="rId10"/>
-          <a:stretch>
-            <a:fillRect/>
-          </a:stretch>
-        </p:blipFill>
-        <p:spPr>
-          <a:xfrm>
-            <a:off x="4046316" y="2254444"/>
-            <a:ext cx="1032376" cy="1032376"/>
-          </a:xfrm>
-          <a:prstGeom prst="rect">
-            <a:avLst/>
-          </a:prstGeom>
-        </p:spPr>
-      </p:pic>
-    </p:spTree>
-  </p:cSld>
-  <p:clrMapOvr>
-    <a:masterClrMapping/>
-  </p:clrMapOvr>
-</p:sld>
-</file>
-
-<file path=ppt/slides/slide3.xml><?xml version="1.0" encoding="utf-8"?>
-<p:sld xmlns:a="http://schemas.openxmlformats.org/drawingml/2006/main" xmlns:r="http://schemas.openxmlformats.org/officeDocument/2006/relationships" xmlns:p="http://schemas.openxmlformats.org/presentationml/2006/main">
-  <p:cSld>
-    <p:spTree>
-      <p:nvGrpSpPr>
-        <p:cNvPr id="1" name=""/>
-        <p:cNvGrpSpPr/>
-        <p:nvPr/>
-      </p:nvGrpSpPr>
-      <p:grpSpPr>
-        <a:xfrm>
-          <a:off x="0" y="0"/>
-          <a:ext cx="0" cy="0"/>
-          <a:chOff x="0" y="0"/>
-          <a:chExt cx="0" cy="0"/>
-        </a:xfrm>
-      </p:grpSpPr>
-      <p:sp>
-        <p:nvSpPr>
-          <p:cNvPr id="2" name="Time"/>
-          <p:cNvSpPr/>
-          <p:nvPr/>
-        </p:nvSpPr>
-        <p:spPr>
-          <a:xfrm>
-            <a:off x="365760" y="137160"/>
-            <a:ext cx="2743200" cy="502920"/>
-          </a:xfrm>
-          <a:prstGeom prst="rect">
-            <a:avLst/>
-          </a:prstGeom>
-          <a:noFill/>
-          <a:ln/>
-        </p:spPr>
-        <p:txBody>
-          <a:bodyPr wrap="square" lIns="0" tIns="0" rIns="0" bIns="0" rtlCol="0" anchor="ctr"/>
-          <a:lstStyle/>
-          <a:p>
-            <a:pPr marL="0" indent="0" algn="l">
-              <a:buNone/>
-            </a:pPr>
-            <a:r>
-              <a:rPr lang="en-US" sz="3000" b="1" kern="0" spc="100" dirty="0">
-                <a:solidFill>
-                  <a:srgbClr val="0F1B2E"/>
-                </a:solidFill>
-                <a:latin typeface="Arial Black" pitchFamily="34" charset="0"/>
-              </a:rPr>
-              <a:t>9 AM</a:t>
-            </a:r>
-            <a:endParaRPr lang="en-US" sz="3000" dirty="0"/>
-          </a:p>
-        </p:txBody>
-      </p:sp>
-      <p:grpSp>
-        <p:nvGrpSpPr>
-          <p:cNvPr id="60" name="PillGroup"/>
-          <p:cNvGrpSpPr/>
-          <p:nvPr/>
-        </p:nvGrpSpPr>
-        <p:grpSpPr>
-          <a:xfrm>
-            <a:off x="2838288" y="192416"/>
-            <a:ext cx="3467425" cy="429768"/>
-            <a:chOff x="2838288" y="114301"/>
-            <a:chExt cx="3467425" cy="429768"/>
-          </a:xfrm>
-        </p:grpSpPr>
-        <p:sp>
-          <p:nvSpPr>
-            <p:cNvPr id="3" name="Pill"/>
-            <p:cNvSpPr/>
-            <p:nvPr/>
-          </p:nvSpPr>
-          <p:spPr>
-            <a:xfrm>
-              <a:off x="2838288" y="114301"/>
-              <a:ext cx="3467425" cy="429768"/>
-            </a:xfrm>
-            <a:prstGeom prst="roundRect">
-              <a:avLst>
-                <a:gd name="adj" fmla="val 50000"/>
-              </a:avLst>
-            </a:prstGeom>
-            <a:solidFill>
-              <a:srgbClr val="1D4ED8"/>
-            </a:solidFill>
-            <a:ln w="12700">
-              <a:solidFill>
-                <a:srgbClr val="1D4ED8"/>
-              </a:solidFill>
-              <a:prstDash val="solid"/>
-            </a:ln>
-          </p:spPr>
-          <p:txBody>
-            <a:bodyPr/>
-            <a:lstStyle/>
-            <a:p>
-              <a:endParaRPr lang="en-US"/>
-            </a:p>
-          </p:txBody>
-        </p:sp>
-        <p:sp>
-          <p:nvSpPr>
-            <p:cNvPr id="4" name="PillText"/>
-            <p:cNvSpPr/>
-            <p:nvPr/>
-          </p:nvSpPr>
-          <p:spPr>
-            <a:xfrm>
-              <a:off x="3050073" y="164616"/>
-              <a:ext cx="3150000" cy="310896"/>
-            </a:xfrm>
-            <a:prstGeom prst="rect">
-              <a:avLst/>
-            </a:prstGeom>
-            <a:noFill/>
-            <a:ln/>
-          </p:spPr>
-          <p:txBody>
-            <a:bodyPr wrap="none" lIns="0" tIns="0" rIns="0" bIns="0" rtlCol="0" anchor="ctr"/>
-            <a:lstStyle/>
-            <a:p>
-              <a:pPr algn="ctr"/>
-              <a:r>
-                <a:rPr lang="en-US" sz="1100" b="1" kern="0" spc="600" dirty="0">
-                  <a:solidFill>
-                    <a:srgbClr val="FFFFFF"/>
-                  </a:solidFill>
-                  <a:latin typeface="Arial Black" pitchFamily="34" charset="0"/>
-                </a:rPr>
-                <a:t>PEE WEE</a:t>
-              </a:r>
-              <a:endParaRPr lang="en-US" sz="1100" dirty="0"/>
-            </a:p>
-          </p:txBody>
-        </p:sp>
-      </p:grpSp>
-      <p:sp>
-        <p:nvSpPr>
-          <p:cNvPr id="6" name="HRTop"/>
-          <p:cNvSpPr/>
-          <p:nvPr/>
-        </p:nvSpPr>
-        <p:spPr>
-          <a:xfrm>
-            <a:off x="365760" y="713232"/>
-            <a:ext cx="8412480" cy="0"/>
-          </a:xfrm>
-          <a:prstGeom prst="line">
-            <a:avLst/>
-          </a:prstGeom>
-          <a:noFill/>
-          <a:ln w="9525">
-            <a:solidFill>
-              <a:srgbClr val="C9BFAE"/>
-            </a:solidFill>
-            <a:prstDash val="solid"/>
-          </a:ln>
-        </p:spPr>
-        <p:txBody>
-          <a:bodyPr/>
-          <a:lstStyle/>
-          <a:p>
-            <a:endParaRPr lang="en-US"/>
-          </a:p>
-        </p:txBody>
-      </p:sp>
-      <p:sp>
-        <p:nvSpPr>
-          <p:cNvPr id="7" name="CourtRect"/>
-          <p:cNvSpPr/>
-          <p:nvPr/>
-        </p:nvSpPr>
-        <p:spPr>
-          <a:xfrm>
-            <a:off x="457200" y="914400"/>
-            <a:ext cx="8229600" cy="3749040"/>
-          </a:xfrm>
-          <a:prstGeom prst="rect">
-            <a:avLst/>
-          </a:prstGeom>
-          <a:ln w="19050">
-            <a:solidFill>
-              <a:srgbClr val="283241"/>
-            </a:solidFill>
-            <a:prstDash val="solid"/>
-          </a:ln>
-        </p:spPr>
-        <p:txBody>
-          <a:bodyPr/>
-          <a:lstStyle/>
-          <a:p>
-            <a:endParaRPr lang="en-US"/>
-          </a:p>
-        </p:txBody>
-      </p:sp>
-      <p:sp>
-        <p:nvSpPr>
-          <p:cNvPr id="1001" name="HalfCourtTop"/>
-          <p:cNvSpPr/>
-          <p:nvPr/>
-        </p:nvSpPr>
-        <p:spPr>
-          <a:xfrm>
-            <a:off x="4572000" y="914400"/>
-            <a:ext cx="0" cy="1340131"/>
-          </a:xfrm>
-          <a:prstGeom prst="line">
-            <a:avLst/>
-          </a:prstGeom>
-          <a:noFill/>
-          <a:ln w="15875">
-            <a:solidFill>
-              <a:srgbClr val="283241"/>
-            </a:solidFill>
-            <a:prstDash val="solid"/>
-          </a:ln>
-        </p:spPr>
-        <p:txBody>
-          <a:bodyPr/>
-          <a:lstStyle/>
-          <a:p>
-            <a:endParaRPr lang="en-US"/>
-          </a:p>
-        </p:txBody>
-      </p:sp>
-      <p:sp>
-        <p:nvSpPr>
-          <p:cNvPr id="1002" name="HalfCourtBottom"/>
-          <p:cNvSpPr/>
-          <p:nvPr/>
-        </p:nvSpPr>
-        <p:spPr>
-          <a:xfrm>
-            <a:off x="4572000" y="3286733"/>
-            <a:ext cx="0" cy="1376707"/>
-          </a:xfrm>
-          <a:prstGeom prst="line">
-            <a:avLst/>
-          </a:prstGeom>
-          <a:noFill/>
-          <a:ln w="15875">
-            <a:solidFill>
-              <a:srgbClr val="283241"/>
-            </a:solidFill>
-            <a:prstDash val="solid"/>
-          </a:ln>
-        </p:spPr>
-        <p:txBody>
-          <a:bodyPr/>
-          <a:lstStyle/>
-          <a:p>
-            <a:endParaRPr lang="en-US"/>
-          </a:p>
-        </p:txBody>
-      </p:sp>
-      <p:sp>
-        <p:nvSpPr>
-          <p:cNvPr id="10" name="LSquareL"/>
-          <p:cNvSpPr/>
-          <p:nvPr/>
-        </p:nvSpPr>
-        <p:spPr>
-          <a:xfrm>
-            <a:off x="457200" y="1889150"/>
-            <a:ext cx="1728216" cy="1799539"/>
-          </a:xfrm>
-          <a:prstGeom prst="rect">
-            <a:avLst/>
-          </a:prstGeom>
-          <a:ln w="15875">
-            <a:solidFill>
-              <a:srgbClr val="283241"/>
-            </a:solidFill>
-            <a:prstDash val="solid"/>
-          </a:ln>
-        </p:spPr>
-        <p:txBody>
-          <a:bodyPr/>
-          <a:lstStyle/>
-          <a:p>
-            <a:endParaRPr lang="en-US"/>
-          </a:p>
-        </p:txBody>
-      </p:sp>
-      <p:sp>
-        <p:nvSpPr>
-          <p:cNvPr id="11" name="LCircleL"/>
-          <p:cNvSpPr/>
-          <p:nvPr/>
-        </p:nvSpPr>
-        <p:spPr>
-          <a:xfrm>
-            <a:off x="1321637" y="1925141"/>
-            <a:ext cx="1727558" cy="1727558"/>
-          </a:xfrm>
-          <a:prstGeom prst="ellipse">
-            <a:avLst/>
-          </a:prstGeom>
-          <a:ln w="15875">
-            <a:solidFill>
-              <a:srgbClr val="283241"/>
-            </a:solidFill>
-            <a:prstDash val="dash"/>
-          </a:ln>
-        </p:spPr>
-        <p:txBody>
-          <a:bodyPr/>
-          <a:lstStyle/>
-          <a:p>
-            <a:endParaRPr lang="en-US"/>
-          </a:p>
-        </p:txBody>
-      </p:sp>
-      <p:sp>
-        <p:nvSpPr>
-          <p:cNvPr id="12" name="LMaskL"/>
-          <p:cNvSpPr/>
-          <p:nvPr/>
-        </p:nvSpPr>
-        <p:spPr>
-          <a:xfrm>
-            <a:off x="1312493" y="1879421"/>
-            <a:ext cx="882067" cy="1818998"/>
-          </a:xfrm>
-          <a:prstGeom prst="rect">
-            <a:avLst/>
-          </a:prstGeom>
-          <a:solidFill>
-            <a:srgbClr val="FFFFFF"/>
-          </a:solidFill>
-          <a:ln w="12700">
-            <a:solidFill>
-              <a:srgbClr val="FFFFFF"/>
-            </a:solidFill>
-            <a:prstDash val="solid"/>
-          </a:ln>
-        </p:spPr>
-        <p:txBody>
-          <a:bodyPr/>
-          <a:lstStyle/>
-          <a:p>
-            <a:endParaRPr lang="en-US"/>
-          </a:p>
-        </p:txBody>
-      </p:sp>
-      <p:sp>
-        <p:nvSpPr>
-          <p:cNvPr id="13" name="LSquareLOver"/>
-          <p:cNvSpPr/>
-          <p:nvPr/>
-        </p:nvSpPr>
-        <p:spPr>
-          <a:xfrm>
-            <a:off x="457200" y="1889150"/>
-            <a:ext cx="1728216" cy="1799539"/>
-          </a:xfrm>
-          <a:prstGeom prst="rect">
-            <a:avLst/>
-          </a:prstGeom>
-          <a:ln w="15875">
-            <a:solidFill>
-              <a:srgbClr val="283241"/>
-            </a:solidFill>
-            <a:prstDash val="solid"/>
-          </a:ln>
-        </p:spPr>
-        <p:txBody>
-          <a:bodyPr/>
-          <a:lstStyle/>
-          <a:p>
-            <a:endParaRPr lang="en-US"/>
-          </a:p>
-        </p:txBody>
-      </p:sp>
-      <p:sp>
-        <p:nvSpPr>
-          <p:cNvPr id="24" name="RSquareR"/>
-          <p:cNvSpPr/>
-          <p:nvPr/>
-        </p:nvSpPr>
-        <p:spPr>
-          <a:xfrm>
-            <a:off x="6958584" y="1889150"/>
-            <a:ext cx="1728216" cy="1799539"/>
-          </a:xfrm>
-          <a:prstGeom prst="rect">
-            <a:avLst/>
-          </a:prstGeom>
-          <a:ln w="15875">
-            <a:solidFill>
-              <a:srgbClr val="283241"/>
-            </a:solidFill>
-            <a:prstDash val="solid"/>
-          </a:ln>
-        </p:spPr>
-        <p:txBody>
-          <a:bodyPr/>
-          <a:lstStyle/>
-          <a:p>
-            <a:endParaRPr lang="en-US"/>
-          </a:p>
-        </p:txBody>
-      </p:sp>
-      <p:sp>
-        <p:nvSpPr>
-          <p:cNvPr id="25" name="RCircleR"/>
-          <p:cNvSpPr/>
-          <p:nvPr/>
-        </p:nvSpPr>
-        <p:spPr>
-          <a:xfrm>
-            <a:off x="6094805" y="1925141"/>
-            <a:ext cx="1727558" cy="1727558"/>
-          </a:xfrm>
-          <a:prstGeom prst="ellipse">
-            <a:avLst/>
-          </a:prstGeom>
-          <a:ln w="15875">
-            <a:solidFill>
-              <a:srgbClr val="283241"/>
-            </a:solidFill>
-            <a:prstDash val="dash"/>
-          </a:ln>
-        </p:spPr>
-        <p:txBody>
-          <a:bodyPr/>
-          <a:lstStyle/>
-          <a:p>
-            <a:endParaRPr lang="en-US"/>
-          </a:p>
-        </p:txBody>
-      </p:sp>
-      <p:sp>
-        <p:nvSpPr>
-          <p:cNvPr id="26" name="RMaskR"/>
-          <p:cNvSpPr/>
-          <p:nvPr/>
-        </p:nvSpPr>
-        <p:spPr>
-          <a:xfrm>
-            <a:off x="6958584" y="1879421"/>
-            <a:ext cx="882067" cy="1818998"/>
-          </a:xfrm>
-          <a:prstGeom prst="rect">
-            <a:avLst/>
-          </a:prstGeom>
-          <a:solidFill>
-            <a:srgbClr val="FFFFFF"/>
-          </a:solidFill>
-          <a:ln w="12700">
-            <a:solidFill>
-              <a:srgbClr val="FFFFFF"/>
-            </a:solidFill>
-            <a:prstDash val="solid"/>
-          </a:ln>
-        </p:spPr>
-        <p:txBody>
-          <a:bodyPr/>
-          <a:lstStyle/>
-          <a:p>
-            <a:endParaRPr lang="en-US"/>
-          </a:p>
-        </p:txBody>
-      </p:sp>
-      <p:sp>
-        <p:nvSpPr>
-          <p:cNvPr id="27" name="RSquareROver"/>
-          <p:cNvSpPr/>
-          <p:nvPr/>
-        </p:nvSpPr>
-        <p:spPr>
-          <a:xfrm>
-            <a:off x="6958584" y="1889150"/>
-            <a:ext cx="1728216" cy="1799539"/>
-          </a:xfrm>
-          <a:prstGeom prst="rect">
-            <a:avLst/>
-          </a:prstGeom>
-          <a:ln w="15875">
-            <a:solidFill>
-              <a:srgbClr val="283241"/>
-            </a:solidFill>
-            <a:prstDash val="solid"/>
-          </a:ln>
-        </p:spPr>
-        <p:txBody>
-          <a:bodyPr/>
-          <a:lstStyle/>
-          <a:p>
-            <a:endParaRPr lang="en-US"/>
-          </a:p>
-        </p:txBody>
-      </p:sp>
-      <p:sp>
-        <p:nvSpPr>
-          <p:cNvPr id="101" name="CardBG"/>
-          <p:cNvSpPr/>
-          <p:nvPr/>
-        </p:nvSpPr>
-        <p:spPr>
-          <a:xfrm>
-            <a:off x="1325880" y="1563920"/>
-            <a:ext cx="2550000" cy="2450000"/>
-          </a:xfrm>
-          <a:prstGeom prst="rect">
-            <a:avLst/>
-          </a:prstGeom>
-          <a:solidFill>
-            <a:srgbClr val="FFFFFF"/>
-          </a:solidFill>
-          <a:ln w="9525">
-            <a:solidFill>
-              <a:srgbClr val="E5DFCE"/>
-            </a:solidFill>
-            <a:prstDash val="solid"/>
-          </a:ln>
-          <a:effectLst>
-            <a:outerShdw blurRad="127000" dist="25400" dir="5400000" algn="bl" rotWithShape="0">
-              <a:srgbClr val="000000">
-                <a:alpha val="12000"/>
-              </a:srgbClr>
-            </a:outerShdw>
-          </a:effectLst>
-        </p:spPr>
-        <p:txBody>
-          <a:bodyPr/>
-          <a:lstStyle/>
-          <a:p>
-            <a:endParaRPr lang="en-US" dirty="0"/>
-          </a:p>
-        </p:txBody>
-      </p:sp>
-      <p:sp>
-        <p:nvSpPr>
-          <p:cNvPr id="102" name="CardStripe"/>
-          <p:cNvSpPr/>
-          <p:nvPr/>
-        </p:nvSpPr>
-        <p:spPr>
-          <a:xfrm>
-            <a:off x="1325880" y="1563920"/>
-            <a:ext cx="2550000" cy="73152"/>
-          </a:xfrm>
-          <a:prstGeom prst="rect">
-            <a:avLst/>
-          </a:prstGeom>
-          <a:solidFill>
-            <a:srgbClr val="1D4ED8"/>
-          </a:solidFill>
-          <a:ln w="12700">
-            <a:solidFill>
-              <a:srgbClr val="1D4ED8"/>
-            </a:solidFill>
-            <a:prstDash val="solid"/>
-          </a:ln>
-        </p:spPr>
-        <p:txBody>
-          <a:bodyPr/>
-          <a:lstStyle/>
-          <a:p>
-            <a:endParaRPr lang="en-US" dirty="0"/>
-          </a:p>
-        </p:txBody>
-      </p:sp>
-      <p:sp>
-        <p:nvSpPr>
-          <p:cNvPr id="103" name="Label"/>
-          <p:cNvSpPr/>
-          <p:nvPr/>
-        </p:nvSpPr>
-        <p:spPr>
-          <a:xfrm>
-            <a:off x="1508760" y="1728512"/>
-            <a:ext cx="2184240" cy="228600"/>
-          </a:xfrm>
-          <a:prstGeom prst="rect">
-            <a:avLst/>
-          </a:prstGeom>
-          <a:noFill/>
-          <a:ln/>
-        </p:spPr>
-        <p:txBody>
-          <a:bodyPr wrap="square" lIns="0" tIns="0" rIns="0" bIns="0" rtlCol="0" anchor="ctr"/>
-          <a:lstStyle/>
-          <a:p>
-            <a:pPr marL="0" indent="0" algn="l">
-              <a:buNone/>
-            </a:pPr>
-            <a:r>
-              <a:rPr lang="en-US" sz="1000" b="1" kern="0" spc="600" dirty="0">
-                <a:solidFill>
-                  <a:srgbClr val="5B6573"/>
-                </a:solidFill>
-                <a:latin typeface="Arial" pitchFamily="34" charset="0"/>
-              </a:rPr>
-              <a:t>COURT 1</a:t>
-            </a:r>
-            <a:endParaRPr lang="en-US" sz="1000" dirty="0"/>
-          </a:p>
-        </p:txBody>
-      </p:sp>
-      <p:sp>
-        <p:nvSpPr>
-          <p:cNvPr id="104" name="Label"/>
-          <p:cNvSpPr/>
-          <p:nvPr/>
-        </p:nvSpPr>
-        <p:spPr>
-          <a:xfrm>
-            <a:off x="1508760" y="1728512"/>
-            <a:ext cx="2184240" cy="228600"/>
-          </a:xfrm>
-          <a:prstGeom prst="rect">
-            <a:avLst/>
-          </a:prstGeom>
-          <a:noFill/>
-          <a:ln/>
-        </p:spPr>
-        <p:txBody>
-          <a:bodyPr wrap="square" lIns="0" tIns="0" rIns="0" bIns="0" rtlCol="0" anchor="ctr"/>
-          <a:lstStyle/>
-          <a:p>
-            <a:pPr marL="0" indent="0" algn="r">
-              <a:buNone/>
-            </a:pPr>
-            <a:r>
-              <a:rPr lang="en-US" sz="1000" b="1" kern="0" spc="600" dirty="0">
-                <a:solidFill>
-                  <a:srgbClr val="1D4ED8"/>
-                </a:solidFill>
-                <a:latin typeface="Arial" pitchFamily="34" charset="0"/>
-              </a:rPr>
-              <a:t>PW</a:t>
-            </a:r>
-            <a:endParaRPr lang="en-US" sz="1000" dirty="0"/>
-          </a:p>
-        </p:txBody>
-      </p:sp>
-      <p:pic>
-        <p:nvPicPr>
-          <p:cNvPr id="105" name="Jersey"/>
-          <p:cNvPicPr>
-            <a:picLocks noChangeAspect="1"/>
-          </p:cNvPicPr>
-          <p:nvPr/>
-        </p:nvPicPr>
-        <p:blipFill>
-          <a:blip r:embed="rId2"/>
-          <a:srcRect l="16071" t="10057" r="14881" b="8908"/>
-          <a:stretch>
-            <a:fillRect/>
-          </a:stretch>
-        </p:blipFill>
-        <p:spPr>
-          <a:xfrm>
-            <a:off x="1385880" y="1997112"/>
-            <a:ext cx="1105000" cy="1393405"/>
-          </a:xfrm>
-          <a:prstGeom prst="rect">
-            <a:avLst/>
-          </a:prstGeom>
-        </p:spPr>
-      </p:pic>
-      <p:pic>
-        <p:nvPicPr>
-          <p:cNvPr id="106" name="Jersey"/>
-          <p:cNvPicPr>
-            <a:picLocks noChangeAspect="1"/>
-          </p:cNvPicPr>
-          <p:nvPr/>
-        </p:nvPicPr>
-        <p:blipFill>
-          <a:blip r:embed="rId3"/>
-          <a:srcRect l="15476" t="8908" r="15476" b="10057"/>
-          <a:stretch>
-            <a:fillRect/>
-          </a:stretch>
-        </p:blipFill>
-        <p:spPr>
-          <a:xfrm>
-            <a:off x="2710880" y="1997112"/>
-            <a:ext cx="1105000" cy="1393405"/>
-          </a:xfrm>
-          <a:prstGeom prst="rect">
-            <a:avLst/>
-          </a:prstGeom>
-        </p:spPr>
-      </p:pic>
-      <p:sp>
-        <p:nvSpPr>
-          <p:cNvPr id="107" name="AtLabel"/>
-          <p:cNvSpPr/>
-          <p:nvPr/>
-        </p:nvSpPr>
-        <p:spPr>
-          <a:xfrm>
-            <a:off x="2490880" y="2583814"/>
-            <a:ext cx="220000" cy="220000"/>
-          </a:xfrm>
-          <a:prstGeom prst="rect">
-            <a:avLst/>
-          </a:prstGeom>
-          <a:noFill/>
-          <a:ln/>
-        </p:spPr>
-        <p:txBody>
-          <a:bodyPr wrap="none" lIns="0" tIns="0" rIns="0" bIns="0" rtlCol="0" anchor="ctr"/>
-          <a:lstStyle/>
-          <a:p>
-            <a:pPr marL="0" indent="0" algn="ctr">
-              <a:buNone/>
-            </a:pPr>
-            <a:r>
-              <a:rPr lang="en-US" sz="1200" i="1" kern="0" spc="0" dirty="0">
-                <a:solidFill>
-                  <a:srgbClr val="5B6573"/>
-                </a:solidFill>
-                <a:latin typeface="Arial" pitchFamily="34" charset="0"/>
-              </a:rPr>
-              <a:t>vs</a:t>
-            </a:r>
-            <a:endParaRPr lang="en-US" sz="1200" dirty="0"/>
-          </a:p>
-        </p:txBody>
-      </p:sp>
-      <p:sp>
-        <p:nvSpPr>
-          <p:cNvPr id="108" name="TeamName"/>
-          <p:cNvSpPr/>
-          <p:nvPr/>
-        </p:nvSpPr>
-        <p:spPr>
-          <a:xfrm>
-            <a:off x="1385880" y="3420517"/>
-            <a:ext cx="1105000" cy="300000"/>
-          </a:xfrm>
-          <a:prstGeom prst="rect">
-            <a:avLst/>
-          </a:prstGeom>
-          <a:noFill/>
-          <a:ln/>
-        </p:spPr>
-        <p:txBody>
-          <a:bodyPr wrap="square" lIns="0" tIns="0" rIns="0" bIns="0" rtlCol="0" anchor="t"/>
-          <a:lstStyle/>
-          <a:p>
-            <a:pPr marL="0" indent="0" algn="ctr">
-              <a:buNone/>
-            </a:pPr>
-            <a:r>
-              <a:rPr lang="en-US" sz="1300" b="1" kern="0" dirty="0">
-                <a:solidFill>
-                  <a:srgbClr val="0F1B2E"/>
-                </a:solidFill>
-                <a:latin typeface="Arial Black" pitchFamily="34" charset="0"/>
-              </a:rPr>
-              <a:t>Orange Tigers</a:t>
-            </a:r>
-            <a:endParaRPr lang="en-US" sz="1300" dirty="0"/>
-          </a:p>
-        </p:txBody>
-      </p:sp>
-      <p:sp>
-        <p:nvSpPr>
-          <p:cNvPr id="109" name="TeamName"/>
-          <p:cNvSpPr/>
-          <p:nvPr/>
-        </p:nvSpPr>
-        <p:spPr>
-          <a:xfrm>
-            <a:off x="2710880" y="3420517"/>
-            <a:ext cx="1105000" cy="300000"/>
-          </a:xfrm>
-          <a:prstGeom prst="rect">
-            <a:avLst/>
-          </a:prstGeom>
-          <a:noFill/>
-          <a:ln/>
-        </p:spPr>
-        <p:txBody>
-          <a:bodyPr wrap="square" lIns="0" tIns="0" rIns="0" bIns="0" rtlCol="0" anchor="t"/>
-          <a:lstStyle/>
-          <a:p>
-            <a:pPr marL="0" indent="0" algn="ctr">
-              <a:buNone/>
-            </a:pPr>
-            <a:r>
-              <a:rPr lang="en-US" sz="1300" b="1" kern="0" dirty="0">
-                <a:solidFill>
-                  <a:srgbClr val="0F1B2E"/>
-                </a:solidFill>
-                <a:latin typeface="Arial Black" pitchFamily="34" charset="0"/>
-              </a:rPr>
-              <a:t>Pikachu Power</a:t>
-            </a:r>
-            <a:endParaRPr lang="en-US" sz="1300" dirty="0"/>
-          </a:p>
-        </p:txBody>
-      </p:sp>
-      <p:sp>
-        <p:nvSpPr>
-          <p:cNvPr id="110" name="CardBG"/>
-          <p:cNvSpPr/>
-          <p:nvPr/>
-        </p:nvSpPr>
-        <p:spPr>
-          <a:xfrm>
-            <a:off x="5440680" y="1563920"/>
-            <a:ext cx="2550000" cy="2450000"/>
-          </a:xfrm>
-          <a:prstGeom prst="rect">
-            <a:avLst/>
-          </a:prstGeom>
-          <a:solidFill>
-            <a:srgbClr val="FFFFFF"/>
-          </a:solidFill>
-          <a:ln w="9525">
-            <a:solidFill>
-              <a:srgbClr val="E5DFCE"/>
-            </a:solidFill>
-            <a:prstDash val="solid"/>
-          </a:ln>
-          <a:effectLst>
-            <a:outerShdw blurRad="127000" dist="25400" dir="5400000" algn="bl" rotWithShape="0">
-              <a:srgbClr val="000000">
-                <a:alpha val="12000"/>
-              </a:srgbClr>
-            </a:outerShdw>
-          </a:effectLst>
-        </p:spPr>
-        <p:txBody>
-          <a:bodyPr/>
-          <a:lstStyle/>
-          <a:p>
-            <a:endParaRPr lang="en-US" dirty="0"/>
-          </a:p>
-        </p:txBody>
-      </p:sp>
-      <p:sp>
-        <p:nvSpPr>
-          <p:cNvPr id="111" name="CardStripe"/>
-          <p:cNvSpPr/>
-          <p:nvPr/>
-        </p:nvSpPr>
-        <p:spPr>
-          <a:xfrm>
-            <a:off x="5440680" y="1563920"/>
-            <a:ext cx="2550000" cy="73152"/>
-          </a:xfrm>
-          <a:prstGeom prst="rect">
-            <a:avLst/>
-          </a:prstGeom>
-          <a:solidFill>
-            <a:srgbClr val="1D4ED8"/>
-          </a:solidFill>
-          <a:ln w="12700">
-            <a:solidFill>
-              <a:srgbClr val="1D4ED8"/>
-            </a:solidFill>
-            <a:prstDash val="solid"/>
-          </a:ln>
-        </p:spPr>
-        <p:txBody>
-          <a:bodyPr/>
-          <a:lstStyle/>
-          <a:p>
-            <a:endParaRPr lang="en-US" dirty="0"/>
-          </a:p>
-        </p:txBody>
-      </p:sp>
-      <p:sp>
-        <p:nvSpPr>
-          <p:cNvPr id="112" name="Label"/>
-          <p:cNvSpPr/>
-          <p:nvPr/>
-        </p:nvSpPr>
-        <p:spPr>
-          <a:xfrm>
-            <a:off x="5623560" y="1728512"/>
-            <a:ext cx="2184240" cy="228600"/>
-          </a:xfrm>
-          <a:prstGeom prst="rect">
-            <a:avLst/>
-          </a:prstGeom>
-          <a:noFill/>
-          <a:ln/>
-        </p:spPr>
-        <p:txBody>
-          <a:bodyPr wrap="square" lIns="0" tIns="0" rIns="0" bIns="0" rtlCol="0" anchor="ctr"/>
-          <a:lstStyle/>
-          <a:p>
-            <a:pPr marL="0" indent="0" algn="l">
-              <a:buNone/>
-            </a:pPr>
-            <a:r>
-              <a:rPr lang="en-US" sz="1000" b="1" kern="0" spc="600" dirty="0">
-                <a:solidFill>
-                  <a:srgbClr val="5B6573"/>
-                </a:solidFill>
-                <a:latin typeface="Arial" pitchFamily="34" charset="0"/>
-              </a:rPr>
-              <a:t>COURT 2</a:t>
-            </a:r>
-            <a:endParaRPr lang="en-US" sz="1000" dirty="0"/>
-          </a:p>
-        </p:txBody>
-      </p:sp>
-      <p:sp>
-        <p:nvSpPr>
-          <p:cNvPr id="113" name="Label"/>
-          <p:cNvSpPr/>
-          <p:nvPr/>
-        </p:nvSpPr>
-        <p:spPr>
-          <a:xfrm>
-            <a:off x="5623560" y="1728512"/>
-            <a:ext cx="2184240" cy="228600"/>
-          </a:xfrm>
-          <a:prstGeom prst="rect">
-            <a:avLst/>
-          </a:prstGeom>
-          <a:noFill/>
-          <a:ln/>
-        </p:spPr>
-        <p:txBody>
-          <a:bodyPr wrap="square" lIns="0" tIns="0" rIns="0" bIns="0" rtlCol="0" anchor="ctr"/>
-          <a:lstStyle/>
-          <a:p>
-            <a:pPr marL="0" indent="0" algn="r">
-              <a:buNone/>
-            </a:pPr>
-            <a:r>
-              <a:rPr lang="en-US" sz="1000" b="1" kern="0" spc="600" dirty="0">
-                <a:solidFill>
-                  <a:srgbClr val="1D4ED8"/>
-                </a:solidFill>
-                <a:latin typeface="Arial" pitchFamily="34" charset="0"/>
-              </a:rPr>
-              <a:t>PW</a:t>
-            </a:r>
-            <a:endParaRPr lang="en-US" sz="1000" dirty="0"/>
-          </a:p>
-        </p:txBody>
-      </p:sp>
-      <p:pic>
-        <p:nvPicPr>
-          <p:cNvPr id="114" name="Jersey"/>
-          <p:cNvPicPr>
-            <a:picLocks noChangeAspect="1"/>
-          </p:cNvPicPr>
-          <p:nvPr/>
-        </p:nvPicPr>
-        <p:blipFill>
-          <a:blip r:embed="rId7"/>
-          <a:srcRect l="16071" t="10057" r="15179" b="8908"/>
-          <a:stretch>
-            <a:fillRect/>
-          </a:stretch>
-        </p:blipFill>
-        <p:spPr>
-          <a:xfrm>
-            <a:off x="5500680" y="1997112"/>
-            <a:ext cx="1105000" cy="1393405"/>
-          </a:xfrm>
-          <a:prstGeom prst="rect">
-            <a:avLst/>
-          </a:prstGeom>
-        </p:spPr>
-      </p:pic>
-      <p:pic>
-        <p:nvPicPr>
-          <p:cNvPr id="115" name="Jersey"/>
-          <p:cNvPicPr>
-            <a:picLocks noChangeAspect="1"/>
-          </p:cNvPicPr>
-          <p:nvPr/>
-        </p:nvPicPr>
-        <p:blipFill>
-          <a:blip r:embed="rId9"/>
-          <a:srcRect l="15774" t="8621" r="15476" b="10057"/>
-          <a:stretch>
-            <a:fillRect/>
-          </a:stretch>
-        </p:blipFill>
-        <p:spPr>
-          <a:xfrm>
-            <a:off x="6825680" y="1997112"/>
-            <a:ext cx="1105000" cy="1393405"/>
-          </a:xfrm>
-          <a:prstGeom prst="rect">
-            <a:avLst/>
-          </a:prstGeom>
-        </p:spPr>
-      </p:pic>
-      <p:sp>
-        <p:nvSpPr>
-          <p:cNvPr id="116" name="AtLabel"/>
-          <p:cNvSpPr/>
-          <p:nvPr/>
-        </p:nvSpPr>
-        <p:spPr>
-          <a:xfrm>
-            <a:off x="6605680" y="2583814"/>
-            <a:ext cx="220000" cy="220000"/>
-          </a:xfrm>
-          <a:prstGeom prst="rect">
-            <a:avLst/>
-          </a:prstGeom>
-          <a:noFill/>
-          <a:ln/>
-        </p:spPr>
-        <p:txBody>
-          <a:bodyPr wrap="none" lIns="0" tIns="0" rIns="0" bIns="0" rtlCol="0" anchor="ctr"/>
-          <a:lstStyle/>
-          <a:p>
-            <a:pPr marL="0" indent="0" algn="ctr">
-              <a:buNone/>
-            </a:pPr>
-            <a:r>
-              <a:rPr lang="en-US" sz="1200" i="1" kern="0" spc="0" dirty="0">
-                <a:solidFill>
-                  <a:srgbClr val="5B6573"/>
-                </a:solidFill>
-                <a:latin typeface="Arial" pitchFamily="34" charset="0"/>
-              </a:rPr>
-              <a:t>vs</a:t>
-            </a:r>
-            <a:endParaRPr lang="en-US" sz="1200" dirty="0"/>
-          </a:p>
-        </p:txBody>
-      </p:sp>
-      <p:sp>
-        <p:nvSpPr>
-          <p:cNvPr id="117" name="TeamName"/>
-          <p:cNvSpPr/>
-          <p:nvPr/>
-        </p:nvSpPr>
-        <p:spPr>
-          <a:xfrm>
-            <a:off x="5500680" y="3420517"/>
-            <a:ext cx="1105000" cy="300000"/>
-          </a:xfrm>
-          <a:prstGeom prst="rect">
-            <a:avLst/>
-          </a:prstGeom>
-          <a:noFill/>
-          <a:ln/>
-        </p:spPr>
-        <p:txBody>
-          <a:bodyPr wrap="square" lIns="0" tIns="0" rIns="0" bIns="0" rtlCol="0" anchor="t"/>
-          <a:lstStyle/>
-          <a:p>
-            <a:pPr marL="0" indent="0" algn="ctr">
-              <a:buNone/>
-            </a:pPr>
-            <a:r>
-              <a:rPr lang="en-US" sz="1300" b="1" kern="0" dirty="0">
-                <a:solidFill>
-                  <a:srgbClr val="0F1B2E"/>
-                </a:solidFill>
-                <a:latin typeface="Arial Black" pitchFamily="34" charset="0"/>
-              </a:rPr>
-              <a:t>Green Dragons</a:t>
-            </a:r>
-            <a:endParaRPr lang="en-US" sz="1300" dirty="0"/>
-          </a:p>
-        </p:txBody>
-      </p:sp>
-      <p:sp>
-        <p:nvSpPr>
-          <p:cNvPr id="118" name="TeamName"/>
-          <p:cNvSpPr/>
-          <p:nvPr/>
-        </p:nvSpPr>
-        <p:spPr>
-          <a:xfrm>
-            <a:off x="6825680" y="3420517"/>
-            <a:ext cx="1105000" cy="300000"/>
-          </a:xfrm>
-          <a:prstGeom prst="rect">
-            <a:avLst/>
-          </a:prstGeom>
-          <a:noFill/>
-          <a:ln/>
-        </p:spPr>
-        <p:txBody>
-          <a:bodyPr wrap="square" lIns="0" tIns="0" rIns="0" bIns="0" rtlCol="0" anchor="t"/>
-          <a:lstStyle/>
-          <a:p>
-            <a:pPr marL="0" indent="0" algn="ctr">
-              <a:buNone/>
-            </a:pPr>
-            <a:r>
-              <a:rPr lang="en-US" sz="1300" b="1" kern="0" dirty="0">
-                <a:solidFill>
-                  <a:srgbClr val="0F1B2E"/>
-                </a:solidFill>
-                <a:latin typeface="Arial Black" pitchFamily="34" charset="0"/>
-              </a:rPr>
-              <a:t>Blue Pokemon</a:t>
-            </a:r>
-            <a:endParaRPr lang="en-US" sz="1300" dirty="0"/>
-          </a:p>
-        </p:txBody>
-      </p:sp>
-      <p:sp>
-        <p:nvSpPr>
-          <p:cNvPr id="57" name="HRBottom"/>
-          <p:cNvSpPr/>
-          <p:nvPr/>
-        </p:nvSpPr>
-        <p:spPr>
-          <a:xfrm>
-            <a:off x="365760" y="4828032"/>
-            <a:ext cx="8412480" cy="0"/>
-          </a:xfrm>
-          <a:prstGeom prst="line">
-            <a:avLst/>
-          </a:prstGeom>
-          <a:noFill/>
-          <a:ln w="9525">
-            <a:solidFill>
-              <a:srgbClr val="C9BFAE"/>
-            </a:solidFill>
-            <a:prstDash val="solid"/>
-          </a:ln>
-        </p:spPr>
-        <p:txBody>
-          <a:bodyPr/>
-          <a:lstStyle/>
-          <a:p>
-            <a:endParaRPr lang="en-US"/>
-          </a:p>
-        </p:txBody>
-      </p:sp>
-      <p:sp>
-        <p:nvSpPr>
-          <p:cNvPr id="58" name="FooterL"/>
-          <p:cNvSpPr/>
-          <p:nvPr/>
-        </p:nvSpPr>
-        <p:spPr>
-          <a:xfrm>
-            <a:off x="365760" y="4892040"/>
-            <a:ext cx="3657600" cy="228600"/>
-          </a:xfrm>
-          <a:prstGeom prst="rect">
-            <a:avLst/>
-          </a:prstGeom>
-          <a:noFill/>
-          <a:ln/>
-        </p:spPr>
-        <p:txBody>
-          <a:bodyPr wrap="square" lIns="0" tIns="0" rIns="0" bIns="0" rtlCol="0" anchor="ctr"/>
-          <a:lstStyle/>
-          <a:p>
-            <a:pPr marL="0" indent="0" algn="l">
-              <a:buNone/>
-            </a:pPr>
-            <a:r>
-              <a:rPr lang="en-US" sz="900" b="1" kern="0" spc="800" dirty="0">
-                <a:solidFill>
-                  <a:srgbClr val="0F1B2E"/>
-                </a:solidFill>
-                <a:latin typeface="Arial Black" pitchFamily="34" charset="0"/>
-              </a:rPr>
-              <a:t>WACC SPORTS</a:t>
-            </a:r>
-            <a:endParaRPr lang="en-US" sz="900" dirty="0"/>
-          </a:p>
-        </p:txBody>
-      </p:sp>
-      <p:sp>
-        <p:nvSpPr>
-          <p:cNvPr id="59" name="FooterR"/>
-          <p:cNvSpPr/>
-          <p:nvPr/>
-        </p:nvSpPr>
-        <p:spPr>
-          <a:xfrm>
-            <a:off x="5120640" y="4892040"/>
-            <a:ext cx="3657600" cy="228600"/>
-          </a:xfrm>
-          <a:prstGeom prst="rect">
-            <a:avLst/>
-          </a:prstGeom>
-          <a:noFill/>
-          <a:ln/>
-        </p:spPr>
-        <p:txBody>
-          <a:bodyPr wrap="square" lIns="0" tIns="0" rIns="0" bIns="0" rtlCol="0" anchor="ctr"/>
-          <a:lstStyle/>
-          <a:p>
-            <a:pPr marL="0" indent="0" algn="r">
-              <a:buNone/>
-            </a:pPr>
-            <a:r>
-              <a:rPr lang="en-US" sz="900" b="1" kern="0" spc="800" dirty="0">
-                <a:solidFill>
-                  <a:srgbClr val="5B6573"/>
-                </a:solidFill>
-                <a:latin typeface="Arial" pitchFamily="34" charset="0"/>
-              </a:rPr>
-              <a:t>OCTOBER 17, 2026</a:t>
-            </a:r>
-            <a:endParaRPr lang="en-US" sz="900" dirty="0"/>
-          </a:p>
-        </p:txBody>
-      </p:sp>
-      <p:pic>
-        <p:nvPicPr>
-          <p:cNvPr id="998" name="Image 0" descr="preencoded.png"/>
-          <p:cNvPicPr>
-            <a:picLocks noChangeAspect="1"/>
-          </p:cNvPicPr>
-          <p:nvPr/>
-        </p:nvPicPr>
-        <p:blipFill>
-          <a:blip r:embed="rId6"/>
-          <a:stretch>
-            <a:fillRect/>
-          </a:stretch>
-        </p:blipFill>
-        <p:spPr>
-          <a:xfrm>
-            <a:off x="4046316" y="2254444"/>
-            <a:ext cx="1032376" cy="1032376"/>
-          </a:xfrm>
-          <a:prstGeom prst="rect">
-            <a:avLst/>
-          </a:prstGeom>
-        </p:spPr>
-      </p:pic>
-    </p:spTree>
-  </p:cSld>
-  <p:clrMapOvr>
-    <a:masterClrMapping/>
-  </p:clrMapOvr>
-</p:sld>
-</file>
-
-<file path=ppt/slides/slide5.xml><?xml version="1.0" encoding="utf-8"?>
-<p:sld xmlns:a="http://schemas.openxmlformats.org/drawingml/2006/main" xmlns:r="http://schemas.openxmlformats.org/officeDocument/2006/relationships" xmlns:p="http://schemas.openxmlformats.org/presentationml/2006/main">
-  <p:cSld>
-    <p:spTree>
-      <p:nvGrpSpPr>
-        <p:cNvPr id="1" name=""/>
-        <p:cNvGrpSpPr/>
-        <p:nvPr/>
-      </p:nvGrpSpPr>
-      <p:grpSpPr>
-        <a:xfrm>
-          <a:off x="0" y="0"/>
-          <a:ext cx="0" cy="0"/>
-          <a:chOff x="0" y="0"/>
-          <a:chExt cx="0" cy="0"/>
-        </a:xfrm>
-      </p:grpSpPr>
-      <p:sp>
-        <p:nvSpPr>
-          <p:cNvPr id="2" name="Time"/>
-          <p:cNvSpPr/>
-          <p:nvPr/>
-        </p:nvSpPr>
-        <p:spPr>
-          <a:xfrm>
-            <a:off x="365760" y="137160"/>
-            <a:ext cx="2743200" cy="502920"/>
-          </a:xfrm>
-          <a:prstGeom prst="rect">
-            <a:avLst/>
-          </a:prstGeom>
-          <a:noFill/>
-          <a:ln/>
-        </p:spPr>
-        <p:txBody>
-          <a:bodyPr wrap="square" lIns="0" tIns="0" rIns="0" bIns="0" rtlCol="0" anchor="ctr"/>
-          <a:lstStyle/>
-          <a:p>
-            <a:pPr marL="0" indent="0" algn="l">
-              <a:buNone/>
-            </a:pPr>
-            <a:r>
-              <a:rPr lang="en-US" sz="3000" b="1" kern="0" spc="100" dirty="0">
-                <a:solidFill>
-                  <a:srgbClr val="0F1B2E"/>
-                </a:solidFill>
-                <a:latin typeface="Arial Black" pitchFamily="34" charset="0"/>
-              </a:rPr>
-              <a:t>10 AM</a:t>
-            </a:r>
-            <a:endParaRPr lang="en-US" sz="3000" dirty="0"/>
-          </a:p>
-        </p:txBody>
-      </p:sp>
-      <p:grpSp>
-        <p:nvGrpSpPr>
-          <p:cNvPr id="60" name="PillGroup"/>
-          <p:cNvGrpSpPr/>
-          <p:nvPr/>
-        </p:nvGrpSpPr>
-        <p:grpSpPr>
-          <a:xfrm>
-            <a:off x="2838288" y="192416"/>
-            <a:ext cx="3467425" cy="429768"/>
-            <a:chOff x="2838288" y="114301"/>
-            <a:chExt cx="3467425" cy="429768"/>
-          </a:xfrm>
-        </p:grpSpPr>
-        <p:sp>
-          <p:nvSpPr>
-            <p:cNvPr id="3" name="Pill"/>
-            <p:cNvSpPr/>
-            <p:nvPr/>
-          </p:nvSpPr>
-          <p:spPr>
-            <a:xfrm>
-              <a:off x="2838288" y="114301"/>
-              <a:ext cx="3467425" cy="429768"/>
-            </a:xfrm>
-            <a:prstGeom prst="roundRect">
-              <a:avLst>
-                <a:gd name="adj" fmla="val 50000"/>
-              </a:avLst>
-            </a:prstGeom>
-            <a:solidFill>
-              <a:srgbClr val="1D4ED8"/>
-            </a:solidFill>
-            <a:ln w="12700">
-              <a:solidFill>
-                <a:srgbClr val="1D4ED8"/>
-              </a:solidFill>
-              <a:prstDash val="solid"/>
-            </a:ln>
-          </p:spPr>
-          <p:txBody>
-            <a:bodyPr/>
-            <a:lstStyle/>
-            <a:p>
-              <a:endParaRPr lang="en-US"/>
-            </a:p>
-          </p:txBody>
-        </p:sp>
-        <p:sp>
-          <p:nvSpPr>
-            <p:cNvPr id="4" name="PillText"/>
-            <p:cNvSpPr/>
-            <p:nvPr/>
-          </p:nvSpPr>
-          <p:spPr>
-            <a:xfrm>
-              <a:off x="3050073" y="164616"/>
-              <a:ext cx="3150000" cy="310896"/>
-            </a:xfrm>
-            <a:prstGeom prst="rect">
-              <a:avLst/>
-            </a:prstGeom>
-            <a:noFill/>
-            <a:ln/>
-          </p:spPr>
-          <p:txBody>
-            <a:bodyPr wrap="none" lIns="0" tIns="0" rIns="0" bIns="0" rtlCol="0" anchor="ctr"/>
-            <a:lstStyle/>
-            <a:p>
-              <a:pPr algn="ctr"/>
-              <a:r>
-                <a:rPr lang="en-US" sz="1100" b="1" kern="0" spc="600" dirty="0">
-                  <a:solidFill>
-                    <a:srgbClr val="FFFFFF"/>
-                  </a:solidFill>
-                  <a:latin typeface="Arial Black" pitchFamily="34" charset="0"/>
-                </a:rPr>
-                <a:t>MINOR BOYS</a:t>
-              </a:r>
-              <a:endParaRPr lang="en-US" sz="1100" dirty="0"/>
-            </a:p>
-          </p:txBody>
-        </p:sp>
-      </p:grpSp>
-      <p:sp>
-        <p:nvSpPr>
-          <p:cNvPr id="6" name="HRTop"/>
-          <p:cNvSpPr/>
-          <p:nvPr/>
-        </p:nvSpPr>
-        <p:spPr>
-          <a:xfrm>
-            <a:off x="365760" y="713232"/>
-            <a:ext cx="8412480" cy="0"/>
-          </a:xfrm>
-          <a:prstGeom prst="line">
-            <a:avLst/>
-          </a:prstGeom>
-          <a:noFill/>
-          <a:ln w="9525">
-            <a:solidFill>
-              <a:srgbClr val="C9BFAE"/>
-            </a:solidFill>
-            <a:prstDash val="solid"/>
-          </a:ln>
-        </p:spPr>
-        <p:txBody>
-          <a:bodyPr/>
-          <a:lstStyle/>
-          <a:p>
-            <a:endParaRPr lang="en-US"/>
-          </a:p>
-        </p:txBody>
-      </p:sp>
-      <p:sp>
-        <p:nvSpPr>
-          <p:cNvPr id="7" name="CourtRect"/>
-          <p:cNvSpPr/>
-          <p:nvPr/>
-        </p:nvSpPr>
-        <p:spPr>
-          <a:xfrm>
-            <a:off x="457200" y="914400"/>
-            <a:ext cx="8229600" cy="3749040"/>
-          </a:xfrm>
-          <a:prstGeom prst="rect">
-            <a:avLst/>
-          </a:prstGeom>
-          <a:ln w="19050">
-            <a:solidFill>
-              <a:srgbClr val="283241"/>
-            </a:solidFill>
-            <a:prstDash val="solid"/>
-          </a:ln>
-        </p:spPr>
-        <p:txBody>
-          <a:bodyPr/>
-          <a:lstStyle/>
-          <a:p>
-            <a:endParaRPr lang="en-US"/>
-          </a:p>
-        </p:txBody>
-      </p:sp>
-      <p:sp>
-        <p:nvSpPr>
-          <p:cNvPr id="1001" name="HalfCourtTop"/>
-          <p:cNvSpPr/>
-          <p:nvPr/>
-        </p:nvSpPr>
-        <p:spPr>
-          <a:xfrm>
-            <a:off x="4572000" y="914400"/>
-            <a:ext cx="0" cy="1340131"/>
-          </a:xfrm>
-          <a:prstGeom prst="line">
-            <a:avLst/>
-          </a:prstGeom>
-          <a:noFill/>
-          <a:ln w="15875">
-            <a:solidFill>
-              <a:srgbClr val="283241"/>
-            </a:solidFill>
-            <a:prstDash val="solid"/>
-          </a:ln>
-        </p:spPr>
-        <p:txBody>
-          <a:bodyPr/>
-          <a:lstStyle/>
-          <a:p>
-            <a:endParaRPr lang="en-US"/>
-          </a:p>
-        </p:txBody>
-      </p:sp>
-      <p:sp>
-        <p:nvSpPr>
-          <p:cNvPr id="1002" name="HalfCourtBottom"/>
-          <p:cNvSpPr/>
-          <p:nvPr/>
-        </p:nvSpPr>
-        <p:spPr>
-          <a:xfrm>
-            <a:off x="4572000" y="3286733"/>
-            <a:ext cx="0" cy="1376707"/>
-          </a:xfrm>
-          <a:prstGeom prst="line">
-            <a:avLst/>
-          </a:prstGeom>
-          <a:noFill/>
-          <a:ln w="15875">
-            <a:solidFill>
-              <a:srgbClr val="283241"/>
-            </a:solidFill>
-            <a:prstDash val="solid"/>
-          </a:ln>
-        </p:spPr>
-        <p:txBody>
-          <a:bodyPr/>
-          <a:lstStyle/>
-          <a:p>
-            <a:endParaRPr lang="en-US"/>
-          </a:p>
-        </p:txBody>
-      </p:sp>
-      <p:sp>
-        <p:nvSpPr>
-          <p:cNvPr id="10" name="LSquareL"/>
-          <p:cNvSpPr/>
-          <p:nvPr/>
-        </p:nvSpPr>
-        <p:spPr>
-          <a:xfrm>
-            <a:off x="457200" y="1889150"/>
-            <a:ext cx="1728216" cy="1799539"/>
-          </a:xfrm>
-          <a:prstGeom prst="rect">
-            <a:avLst/>
-          </a:prstGeom>
-          <a:ln w="15875">
-            <a:solidFill>
-              <a:srgbClr val="283241"/>
-            </a:solidFill>
-            <a:prstDash val="solid"/>
-          </a:ln>
-        </p:spPr>
-        <p:txBody>
-          <a:bodyPr/>
-          <a:lstStyle/>
-          <a:p>
-            <a:endParaRPr lang="en-US"/>
-          </a:p>
-        </p:txBody>
-      </p:sp>
-      <p:sp>
-        <p:nvSpPr>
-          <p:cNvPr id="11" name="LCircleL"/>
-          <p:cNvSpPr/>
-          <p:nvPr/>
-        </p:nvSpPr>
-        <p:spPr>
-          <a:xfrm>
-            <a:off x="1321637" y="1925141"/>
-            <a:ext cx="1727558" cy="1727558"/>
-          </a:xfrm>
-          <a:prstGeom prst="ellipse">
-            <a:avLst/>
-          </a:prstGeom>
-          <a:ln w="15875">
-            <a:solidFill>
-              <a:srgbClr val="283241"/>
-            </a:solidFill>
-            <a:prstDash val="dash"/>
-          </a:ln>
-        </p:spPr>
-        <p:txBody>
-          <a:bodyPr/>
-          <a:lstStyle/>
-          <a:p>
-            <a:endParaRPr lang="en-US"/>
-          </a:p>
-        </p:txBody>
-      </p:sp>
-      <p:sp>
-        <p:nvSpPr>
-          <p:cNvPr id="12" name="LMaskL"/>
-          <p:cNvSpPr/>
-          <p:nvPr/>
-        </p:nvSpPr>
-        <p:spPr>
-          <a:xfrm>
-            <a:off x="1312493" y="1879421"/>
-            <a:ext cx="882067" cy="1818998"/>
-          </a:xfrm>
-          <a:prstGeom prst="rect">
-            <a:avLst/>
-          </a:prstGeom>
-          <a:solidFill>
-            <a:srgbClr val="FFFFFF"/>
-          </a:solidFill>
-          <a:ln w="12700">
-            <a:solidFill>
-              <a:srgbClr val="FFFFFF"/>
-            </a:solidFill>
-            <a:prstDash val="solid"/>
-          </a:ln>
-        </p:spPr>
-        <p:txBody>
-          <a:bodyPr/>
-          <a:lstStyle/>
-          <a:p>
-            <a:endParaRPr lang="en-US"/>
-          </a:p>
-        </p:txBody>
-      </p:sp>
-      <p:sp>
-        <p:nvSpPr>
-          <p:cNvPr id="13" name="LSquareLOver"/>
-          <p:cNvSpPr/>
-          <p:nvPr/>
-        </p:nvSpPr>
-        <p:spPr>
-          <a:xfrm>
-            <a:off x="457200" y="1889150"/>
-            <a:ext cx="1728216" cy="1799539"/>
-          </a:xfrm>
-          <a:prstGeom prst="rect">
-            <a:avLst/>
-          </a:prstGeom>
-          <a:ln w="15875">
-            <a:solidFill>
-              <a:srgbClr val="283241"/>
-            </a:solidFill>
-            <a:prstDash val="solid"/>
-          </a:ln>
-        </p:spPr>
-        <p:txBody>
-          <a:bodyPr/>
-          <a:lstStyle/>
-          <a:p>
-            <a:endParaRPr lang="en-US"/>
-          </a:p>
-        </p:txBody>
-      </p:sp>
-      <p:sp>
-        <p:nvSpPr>
-          <p:cNvPr id="24" name="RSquareR"/>
-          <p:cNvSpPr/>
-          <p:nvPr/>
-        </p:nvSpPr>
-        <p:spPr>
-          <a:xfrm>
-            <a:off x="6958584" y="1889150"/>
-            <a:ext cx="1728216" cy="1799539"/>
-          </a:xfrm>
-          <a:prstGeom prst="rect">
-            <a:avLst/>
-          </a:prstGeom>
-          <a:ln w="15875">
-            <a:solidFill>
-              <a:srgbClr val="283241"/>
-            </a:solidFill>
-            <a:prstDash val="solid"/>
-          </a:ln>
-        </p:spPr>
-        <p:txBody>
-          <a:bodyPr/>
-          <a:lstStyle/>
-          <a:p>
-            <a:endParaRPr lang="en-US"/>
-          </a:p>
-        </p:txBody>
-      </p:sp>
-      <p:sp>
-        <p:nvSpPr>
-          <p:cNvPr id="25" name="RCircleR"/>
-          <p:cNvSpPr/>
-          <p:nvPr/>
-        </p:nvSpPr>
-        <p:spPr>
-          <a:xfrm>
-            <a:off x="6094805" y="1925141"/>
-            <a:ext cx="1727558" cy="1727558"/>
-          </a:xfrm>
-          <a:prstGeom prst="ellipse">
-            <a:avLst/>
-          </a:prstGeom>
-          <a:ln w="15875">
-            <a:solidFill>
-              <a:srgbClr val="283241"/>
-            </a:solidFill>
-            <a:prstDash val="dash"/>
-          </a:ln>
-        </p:spPr>
-        <p:txBody>
-          <a:bodyPr/>
-          <a:lstStyle/>
-          <a:p>
-            <a:endParaRPr lang="en-US"/>
-          </a:p>
-        </p:txBody>
-      </p:sp>
-      <p:sp>
-        <p:nvSpPr>
-          <p:cNvPr id="26" name="RMaskR"/>
-          <p:cNvSpPr/>
-          <p:nvPr/>
-        </p:nvSpPr>
-        <p:spPr>
-          <a:xfrm>
-            <a:off x="6958584" y="1879421"/>
-            <a:ext cx="882067" cy="1818998"/>
-          </a:xfrm>
-          <a:prstGeom prst="rect">
-            <a:avLst/>
-          </a:prstGeom>
-          <a:solidFill>
-            <a:srgbClr val="FFFFFF"/>
-          </a:solidFill>
-          <a:ln w="12700">
-            <a:solidFill>
-              <a:srgbClr val="FFFFFF"/>
-            </a:solidFill>
-            <a:prstDash val="solid"/>
-          </a:ln>
-        </p:spPr>
-        <p:txBody>
-          <a:bodyPr/>
-          <a:lstStyle/>
-          <a:p>
-            <a:endParaRPr lang="en-US"/>
-          </a:p>
-        </p:txBody>
-      </p:sp>
-      <p:sp>
-        <p:nvSpPr>
-          <p:cNvPr id="27" name="RSquareROver"/>
-          <p:cNvSpPr/>
-          <p:nvPr/>
-        </p:nvSpPr>
-        <p:spPr>
-          <a:xfrm>
-            <a:off x="6958584" y="1889150"/>
-            <a:ext cx="1728216" cy="1799539"/>
-          </a:xfrm>
-          <a:prstGeom prst="rect">
-            <a:avLst/>
-          </a:prstGeom>
-          <a:ln w="15875">
-            <a:solidFill>
-              <a:srgbClr val="283241"/>
-            </a:solidFill>
-            <a:prstDash val="solid"/>
-          </a:ln>
-        </p:spPr>
-        <p:txBody>
-          <a:bodyPr/>
-          <a:lstStyle/>
-          <a:p>
-            <a:endParaRPr lang="en-US"/>
-          </a:p>
-        </p:txBody>
-      </p:sp>
-      <p:sp>
-        <p:nvSpPr>
-          <p:cNvPr id="101" name="CardBG"/>
-          <p:cNvSpPr/>
-          <p:nvPr/>
-        </p:nvSpPr>
-        <p:spPr>
-          <a:xfrm>
-            <a:off x="1325880" y="1563920"/>
-            <a:ext cx="2550000" cy="2450000"/>
-          </a:xfrm>
-          <a:prstGeom prst="rect">
-            <a:avLst/>
-          </a:prstGeom>
-          <a:solidFill>
-            <a:srgbClr val="FFFFFF"/>
-          </a:solidFill>
-          <a:ln w="9525">
-            <a:solidFill>
-              <a:srgbClr val="E5DFCE"/>
-            </a:solidFill>
-            <a:prstDash val="solid"/>
-          </a:ln>
-          <a:effectLst>
-            <a:outerShdw blurRad="127000" dist="25400" dir="5400000" algn="bl" rotWithShape="0">
-              <a:srgbClr val="000000">
-                <a:alpha val="12000"/>
-              </a:srgbClr>
-            </a:outerShdw>
-          </a:effectLst>
-        </p:spPr>
-        <p:txBody>
-          <a:bodyPr/>
-          <a:lstStyle/>
-          <a:p>
-            <a:endParaRPr lang="en-US" dirty="0"/>
-          </a:p>
-        </p:txBody>
-      </p:sp>
-      <p:sp>
-        <p:nvSpPr>
-          <p:cNvPr id="102" name="CardStripe"/>
-          <p:cNvSpPr/>
-          <p:nvPr/>
-        </p:nvSpPr>
-        <p:spPr>
-          <a:xfrm>
-            <a:off x="1325880" y="1563920"/>
-            <a:ext cx="2550000" cy="73152"/>
-          </a:xfrm>
-          <a:prstGeom prst="rect">
-            <a:avLst/>
-          </a:prstGeom>
-          <a:solidFill>
-            <a:srgbClr val="1D4ED8"/>
-          </a:solidFill>
-          <a:ln w="12700">
-            <a:solidFill>
-              <a:srgbClr val="1D4ED8"/>
-            </a:solidFill>
-            <a:prstDash val="solid"/>
-          </a:ln>
-        </p:spPr>
-        <p:txBody>
-          <a:bodyPr/>
-          <a:lstStyle/>
-          <a:p>
-            <a:endParaRPr lang="en-US" dirty="0"/>
-          </a:p>
-        </p:txBody>
-      </p:sp>
-      <p:sp>
-        <p:nvSpPr>
-          <p:cNvPr id="103" name="Label"/>
-          <p:cNvSpPr/>
-          <p:nvPr/>
-        </p:nvSpPr>
-        <p:spPr>
-          <a:xfrm>
-            <a:off x="1508760" y="1728512"/>
-            <a:ext cx="2184240" cy="228600"/>
-          </a:xfrm>
-          <a:prstGeom prst="rect">
-            <a:avLst/>
-          </a:prstGeom>
-          <a:noFill/>
-          <a:ln/>
-        </p:spPr>
-        <p:txBody>
-          <a:bodyPr wrap="square" lIns="0" tIns="0" rIns="0" bIns="0" rtlCol="0" anchor="ctr"/>
-          <a:lstStyle/>
-          <a:p>
-            <a:pPr marL="0" indent="0" algn="l">
-              <a:buNone/>
-            </a:pPr>
-            <a:r>
-              <a:rPr lang="en-US" sz="1000" b="1" kern="0" spc="600" dirty="0">
-                <a:solidFill>
-                  <a:srgbClr val="5B6573"/>
-                </a:solidFill>
-                <a:latin typeface="Arial" pitchFamily="34" charset="0"/>
-              </a:rPr>
-              <a:t>COURT 1</a:t>
-            </a:r>
-            <a:endParaRPr lang="en-US" sz="1000" dirty="0"/>
-          </a:p>
-        </p:txBody>
-      </p:sp>
-      <p:sp>
-        <p:nvSpPr>
-          <p:cNvPr id="104" name="Label"/>
-          <p:cNvSpPr/>
-          <p:nvPr/>
-        </p:nvSpPr>
-        <p:spPr>
-          <a:xfrm>
-            <a:off x="1508760" y="1728512"/>
-            <a:ext cx="2184240" cy="228600"/>
-          </a:xfrm>
-          <a:prstGeom prst="rect">
-            <a:avLst/>
-          </a:prstGeom>
-          <a:noFill/>
-          <a:ln/>
-        </p:spPr>
-        <p:txBody>
-          <a:bodyPr wrap="square" lIns="0" tIns="0" rIns="0" bIns="0" rtlCol="0" anchor="ctr"/>
-          <a:lstStyle/>
-          <a:p>
-            <a:pPr marL="0" indent="0" algn="r">
-              <a:buNone/>
-            </a:pPr>
-            <a:r>
-              <a:rPr lang="en-US" sz="1000" b="1" kern="0" spc="600" dirty="0">
-                <a:solidFill>
-                  <a:srgbClr val="1D4ED8"/>
-                </a:solidFill>
-                <a:latin typeface="Arial" pitchFamily="34" charset="0"/>
-              </a:rPr>
-              <a:t>MB</a:t>
-            </a:r>
-            <a:endParaRPr lang="en-US" sz="1000" dirty="0"/>
-          </a:p>
-        </p:txBody>
-      </p:sp>
-      <p:pic>
-        <p:nvPicPr>
-          <p:cNvPr id="105" name="Jersey"/>
-          <p:cNvPicPr>
-            <a:picLocks noChangeAspect="1"/>
-          </p:cNvPicPr>
-          <p:nvPr/>
-        </p:nvPicPr>
-        <p:blipFill>
-          <a:blip r:embed="rId4"/>
-          <a:srcRect l="16071" t="8621" r="15774" b="10057"/>
-          <a:stretch>
-            <a:fillRect/>
-          </a:stretch>
-        </p:blipFill>
-        <p:spPr>
-          <a:xfrm>
-            <a:off x="1385880" y="1997112"/>
-            <a:ext cx="1105000" cy="1393405"/>
-          </a:xfrm>
-          <a:prstGeom prst="rect">
-            <a:avLst/>
-          </a:prstGeom>
-        </p:spPr>
-      </p:pic>
-      <p:pic>
-        <p:nvPicPr>
-          <p:cNvPr id="106" name="Jersey"/>
-          <p:cNvPicPr>
-            <a:picLocks noChangeAspect="1"/>
-          </p:cNvPicPr>
-          <p:nvPr/>
-        </p:nvPicPr>
-        <p:blipFill>
-          <a:blip r:embed="rId3"/>
-          <a:srcRect l="15774" t="8621" r="15476" b="10057"/>
-          <a:stretch>
-            <a:fillRect/>
-          </a:stretch>
-        </p:blipFill>
-        <p:spPr>
-          <a:xfrm>
-            <a:off x="2710880" y="1997112"/>
-            <a:ext cx="1105000" cy="1393405"/>
-          </a:xfrm>
-          <a:prstGeom prst="rect">
-            <a:avLst/>
-          </a:prstGeom>
-        </p:spPr>
-      </p:pic>
-      <p:sp>
-        <p:nvSpPr>
-          <p:cNvPr id="107" name="AtLabel"/>
-          <p:cNvSpPr/>
-          <p:nvPr/>
-        </p:nvSpPr>
-        <p:spPr>
-          <a:xfrm>
-            <a:off x="2490880" y="2583814"/>
-            <a:ext cx="220000" cy="220000"/>
-          </a:xfrm>
-          <a:prstGeom prst="rect">
-            <a:avLst/>
-          </a:prstGeom>
-          <a:noFill/>
-          <a:ln/>
-        </p:spPr>
-        <p:txBody>
-          <a:bodyPr wrap="none" lIns="0" tIns="0" rIns="0" bIns="0" rtlCol="0" anchor="ctr"/>
-          <a:lstStyle/>
-          <a:p>
-            <a:pPr marL="0" indent="0" algn="ctr">
-              <a:buNone/>
-            </a:pPr>
-            <a:r>
-              <a:rPr lang="en-US" sz="1200" i="1" kern="0" spc="0" dirty="0">
-                <a:solidFill>
-                  <a:srgbClr val="5B6573"/>
-                </a:solidFill>
-                <a:latin typeface="Arial" pitchFamily="34" charset="0"/>
-              </a:rPr>
-              <a:t>vs</a:t>
-            </a:r>
-            <a:endParaRPr lang="en-US" sz="1200" dirty="0"/>
-          </a:p>
-        </p:txBody>
-      </p:sp>
-      <p:sp>
-        <p:nvSpPr>
-          <p:cNvPr id="108" name="TeamName"/>
-          <p:cNvSpPr/>
-          <p:nvPr/>
-        </p:nvSpPr>
-        <p:spPr>
-          <a:xfrm>
-            <a:off x="1385880" y="3420517"/>
-            <a:ext cx="1105000" cy="300000"/>
-          </a:xfrm>
-          <a:prstGeom prst="rect">
-            <a:avLst/>
-          </a:prstGeom>
-          <a:noFill/>
-          <a:ln/>
-        </p:spPr>
-        <p:txBody>
-          <a:bodyPr wrap="square" lIns="0" tIns="0" rIns="0" bIns="0" rtlCol="0" anchor="t"/>
-          <a:lstStyle/>
-          <a:p>
-            <a:pPr marL="0" indent="0" algn="ctr">
-              <a:buNone/>
-            </a:pPr>
-            <a:r>
-              <a:rPr lang="en-US" sz="1600" b="1" kern="0" dirty="0">
-                <a:solidFill>
-                  <a:srgbClr val="0F1B2E"/>
-                </a:solidFill>
-                <a:latin typeface="Arial Black" pitchFamily="34" charset="0"/>
-              </a:rPr>
-              <a:t>Team 4</a:t>
-            </a:r>
-            <a:endParaRPr lang="en-US" sz="1600" dirty="0"/>
-          </a:p>
-        </p:txBody>
-      </p:sp>
-      <p:sp>
-        <p:nvSpPr>
-          <p:cNvPr id="109" name="TeamName"/>
-          <p:cNvSpPr/>
-          <p:nvPr/>
-        </p:nvSpPr>
-        <p:spPr>
-          <a:xfrm>
-            <a:off x="2710880" y="3420517"/>
-            <a:ext cx="1105000" cy="300000"/>
-          </a:xfrm>
-          <a:prstGeom prst="rect">
-            <a:avLst/>
-          </a:prstGeom>
-          <a:noFill/>
-          <a:ln/>
-        </p:spPr>
-        <p:txBody>
-          <a:bodyPr wrap="square" lIns="0" tIns="0" rIns="0" bIns="0" rtlCol="0" anchor="t"/>
-          <a:lstStyle/>
-          <a:p>
-            <a:pPr marL="0" indent="0" algn="ctr">
-              <a:buNone/>
-            </a:pPr>
-            <a:r>
-              <a:rPr lang="en-US" sz="1300" b="1" kern="0" dirty="0">
-                <a:solidFill>
-                  <a:srgbClr val="0F1B2E"/>
-                </a:solidFill>
-                <a:latin typeface="Arial Black" pitchFamily="34" charset="0"/>
-              </a:rPr>
-              <a:t>Pink Doughnuts</a:t>
-            </a:r>
-            <a:endParaRPr lang="en-US" sz="1300" dirty="0"/>
-          </a:p>
-        </p:txBody>
-      </p:sp>
-      <p:sp>
-        <p:nvSpPr>
-          <p:cNvPr id="110" name="CardBG"/>
-          <p:cNvSpPr/>
-          <p:nvPr/>
-        </p:nvSpPr>
-        <p:spPr>
-          <a:xfrm>
-            <a:off x="5440680" y="1563920"/>
-            <a:ext cx="2550000" cy="2450000"/>
-          </a:xfrm>
-          <a:prstGeom prst="rect">
-            <a:avLst/>
-          </a:prstGeom>
-          <a:solidFill>
-            <a:srgbClr val="FFFFFF"/>
-          </a:solidFill>
-          <a:ln w="9525">
-            <a:solidFill>
-              <a:srgbClr val="E5DFCE"/>
-            </a:solidFill>
-            <a:prstDash val="solid"/>
-          </a:ln>
-          <a:effectLst>
-            <a:outerShdw blurRad="127000" dist="25400" dir="5400000" algn="bl" rotWithShape="0">
-              <a:srgbClr val="000000">
-                <a:alpha val="12000"/>
-              </a:srgbClr>
-            </a:outerShdw>
-          </a:effectLst>
-        </p:spPr>
-        <p:txBody>
-          <a:bodyPr/>
-          <a:lstStyle/>
-          <a:p>
-            <a:endParaRPr lang="en-US" dirty="0"/>
-          </a:p>
-        </p:txBody>
-      </p:sp>
-      <p:sp>
-        <p:nvSpPr>
-          <p:cNvPr id="111" name="CardStripe"/>
-          <p:cNvSpPr/>
-          <p:nvPr/>
-        </p:nvSpPr>
-        <p:spPr>
-          <a:xfrm>
-            <a:off x="5440680" y="1563920"/>
-            <a:ext cx="2550000" cy="73152"/>
-          </a:xfrm>
-          <a:prstGeom prst="rect">
-            <a:avLst/>
-          </a:prstGeom>
-          <a:solidFill>
-            <a:srgbClr val="1D4ED8"/>
-          </a:solidFill>
-          <a:ln w="12700">
-            <a:solidFill>
-              <a:srgbClr val="1D4ED8"/>
-            </a:solidFill>
-            <a:prstDash val="solid"/>
-          </a:ln>
-        </p:spPr>
-        <p:txBody>
-          <a:bodyPr/>
-          <a:lstStyle/>
-          <a:p>
-            <a:endParaRPr lang="en-US" dirty="0"/>
-          </a:p>
-        </p:txBody>
-      </p:sp>
-      <p:sp>
-        <p:nvSpPr>
-          <p:cNvPr id="112" name="Label"/>
-          <p:cNvSpPr/>
-          <p:nvPr/>
-        </p:nvSpPr>
-        <p:spPr>
-          <a:xfrm>
-            <a:off x="5623560" y="1728512"/>
-            <a:ext cx="2184240" cy="228600"/>
-          </a:xfrm>
-          <a:prstGeom prst="rect">
-            <a:avLst/>
-          </a:prstGeom>
-          <a:noFill/>
-          <a:ln/>
-        </p:spPr>
-        <p:txBody>
-          <a:bodyPr wrap="square" lIns="0" tIns="0" rIns="0" bIns="0" rtlCol="0" anchor="ctr"/>
-          <a:lstStyle/>
-          <a:p>
-            <a:pPr marL="0" indent="0" algn="l">
-              <a:buNone/>
-            </a:pPr>
-            <a:r>
-              <a:rPr lang="en-US" sz="1000" b="1" kern="0" spc="600" dirty="0">
-                <a:solidFill>
-                  <a:srgbClr val="5B6573"/>
-                </a:solidFill>
-                <a:latin typeface="Arial" pitchFamily="34" charset="0"/>
-              </a:rPr>
-              <a:t>COURT 2</a:t>
-            </a:r>
-            <a:endParaRPr lang="en-US" sz="1000" dirty="0"/>
-          </a:p>
-        </p:txBody>
-      </p:sp>
-      <p:sp>
-        <p:nvSpPr>
-          <p:cNvPr id="113" name="Label"/>
-          <p:cNvSpPr/>
-          <p:nvPr/>
-        </p:nvSpPr>
-        <p:spPr>
-          <a:xfrm>
-            <a:off x="5623560" y="1728512"/>
-            <a:ext cx="2184240" cy="228600"/>
-          </a:xfrm>
-          <a:prstGeom prst="rect">
-            <a:avLst/>
-          </a:prstGeom>
-          <a:noFill/>
-          <a:ln/>
-        </p:spPr>
-        <p:txBody>
-          <a:bodyPr wrap="square" lIns="0" tIns="0" rIns="0" bIns="0" rtlCol="0" anchor="ctr"/>
-          <a:lstStyle/>
-          <a:p>
-            <a:pPr marL="0" indent="0" algn="r">
-              <a:buNone/>
-            </a:pPr>
-            <a:r>
-              <a:rPr lang="en-US" sz="1000" b="1" kern="0" spc="600" dirty="0">
-                <a:solidFill>
-                  <a:srgbClr val="1D4ED8"/>
-                </a:solidFill>
-                <a:latin typeface="Arial" pitchFamily="34" charset="0"/>
-              </a:rPr>
-              <a:t>MB</a:t>
-            </a:r>
-            <a:endParaRPr lang="en-US" sz="1000" dirty="0"/>
-          </a:p>
-        </p:txBody>
-      </p:sp>
-      <p:pic>
-        <p:nvPicPr>
-          <p:cNvPr id="114" name="Jersey"/>
-          <p:cNvPicPr>
-            <a:picLocks noChangeAspect="1"/>
-          </p:cNvPicPr>
-          <p:nvPr/>
-        </p:nvPicPr>
-        <p:blipFill>
-          <a:blip r:embed="rId2"/>
-          <a:srcRect l="15476" t="8908" r="15476" b="10057"/>
-          <a:stretch>
-            <a:fillRect/>
-          </a:stretch>
-        </p:blipFill>
-        <p:spPr>
-          <a:xfrm>
-            <a:off x="5500680" y="1997112"/>
-            <a:ext cx="1105000" cy="1393405"/>
-          </a:xfrm>
-          <a:prstGeom prst="rect">
-            <a:avLst/>
-          </a:prstGeom>
-        </p:spPr>
-      </p:pic>
-      <p:pic>
-        <p:nvPicPr>
-          <p:cNvPr id="115" name="Jersey"/>
-          <p:cNvPicPr>
-            <a:picLocks noChangeAspect="1"/>
-          </p:cNvPicPr>
-          <p:nvPr/>
-        </p:nvPicPr>
-        <p:blipFill>
-          <a:blip r:embed="rId5"/>
-          <a:srcRect l="15179" t="8908" r="15179" b="9770"/>
-          <a:stretch>
-            <a:fillRect/>
-          </a:stretch>
-        </p:blipFill>
-        <p:spPr>
-          <a:xfrm>
-            <a:off x="6825680" y="1997112"/>
-            <a:ext cx="1105000" cy="1393405"/>
-          </a:xfrm>
-          <a:prstGeom prst="rect">
-            <a:avLst/>
-          </a:prstGeom>
-        </p:spPr>
-      </p:pic>
-      <p:sp>
-        <p:nvSpPr>
-          <p:cNvPr id="116" name="AtLabel"/>
-          <p:cNvSpPr/>
-          <p:nvPr/>
-        </p:nvSpPr>
-        <p:spPr>
-          <a:xfrm>
-            <a:off x="6605680" y="2583814"/>
-            <a:ext cx="220000" cy="220000"/>
-          </a:xfrm>
-          <a:prstGeom prst="rect">
-            <a:avLst/>
-          </a:prstGeom>
-          <a:noFill/>
-          <a:ln/>
-        </p:spPr>
-        <p:txBody>
-          <a:bodyPr wrap="none" lIns="0" tIns="0" rIns="0" bIns="0" rtlCol="0" anchor="ctr"/>
-          <a:lstStyle/>
-          <a:p>
-            <a:pPr marL="0" indent="0" algn="ctr">
-              <a:buNone/>
-            </a:pPr>
-            <a:r>
-              <a:rPr lang="en-US" sz="1200" i="1" kern="0" spc="0" dirty="0">
-                <a:solidFill>
-                  <a:srgbClr val="5B6573"/>
-                </a:solidFill>
-                <a:latin typeface="Arial" pitchFamily="34" charset="0"/>
-              </a:rPr>
-              <a:t>vs</a:t>
-            </a:r>
-            <a:endParaRPr lang="en-US" sz="1200" dirty="0"/>
-          </a:p>
-        </p:txBody>
-      </p:sp>
-      <p:sp>
-        <p:nvSpPr>
-          <p:cNvPr id="117" name="TeamName"/>
-          <p:cNvSpPr/>
-          <p:nvPr/>
-        </p:nvSpPr>
-        <p:spPr>
-          <a:xfrm>
-            <a:off x="5500680" y="3420517"/>
-            <a:ext cx="1105000" cy="300000"/>
-          </a:xfrm>
-          <a:prstGeom prst="rect">
-            <a:avLst/>
-          </a:prstGeom>
-          <a:noFill/>
-          <a:ln/>
-        </p:spPr>
-        <p:txBody>
-          <a:bodyPr wrap="square" lIns="0" tIns="0" rIns="0" bIns="0" rtlCol="0" anchor="t"/>
-          <a:lstStyle/>
-          <a:p>
-            <a:pPr marL="0" indent="0" algn="ctr">
-              <a:buNone/>
-            </a:pPr>
-            <a:r>
-              <a:rPr lang="en-US" sz="1600" b="1" kern="0" dirty="0">
-                <a:solidFill>
-                  <a:srgbClr val="0F1B2E"/>
-                </a:solidFill>
-                <a:latin typeface="Arial Black" pitchFamily="34" charset="0"/>
-              </a:rPr>
-              <a:t>Team 3</a:t>
-            </a:r>
-            <a:endParaRPr lang="en-US" sz="1600" dirty="0"/>
-          </a:p>
-        </p:txBody>
-      </p:sp>
-      <p:sp>
-        <p:nvSpPr>
-          <p:cNvPr id="118" name="TeamName"/>
-          <p:cNvSpPr/>
-          <p:nvPr/>
-        </p:nvSpPr>
-        <p:spPr>
-          <a:xfrm>
-            <a:off x="6825680" y="3420517"/>
-            <a:ext cx="1105000" cy="300000"/>
-          </a:xfrm>
-          <a:prstGeom prst="rect">
-            <a:avLst/>
-          </a:prstGeom>
-          <a:noFill/>
-          <a:ln/>
-        </p:spPr>
-        <p:txBody>
-          <a:bodyPr wrap="square" lIns="0" tIns="0" rIns="0" bIns="0" rtlCol="0" anchor="t"/>
-          <a:lstStyle/>
-          <a:p>
-            <a:pPr marL="0" indent="0" algn="ctr">
-              <a:buNone/>
-            </a:pPr>
-            <a:r>
-              <a:rPr lang="en-US" sz="1600" b="1" kern="0" dirty="0">
-                <a:solidFill>
-                  <a:srgbClr val="0F1B2E"/>
-                </a:solidFill>
-                <a:latin typeface="Arial Black" pitchFamily="34" charset="0"/>
-              </a:rPr>
-              <a:t>Minions</a:t>
-            </a:r>
-            <a:endParaRPr lang="en-US" sz="1600" dirty="0"/>
-          </a:p>
-        </p:txBody>
-      </p:sp>
-      <p:sp>
-        <p:nvSpPr>
-          <p:cNvPr id="57" name="HRBottom"/>
-          <p:cNvSpPr/>
-          <p:nvPr/>
-        </p:nvSpPr>
-        <p:spPr>
-          <a:xfrm>
-            <a:off x="365760" y="4828032"/>
-            <a:ext cx="8412480" cy="0"/>
-          </a:xfrm>
-          <a:prstGeom prst="line">
-            <a:avLst/>
-          </a:prstGeom>
-          <a:noFill/>
-          <a:ln w="9525">
-            <a:solidFill>
-              <a:srgbClr val="C9BFAE"/>
-            </a:solidFill>
-            <a:prstDash val="solid"/>
-          </a:ln>
-        </p:spPr>
-        <p:txBody>
-          <a:bodyPr/>
-          <a:lstStyle/>
-          <a:p>
-            <a:endParaRPr lang="en-US"/>
-          </a:p>
-        </p:txBody>
-      </p:sp>
-      <p:sp>
-        <p:nvSpPr>
-          <p:cNvPr id="58" name="FooterL"/>
-          <p:cNvSpPr/>
-          <p:nvPr/>
-        </p:nvSpPr>
-        <p:spPr>
-          <a:xfrm>
-            <a:off x="365760" y="4892040"/>
-            <a:ext cx="3657600" cy="228600"/>
-          </a:xfrm>
-          <a:prstGeom prst="rect">
-            <a:avLst/>
-          </a:prstGeom>
-          <a:noFill/>
-          <a:ln/>
-        </p:spPr>
-        <p:txBody>
-          <a:bodyPr wrap="square" lIns="0" tIns="0" rIns="0" bIns="0" rtlCol="0" anchor="ctr"/>
-          <a:lstStyle/>
-          <a:p>
-            <a:pPr marL="0" indent="0" algn="l">
-              <a:buNone/>
-            </a:pPr>
-            <a:r>
-              <a:rPr lang="en-US" sz="900" b="1" kern="0" spc="800" dirty="0">
-                <a:solidFill>
-                  <a:srgbClr val="0F1B2E"/>
-                </a:solidFill>
-                <a:latin typeface="Arial Black" pitchFamily="34" charset="0"/>
-              </a:rPr>
-              <a:t>WACC SPORTS</a:t>
-            </a:r>
-            <a:endParaRPr lang="en-US" sz="900" dirty="0"/>
-          </a:p>
-        </p:txBody>
-      </p:sp>
-      <p:sp>
-        <p:nvSpPr>
-          <p:cNvPr id="59" name="FooterR"/>
-          <p:cNvSpPr/>
-          <p:nvPr/>
-        </p:nvSpPr>
-        <p:spPr>
-          <a:xfrm>
-            <a:off x="5120640" y="4892040"/>
-            <a:ext cx="3657600" cy="228600"/>
-          </a:xfrm>
-          <a:prstGeom prst="rect">
-            <a:avLst/>
-          </a:prstGeom>
-          <a:noFill/>
-          <a:ln/>
-        </p:spPr>
-        <p:txBody>
-          <a:bodyPr wrap="square" lIns="0" tIns="0" rIns="0" bIns="0" rtlCol="0" anchor="ctr"/>
-          <a:lstStyle/>
-          <a:p>
-            <a:pPr marL="0" indent="0" algn="r">
-              <a:buNone/>
-            </a:pPr>
-            <a:r>
-              <a:rPr lang="en-US" sz="900" b="1" kern="0" spc="800" dirty="0">
-                <a:solidFill>
-                  <a:srgbClr val="5B6573"/>
-                </a:solidFill>
-                <a:latin typeface="Arial" pitchFamily="34" charset="0"/>
-              </a:rPr>
-              <a:t>OCTOBER 17, 2026</a:t>
-            </a:r>
-            <a:endParaRPr lang="en-US" sz="900" dirty="0"/>
-          </a:p>
-        </p:txBody>
-      </p:sp>
-      <p:pic>
-        <p:nvPicPr>
-          <p:cNvPr id="998" name="Image 0" descr="preencoded.png"/>
-          <p:cNvPicPr>
-            <a:picLocks noChangeAspect="1"/>
-          </p:cNvPicPr>
-          <p:nvPr/>
-        </p:nvPicPr>
-        <p:blipFill>
-          <a:blip r:embed="rId6"/>
-          <a:stretch>
-            <a:fillRect/>
-          </a:stretch>
-        </p:blipFill>
-        <p:spPr>
-          <a:xfrm>
-            <a:off x="4046316" y="2254444"/>
-            <a:ext cx="1032376" cy="1032376"/>
-          </a:xfrm>
-          <a:prstGeom prst="rect">
-            <a:avLst/>
-          </a:prstGeom>
-        </p:spPr>
-      </p:pic>
     </p:spTree>
   </p:cSld>
   <p:clrMapOvr>
